--- a/assets/powerpoints/module-sante/A3-les-mots-de-la-sante.pptx
+++ b/assets/powerpoints/module-sante/A3-les-mots-de-la-sante.pptx
@@ -16,6 +16,13 @@
     <p:sldId id="264" r:id="rId16"/>
     <p:sldId id="265" r:id="rId17"/>
     <p:sldId id="266" r:id="rId18"/>
+    <p:sldId id="267" r:id="rId19"/>
+    <p:sldId id="268" r:id="rId20"/>
+    <p:sldId id="269" r:id="rId21"/>
+    <p:sldId id="270" r:id="rId22"/>
+    <p:sldId id="271" r:id="rId23"/>
+    <p:sldId id="272" r:id="rId24"/>
+    <p:sldId id="273" r:id="rId25"/>
   </p:sldIdLst>
   <p:sldSz cx="12191695" cy="6858000" type="screen4x3"/>
   <p:notesSz cx="6858000" cy="9144000"/>
@@ -608,6 +615,496 @@
 </file>
 
 <file path=ppt/notesSlides/notesSlide11.xml><?xml version="1.0" encoding="utf-8"?>
+<p:notes xmlns:a="http://schemas.openxmlformats.org/drawingml/2006/main" xmlns:p="http://schemas.openxmlformats.org/presentationml/2006/main" xmlns:r="http://schemas.openxmlformats.org/officeDocument/2006/relationships">
+  <p:cSld>
+    <p:spTree>
+      <p:nvGrpSpPr>
+        <p:cNvPr id="1" name=""/>
+        <p:cNvGrpSpPr/>
+        <p:nvPr/>
+      </p:nvGrpSpPr>
+      <p:grpSpPr>
+        <a:xfrm>
+          <a:off x="0" y="0"/>
+          <a:ext cx="0" cy="0"/>
+          <a:chOff x="0" y="0"/>
+          <a:chExt cx="0" cy="0"/>
+        </a:xfrm>
+      </p:grpSpPr>
+      <p:sp>
+        <p:nvSpPr>
+          <p:cNvPr id="2" name="Slide Image Placeholder 1"/>
+          <p:cNvSpPr>
+            <a:spLocks noGrp="1"/>
+          </p:cNvSpPr>
+          <p:nvPr>
+            <p:ph type="sldImg" idx="2"/>
+          </p:nvPr>
+        </p:nvSpPr>
+        <p:spPr/>
+      </p:sp>
+      <p:sp>
+        <p:nvSpPr>
+          <p:cNvPr id="3" name="Notes Placeholder 2"/>
+          <p:cNvSpPr>
+            <a:spLocks noGrp="1"/>
+          </p:cNvSpPr>
+          <p:nvPr>
+            <p:ph type="body" idx="3" sz="quarter"/>
+          </p:nvPr>
+        </p:nvSpPr>
+        <p:spPr/>
+        <p:txBody>
+          <a:bodyPr/>
+          <a:lstStyle/>
+          <a:p>
+            <a:r>
+              <a:t>Dire « attente » puis « matin » en série, sans les écrire. Faire poser un doigt sous le menton : la mâchoire descend sur « an », elle bouge à peine sur « in ».</a:t>
+            </a:r>
+          </a:p>
+        </p:txBody>
+      </p:sp>
+      <p:sp>
+        <p:nvSpPr>
+          <p:cNvPr id="4" name="Slide Number Placeholder 3"/>
+          <p:cNvSpPr>
+            <a:spLocks noGrp="1"/>
+          </p:cNvSpPr>
+          <p:nvPr>
+            <p:ph type="sldNum" idx="5" sz="quarter"/>
+          </p:nvPr>
+        </p:nvSpPr>
+        <p:spPr/>
+      </p:sp>
+    </p:spTree>
+  </p:cSld>
+  <p:clrMapOvr>
+    <a:masterClrMapping/>
+  </p:clrMapOvr>
+</p:notes>
+</file>
+
+<file path=ppt/notesSlides/notesSlide12.xml><?xml version="1.0" encoding="utf-8"?>
+<p:notes xmlns:a="http://schemas.openxmlformats.org/drawingml/2006/main" xmlns:p="http://schemas.openxmlformats.org/presentationml/2006/main" xmlns:r="http://schemas.openxmlformats.org/officeDocument/2006/relationships">
+  <p:cSld>
+    <p:spTree>
+      <p:nvGrpSpPr>
+        <p:cNvPr id="1" name=""/>
+        <p:cNvGrpSpPr/>
+        <p:nvPr/>
+      </p:nvGrpSpPr>
+      <p:grpSpPr>
+        <a:xfrm>
+          <a:off x="0" y="0"/>
+          <a:ext cx="0" cy="0"/>
+          <a:chOff x="0" y="0"/>
+          <a:chExt cx="0" cy="0"/>
+        </a:xfrm>
+      </p:grpSpPr>
+      <p:sp>
+        <p:nvSpPr>
+          <p:cNvPr id="2" name="Slide Image Placeholder 1"/>
+          <p:cNvSpPr>
+            <a:spLocks noGrp="1"/>
+          </p:cNvSpPr>
+          <p:nvPr>
+            <p:ph type="sldImg" idx="2"/>
+          </p:nvPr>
+        </p:nvSpPr>
+        <p:spPr/>
+      </p:sp>
+      <p:sp>
+        <p:nvSpPr>
+          <p:cNvPr id="3" name="Notes Placeholder 2"/>
+          <p:cNvSpPr>
+            <a:spLocks noGrp="1"/>
+          </p:cNvSpPr>
+          <p:nvPr>
+            <p:ph type="body" idx="3" sz="quarter"/>
+          </p:nvPr>
+        </p:nvSpPr>
+        <p:spPr/>
+        <p:txBody>
+          <a:bodyPr/>
+          <a:lstStyle/>
+          <a:p>
+            <a:r>
+              <a:t>Écrire les deux mots repères au tableau et les y laisser. Faire lire la colonne des lettres avant celle des mots.</a:t>
+            </a:r>
+          </a:p>
+        </p:txBody>
+      </p:sp>
+      <p:sp>
+        <p:nvSpPr>
+          <p:cNvPr id="4" name="Slide Number Placeholder 3"/>
+          <p:cNvSpPr>
+            <a:spLocks noGrp="1"/>
+          </p:cNvSpPr>
+          <p:nvPr>
+            <p:ph type="sldNum" idx="5" sz="quarter"/>
+          </p:nvPr>
+        </p:nvSpPr>
+        <p:spPr/>
+      </p:sp>
+    </p:spTree>
+  </p:cSld>
+  <p:clrMapOvr>
+    <a:masterClrMapping/>
+  </p:clrMapOvr>
+</p:notes>
+</file>
+
+<file path=ppt/notesSlides/notesSlide13.xml><?xml version="1.0" encoding="utf-8"?>
+<p:notes xmlns:a="http://schemas.openxmlformats.org/drawingml/2006/main" xmlns:p="http://schemas.openxmlformats.org/presentationml/2006/main" xmlns:r="http://schemas.openxmlformats.org/officeDocument/2006/relationships">
+  <p:cSld>
+    <p:spTree>
+      <p:nvGrpSpPr>
+        <p:cNvPr id="1" name=""/>
+        <p:cNvGrpSpPr/>
+        <p:nvPr/>
+      </p:nvGrpSpPr>
+      <p:grpSpPr>
+        <a:xfrm>
+          <a:off x="0" y="0"/>
+          <a:ext cx="0" cy="0"/>
+          <a:chOff x="0" y="0"/>
+          <a:chExt cx="0" cy="0"/>
+        </a:xfrm>
+      </p:grpSpPr>
+      <p:sp>
+        <p:nvSpPr>
+          <p:cNvPr id="2" name="Slide Image Placeholder 1"/>
+          <p:cNvSpPr>
+            <a:spLocks noGrp="1"/>
+          </p:cNvSpPr>
+          <p:nvPr>
+            <p:ph type="sldImg" idx="2"/>
+          </p:nvPr>
+        </p:nvSpPr>
+        <p:spPr/>
+      </p:sp>
+      <p:sp>
+        <p:nvSpPr>
+          <p:cNvPr id="3" name="Notes Placeholder 2"/>
+          <p:cNvSpPr>
+            <a:spLocks noGrp="1"/>
+          </p:cNvSpPr>
+          <p:nvPr>
+            <p:ph type="body" idx="3" sz="quarter"/>
+          </p:nvPr>
+        </p:nvSpPr>
+        <p:spPr/>
+        <p:txBody>
+          <a:bodyPr/>
+          <a:lstStyle/>
+          <a:p>
+            <a:r>
+              <a:t>Faire entendre la paire dans une seule phrase : « le patient parle au pharmacien ». Les deux sons y sont, à trois mots d'intervalle.</a:t>
+            </a:r>
+          </a:p>
+        </p:txBody>
+      </p:sp>
+      <p:sp>
+        <p:nvSpPr>
+          <p:cNvPr id="4" name="Slide Number Placeholder 3"/>
+          <p:cNvSpPr>
+            <a:spLocks noGrp="1"/>
+          </p:cNvSpPr>
+          <p:nvPr>
+            <p:ph type="sldNum" idx="5" sz="quarter"/>
+          </p:nvPr>
+        </p:nvSpPr>
+        <p:spPr/>
+      </p:sp>
+    </p:spTree>
+  </p:cSld>
+  <p:clrMapOvr>
+    <a:masterClrMapping/>
+  </p:clrMapOvr>
+</p:notes>
+</file>
+
+<file path=ppt/notesSlides/notesSlide14.xml><?xml version="1.0" encoding="utf-8"?>
+<p:notes xmlns:a="http://schemas.openxmlformats.org/drawingml/2006/main" xmlns:p="http://schemas.openxmlformats.org/presentationml/2006/main" xmlns:r="http://schemas.openxmlformats.org/officeDocument/2006/relationships">
+  <p:cSld>
+    <p:spTree>
+      <p:nvGrpSpPr>
+        <p:cNvPr id="1" name=""/>
+        <p:cNvGrpSpPr/>
+        <p:nvPr/>
+      </p:nvGrpSpPr>
+      <p:grpSpPr>
+        <a:xfrm>
+          <a:off x="0" y="0"/>
+          <a:ext cx="0" cy="0"/>
+          <a:chOff x="0" y="0"/>
+          <a:chExt cx="0" cy="0"/>
+        </a:xfrm>
+      </p:grpSpPr>
+      <p:sp>
+        <p:nvSpPr>
+          <p:cNvPr id="2" name="Slide Image Placeholder 1"/>
+          <p:cNvSpPr>
+            <a:spLocks noGrp="1"/>
+          </p:cNvSpPr>
+          <p:nvPr>
+            <p:ph type="sldImg" idx="2"/>
+          </p:nvPr>
+        </p:nvSpPr>
+        <p:spPr/>
+      </p:sp>
+      <p:sp>
+        <p:nvSpPr>
+          <p:cNvPr id="3" name="Notes Placeholder 2"/>
+          <p:cNvSpPr>
+            <a:spLocks noGrp="1"/>
+          </p:cNvSpPr>
+          <p:nvPr>
+            <p:ph type="body" idx="3" sz="quarter"/>
+          </p:nvPr>
+        </p:nvSpPr>
+        <p:spPr/>
+        <p:txBody>
+          <a:bodyPr/>
+          <a:lstStyle/>
+          <a:p>
+            <a:r>
+              <a:t>Dire chaque mot deux fois sans le montrer : c'est un exercice d'oreille. Ce sont les huit mots de l'exercice de sons du module en ligne, dans le même ordre — l'élève les retrouvera tels quels.</a:t>
+            </a:r>
+          </a:p>
+        </p:txBody>
+      </p:sp>
+      <p:sp>
+        <p:nvSpPr>
+          <p:cNvPr id="4" name="Slide Number Placeholder 3"/>
+          <p:cNvSpPr>
+            <a:spLocks noGrp="1"/>
+          </p:cNvSpPr>
+          <p:nvPr>
+            <p:ph type="sldNum" idx="5" sz="quarter"/>
+          </p:nvPr>
+        </p:nvSpPr>
+        <p:spPr/>
+      </p:sp>
+    </p:spTree>
+  </p:cSld>
+  <p:clrMapOvr>
+    <a:masterClrMapping/>
+  </p:clrMapOvr>
+</p:notes>
+</file>
+
+<file path=ppt/notesSlides/notesSlide15.xml><?xml version="1.0" encoding="utf-8"?>
+<p:notes xmlns:a="http://schemas.openxmlformats.org/drawingml/2006/main" xmlns:p="http://schemas.openxmlformats.org/presentationml/2006/main" xmlns:r="http://schemas.openxmlformats.org/officeDocument/2006/relationships">
+  <p:cSld>
+    <p:spTree>
+      <p:nvGrpSpPr>
+        <p:cNvPr id="1" name=""/>
+        <p:cNvGrpSpPr/>
+        <p:nvPr/>
+      </p:nvGrpSpPr>
+      <p:grpSpPr>
+        <a:xfrm>
+          <a:off x="0" y="0"/>
+          <a:ext cx="0" cy="0"/>
+          <a:chOff x="0" y="0"/>
+          <a:chExt cx="0" cy="0"/>
+        </a:xfrm>
+      </p:grpSpPr>
+      <p:sp>
+        <p:nvSpPr>
+          <p:cNvPr id="2" name="Slide Image Placeholder 1"/>
+          <p:cNvSpPr>
+            <a:spLocks noGrp="1"/>
+          </p:cNvSpPr>
+          <p:nvPr>
+            <p:ph type="sldImg" idx="2"/>
+          </p:nvPr>
+        </p:nvSpPr>
+        <p:spPr/>
+      </p:sp>
+      <p:sp>
+        <p:nvSpPr>
+          <p:cNvPr id="3" name="Notes Placeholder 2"/>
+          <p:cNvSpPr>
+            <a:spLocks noGrp="1"/>
+          </p:cNvSpPr>
+          <p:nvPr>
+            <p:ph type="body" idx="3" sz="quarter"/>
+          </p:nvPr>
+        </p:nvSpPr>
+        <p:spPr/>
+        <p:txBody>
+          <a:bodyPr/>
+          <a:lstStyle/>
+          <a:p>
+            <a:r>
+              <a:t>Corriger en groupe. Donner la bonne réponse, sans revenir sur qui s'est trompé.</a:t>
+            </a:r>
+          </a:p>
+        </p:txBody>
+      </p:sp>
+      <p:sp>
+        <p:nvSpPr>
+          <p:cNvPr id="4" name="Slide Number Placeholder 3"/>
+          <p:cNvSpPr>
+            <a:spLocks noGrp="1"/>
+          </p:cNvSpPr>
+          <p:nvPr>
+            <p:ph type="sldNum" idx="5" sz="quarter"/>
+          </p:nvPr>
+        </p:nvSpPr>
+        <p:spPr/>
+      </p:sp>
+    </p:spTree>
+  </p:cSld>
+  <p:clrMapOvr>
+    <a:masterClrMapping/>
+  </p:clrMapOvr>
+</p:notes>
+</file>
+
+<file path=ppt/notesSlides/notesSlide16.xml><?xml version="1.0" encoding="utf-8"?>
+<p:notes xmlns:a="http://schemas.openxmlformats.org/drawingml/2006/main" xmlns:p="http://schemas.openxmlformats.org/presentationml/2006/main" xmlns:r="http://schemas.openxmlformats.org/officeDocument/2006/relationships">
+  <p:cSld>
+    <p:spTree>
+      <p:nvGrpSpPr>
+        <p:cNvPr id="1" name=""/>
+        <p:cNvGrpSpPr/>
+        <p:nvPr/>
+      </p:nvGrpSpPr>
+      <p:grpSpPr>
+        <a:xfrm>
+          <a:off x="0" y="0"/>
+          <a:ext cx="0" cy="0"/>
+          <a:chOff x="0" y="0"/>
+          <a:chExt cx="0" cy="0"/>
+        </a:xfrm>
+      </p:grpSpPr>
+      <p:sp>
+        <p:nvSpPr>
+          <p:cNvPr id="2" name="Slide Image Placeholder 1"/>
+          <p:cNvSpPr>
+            <a:spLocks noGrp="1"/>
+          </p:cNvSpPr>
+          <p:nvPr>
+            <p:ph type="sldImg" idx="2"/>
+          </p:nvPr>
+        </p:nvSpPr>
+        <p:spPr/>
+      </p:sp>
+      <p:sp>
+        <p:nvSpPr>
+          <p:cNvPr id="3" name="Notes Placeholder 2"/>
+          <p:cNvSpPr>
+            <a:spLocks noGrp="1"/>
+          </p:cNvSpPr>
+          <p:nvPr>
+            <p:ph type="body" idx="3" sz="quarter"/>
+          </p:nvPr>
+        </p:nvSpPr>
+        <p:spPr/>
+        <p:txBody>
+          <a:bodyPr/>
+          <a:lstStyle/>
+          <a:p>
+            <a:r>
+              <a:t>Faire lire debout et lentement. Interdire au groupe de corriger autre chose que les voyelles nasales, sinon la lecture s'arrête à chaque mot.</a:t>
+            </a:r>
+          </a:p>
+        </p:txBody>
+      </p:sp>
+      <p:sp>
+        <p:nvSpPr>
+          <p:cNvPr id="4" name="Slide Number Placeholder 3"/>
+          <p:cNvSpPr>
+            <a:spLocks noGrp="1"/>
+          </p:cNvSpPr>
+          <p:nvPr>
+            <p:ph type="sldNum" idx="5" sz="quarter"/>
+          </p:nvPr>
+        </p:nvSpPr>
+        <p:spPr/>
+      </p:sp>
+    </p:spTree>
+  </p:cSld>
+  <p:clrMapOvr>
+    <a:masterClrMapping/>
+  </p:clrMapOvr>
+</p:notes>
+</file>
+
+<file path=ppt/notesSlides/notesSlide17.xml><?xml version="1.0" encoding="utf-8"?>
+<p:notes xmlns:a="http://schemas.openxmlformats.org/drawingml/2006/main" xmlns:p="http://schemas.openxmlformats.org/presentationml/2006/main" xmlns:r="http://schemas.openxmlformats.org/officeDocument/2006/relationships">
+  <p:cSld>
+    <p:spTree>
+      <p:nvGrpSpPr>
+        <p:cNvPr id="1" name=""/>
+        <p:cNvGrpSpPr/>
+        <p:nvPr/>
+      </p:nvGrpSpPr>
+      <p:grpSpPr>
+        <a:xfrm>
+          <a:off x="0" y="0"/>
+          <a:ext cx="0" cy="0"/>
+          <a:chOff x="0" y="0"/>
+          <a:chExt cx="0" cy="0"/>
+        </a:xfrm>
+      </p:grpSpPr>
+      <p:sp>
+        <p:nvSpPr>
+          <p:cNvPr id="2" name="Slide Image Placeholder 1"/>
+          <p:cNvSpPr>
+            <a:spLocks noGrp="1"/>
+          </p:cNvSpPr>
+          <p:nvPr>
+            <p:ph type="sldImg" idx="2"/>
+          </p:nvPr>
+        </p:nvSpPr>
+        <p:spPr/>
+      </p:sp>
+      <p:sp>
+        <p:nvSpPr>
+          <p:cNvPr id="3" name="Notes Placeholder 2"/>
+          <p:cNvSpPr>
+            <a:spLocks noGrp="1"/>
+          </p:cNvSpPr>
+          <p:nvPr>
+            <p:ph type="body" idx="3" sz="quarter"/>
+          </p:nvPr>
+        </p:nvSpPr>
+        <p:spPr/>
+        <p:txBody>
+          <a:bodyPr/>
+          <a:lstStyle/>
+          <a:p>
+            <a:r>
+              <a:t>Corriger en groupe. Donner la bonne réponse, sans revenir sur qui s'est trompé.</a:t>
+            </a:r>
+          </a:p>
+        </p:txBody>
+      </p:sp>
+      <p:sp>
+        <p:nvSpPr>
+          <p:cNvPr id="4" name="Slide Number Placeholder 3"/>
+          <p:cNvSpPr>
+            <a:spLocks noGrp="1"/>
+          </p:cNvSpPr>
+          <p:nvPr>
+            <p:ph type="sldNum" idx="5" sz="quarter"/>
+          </p:nvPr>
+        </p:nvSpPr>
+        <p:spPr/>
+      </p:sp>
+    </p:spTree>
+  </p:cSld>
+  <p:clrMapOvr>
+    <a:masterClrMapping/>
+  </p:clrMapOvr>
+</p:notes>
+</file>
+
+<file path=ppt/notesSlides/notesSlide18.xml><?xml version="1.0" encoding="utf-8"?>
 <p:notes xmlns:a="http://schemas.openxmlformats.org/drawingml/2006/main" xmlns:p="http://schemas.openxmlformats.org/presentationml/2006/main" xmlns:r="http://schemas.openxmlformats.org/officeDocument/2006/relationships">
   <p:cSld>
     <p:spTree>
@@ -4634,7 +5131,7 @@
                 </a:solidFill>
                 <a:latin typeface="Verdana"/>
               </a:rPr>
-              <a:t>PRATIQUE · 3 DE 3</a:t>
+              <a:t>PRATIQUE · 3 DE 5</a:t>
             </a:r>
           </a:p>
         </p:txBody>
@@ -5529,6 +6026,6457 @@
       </p:sp>
       <p:sp>
         <p:nvSpPr>
+          <p:cNvPr id="5" name="TextBox 4"/>
+          <p:cNvSpPr txBox="1"/>
+          <p:nvPr/>
+        </p:nvSpPr>
+        <p:spPr>
+          <a:xfrm>
+            <a:off x="566928" y="420624"/>
+            <a:ext cx="11057839" cy="237744"/>
+          </a:xfrm>
+          <a:prstGeom prst="rect">
+            <a:avLst/>
+          </a:prstGeom>
+          <a:noFill/>
+        </p:spPr>
+        <p:txBody>
+          <a:bodyPr wrap="square" lIns="0" rIns="0" tIns="0" bIns="0" anchor="t">
+            <a:spAutoFit/>
+          </a:bodyPr>
+          <a:lstStyle/>
+          <a:p>
+            <a:pPr algn="l">
+              <a:lnSpc>
+                <a:spcPct val="135000"/>
+              </a:lnSpc>
+            </a:pPr>
+            <a:r>
+              <a:rPr sz="1300" b="1" i="0" spc="156">
+                <a:solidFill>
+                  <a:srgbClr val="166534"/>
+                </a:solidFill>
+                <a:latin typeface="Verdana"/>
+              </a:rPr>
+              <a:t>DEUX SONS NASAUX DU RENDEZ-VOUS</a:t>
+            </a:r>
+          </a:p>
+        </p:txBody>
+      </p:sp>
+      <p:sp>
+        <p:nvSpPr>
+          <p:cNvPr id="6" name="Rounded Rectangle 5"/>
+          <p:cNvSpPr/>
+          <p:nvPr/>
+        </p:nvSpPr>
+        <p:spPr>
+          <a:xfrm>
+            <a:off x="566928" y="1225296"/>
+            <a:ext cx="11057839" cy="1967991"/>
+          </a:xfrm>
+          <a:prstGeom prst="roundRect">
+            <a:avLst>
+              <a:gd name="adj" fmla="val 7434"/>
+            </a:avLst>
+          </a:prstGeom>
+          <a:solidFill>
+            <a:srgbClr val="E3F1E7"/>
+          </a:solidFill>
+          <a:ln w="12700">
+            <a:solidFill>
+              <a:srgbClr val="EAEAE8"/>
+            </a:solidFill>
+          </a:ln>
+          <a:effectLst/>
+        </p:spPr>
+        <p:style>
+          <a:lnRef idx="1">
+            <a:schemeClr val="accent1"/>
+          </a:lnRef>
+          <a:fillRef idx="3">
+            <a:schemeClr val="accent1"/>
+          </a:fillRef>
+          <a:effectRef idx="2">
+            <a:schemeClr val="accent1"/>
+          </a:effectRef>
+          <a:fontRef idx="minor">
+            <a:schemeClr val="lt1"/>
+          </a:fontRef>
+        </p:style>
+        <p:txBody>
+          <a:bodyPr rtlCol="0" anchor="ctr"/>
+          <a:lstStyle/>
+          <a:p/>
+        </p:txBody>
+      </p:sp>
+      <p:sp>
+        <p:nvSpPr>
+          <p:cNvPr id="7" name="TextBox 6"/>
+          <p:cNvSpPr txBox="1"/>
+          <p:nvPr/>
+        </p:nvSpPr>
+        <p:spPr>
+          <a:xfrm>
+            <a:off x="1298448" y="1682496"/>
+            <a:ext cx="9594799" cy="1145032"/>
+          </a:xfrm>
+          <a:prstGeom prst="rect">
+            <a:avLst/>
+          </a:prstGeom>
+          <a:noFill/>
+        </p:spPr>
+        <p:txBody>
+          <a:bodyPr wrap="square" lIns="0" rIns="0" tIns="0" bIns="0" anchor="t">
+            <a:spAutoFit/>
+          </a:bodyPr>
+          <a:lstStyle/>
+          <a:p>
+            <a:pPr algn="l">
+              <a:lnSpc>
+                <a:spcPct val="122000"/>
+              </a:lnSpc>
+            </a:pPr>
+            <a:r>
+              <a:rPr sz="3400" b="1" i="0">
+                <a:solidFill>
+                  <a:srgbClr val="17181A"/>
+                </a:solidFill>
+                <a:latin typeface="Verdana"/>
+              </a:rPr>
+              <a:t>Le son « an » ouvre la bouche ; le son « in » la garde presque fermée.</a:t>
+            </a:r>
+          </a:p>
+        </p:txBody>
+      </p:sp>
+      <p:sp>
+        <p:nvSpPr>
+          <p:cNvPr id="8" name="Rounded Rectangle 7"/>
+          <p:cNvSpPr/>
+          <p:nvPr/>
+        </p:nvSpPr>
+        <p:spPr>
+          <a:xfrm>
+            <a:off x="566928" y="3467607"/>
+            <a:ext cx="11057839" cy="1671827"/>
+          </a:xfrm>
+          <a:prstGeom prst="roundRect">
+            <a:avLst>
+              <a:gd name="adj" fmla="val 8751"/>
+            </a:avLst>
+          </a:prstGeom>
+          <a:solidFill>
+            <a:srgbClr val="FFFFFF"/>
+          </a:solidFill>
+          <a:ln w="12700">
+            <a:solidFill>
+              <a:srgbClr val="EAEAE8"/>
+            </a:solidFill>
+          </a:ln>
+          <a:effectLst/>
+        </p:spPr>
+        <p:style>
+          <a:lnRef idx="1">
+            <a:schemeClr val="accent1"/>
+          </a:lnRef>
+          <a:fillRef idx="3">
+            <a:schemeClr val="accent1"/>
+          </a:fillRef>
+          <a:effectRef idx="2">
+            <a:schemeClr val="accent1"/>
+          </a:effectRef>
+          <a:fontRef idx="minor">
+            <a:schemeClr val="lt1"/>
+          </a:fontRef>
+        </p:style>
+        <p:txBody>
+          <a:bodyPr rtlCol="0" anchor="ctr"/>
+          <a:lstStyle/>
+          <a:p/>
+        </p:txBody>
+      </p:sp>
+      <p:sp>
+        <p:nvSpPr>
+          <p:cNvPr id="9" name="TextBox 8"/>
+          <p:cNvSpPr txBox="1"/>
+          <p:nvPr/>
+        </p:nvSpPr>
+        <p:spPr>
+          <a:xfrm>
+            <a:off x="969264" y="3741927"/>
+            <a:ext cx="10234879" cy="1214627"/>
+          </a:xfrm>
+          <a:prstGeom prst="rect">
+            <a:avLst/>
+          </a:prstGeom>
+          <a:noFill/>
+        </p:spPr>
+        <p:txBody>
+          <a:bodyPr wrap="square" lIns="0" rIns="0" tIns="0" bIns="0" anchor="t">
+            <a:spAutoFit/>
+          </a:bodyPr>
+          <a:lstStyle/>
+          <a:p>
+            <a:pPr algn="l">
+              <a:lnSpc>
+                <a:spcPct val="145000"/>
+              </a:lnSpc>
+            </a:pPr>
+            <a:r>
+              <a:rPr sz="2000" b="0" i="0">
+                <a:solidFill>
+                  <a:srgbClr val="4B4F52"/>
+                </a:solidFill>
+                <a:latin typeface="Verdana"/>
+              </a:rPr>
+              <a:t>« Attente » et « matin » n'ont pas la même voyelle nasale. Au téléphone avec la clinique, c'est cette différence qui distingue « pendant » de « pendrin » — et le nom du professionnel qu'on demande.</a:t>
+            </a:r>
+          </a:p>
+        </p:txBody>
+      </p:sp>
+    </p:spTree>
+  </p:cSld>
+  <p:clrMapOvr>
+    <a:masterClrMapping/>
+  </p:clrMapOvr>
+</p:sld>
+</file>
+
+<file path=ppt/slides/slide12.xml><?xml version="1.0" encoding="utf-8"?>
+<p:sld xmlns:a="http://schemas.openxmlformats.org/drawingml/2006/main" xmlns:p="http://schemas.openxmlformats.org/presentationml/2006/main" xmlns:r="http://schemas.openxmlformats.org/officeDocument/2006/relationships">
+  <p:cSld>
+    <p:spTree>
+      <p:nvGrpSpPr>
+        <p:cNvPr id="1" name=""/>
+        <p:cNvGrpSpPr/>
+        <p:nvPr/>
+      </p:nvGrpSpPr>
+      <p:grpSpPr/>
+      <p:sp>
+        <p:nvSpPr>
+          <p:cNvPr id="2" name="Rectangle 1"/>
+          <p:cNvSpPr/>
+          <p:nvPr/>
+        </p:nvSpPr>
+        <p:spPr>
+          <a:xfrm>
+            <a:off x="0" y="0"/>
+            <a:ext cx="12191695" cy="6858000"/>
+          </a:xfrm>
+          <a:prstGeom prst="rect">
+            <a:avLst/>
+          </a:prstGeom>
+          <a:solidFill>
+            <a:srgbClr val="F7F7F5"/>
+          </a:solidFill>
+          <a:ln>
+            <a:noFill/>
+          </a:ln>
+          <a:effectLst/>
+        </p:spPr>
+        <p:style>
+          <a:lnRef idx="1">
+            <a:schemeClr val="accent1"/>
+          </a:lnRef>
+          <a:fillRef idx="3">
+            <a:schemeClr val="accent1"/>
+          </a:fillRef>
+          <a:effectRef idx="2">
+            <a:schemeClr val="accent1"/>
+          </a:effectRef>
+          <a:fontRef idx="minor">
+            <a:schemeClr val="lt1"/>
+          </a:fontRef>
+        </p:style>
+        <p:txBody>
+          <a:bodyPr rtlCol="0" anchor="ctr"/>
+          <a:lstStyle/>
+          <a:p/>
+        </p:txBody>
+      </p:sp>
+      <p:sp>
+        <p:nvSpPr>
+          <p:cNvPr id="3" name="TextBox 2"/>
+          <p:cNvSpPr txBox="1"/>
+          <p:nvPr/>
+        </p:nvSpPr>
+        <p:spPr>
+          <a:xfrm>
+            <a:off x="566928" y="6355080"/>
+            <a:ext cx="6400800" cy="219456"/>
+          </a:xfrm>
+          <a:prstGeom prst="rect">
+            <a:avLst/>
+          </a:prstGeom>
+          <a:noFill/>
+        </p:spPr>
+        <p:txBody>
+          <a:bodyPr wrap="square" lIns="0" rIns="0" tIns="0" bIns="0" anchor="t">
+            <a:spAutoFit/>
+          </a:bodyPr>
+          <a:lstStyle/>
+          <a:p>
+            <a:pPr algn="l">
+              <a:lnSpc>
+                <a:spcPct val="135000"/>
+              </a:lnSpc>
+            </a:pPr>
+            <a:r>
+              <a:rPr sz="1200" b="0" i="0">
+                <a:solidFill>
+                  <a:srgbClr val="6E7175"/>
+                </a:solidFill>
+                <a:latin typeface="Verdana"/>
+              </a:rPr>
+              <a:t>A3 · Prendre rendez-vous et aller à la pharmacie</a:t>
+            </a:r>
+          </a:p>
+        </p:txBody>
+      </p:sp>
+      <p:sp>
+        <p:nvSpPr>
+          <p:cNvPr id="4" name="TextBox 3"/>
+          <p:cNvSpPr txBox="1"/>
+          <p:nvPr/>
+        </p:nvSpPr>
+        <p:spPr>
+          <a:xfrm>
+            <a:off x="10710367" y="6355080"/>
+            <a:ext cx="914400" cy="219456"/>
+          </a:xfrm>
+          <a:prstGeom prst="rect">
+            <a:avLst/>
+          </a:prstGeom>
+          <a:noFill/>
+        </p:spPr>
+        <p:txBody>
+          <a:bodyPr wrap="square" lIns="0" rIns="0" tIns="0" bIns="0" anchor="t">
+            <a:spAutoFit/>
+          </a:bodyPr>
+          <a:lstStyle/>
+          <a:p>
+            <a:pPr algn="r">
+              <a:lnSpc>
+                <a:spcPct val="135000"/>
+              </a:lnSpc>
+            </a:pPr>
+            <a:r>
+              <a:rPr sz="1200" b="0" i="0">
+                <a:solidFill>
+                  <a:srgbClr val="6E7175"/>
+                </a:solidFill>
+                <a:latin typeface="Verdana"/>
+              </a:rPr>
+              <a:t>12</a:t>
+            </a:r>
+          </a:p>
+        </p:txBody>
+      </p:sp>
+      <p:sp>
+        <p:nvSpPr>
+          <p:cNvPr id="5" name="TextBox 4"/>
+          <p:cNvSpPr txBox="1"/>
+          <p:nvPr/>
+        </p:nvSpPr>
+        <p:spPr>
+          <a:xfrm>
+            <a:off x="566928" y="420624"/>
+            <a:ext cx="11057839" cy="237744"/>
+          </a:xfrm>
+          <a:prstGeom prst="rect">
+            <a:avLst/>
+          </a:prstGeom>
+          <a:noFill/>
+        </p:spPr>
+        <p:txBody>
+          <a:bodyPr wrap="square" lIns="0" rIns="0" tIns="0" bIns="0" anchor="t">
+            <a:spAutoFit/>
+          </a:bodyPr>
+          <a:lstStyle/>
+          <a:p>
+            <a:pPr algn="l">
+              <a:lnSpc>
+                <a:spcPct val="135000"/>
+              </a:lnSpc>
+            </a:pPr>
+            <a:r>
+              <a:rPr sz="1300" b="1" i="0" spc="156">
+                <a:solidFill>
+                  <a:srgbClr val="166534"/>
+                </a:solidFill>
+                <a:latin typeface="Verdana"/>
+              </a:rPr>
+              <a:t>ANALYSE</a:t>
+            </a:r>
+          </a:p>
+        </p:txBody>
+      </p:sp>
+      <p:sp>
+        <p:nvSpPr>
+          <p:cNvPr id="6" name="TextBox 5"/>
+          <p:cNvSpPr txBox="1"/>
+          <p:nvPr/>
+        </p:nvSpPr>
+        <p:spPr>
+          <a:xfrm>
+            <a:off x="566928" y="749808"/>
+            <a:ext cx="11057839" cy="877824"/>
+          </a:xfrm>
+          <a:prstGeom prst="rect">
+            <a:avLst/>
+          </a:prstGeom>
+          <a:noFill/>
+        </p:spPr>
+        <p:txBody>
+          <a:bodyPr wrap="square" lIns="0" rIns="0" tIns="0" bIns="0" anchor="t">
+            <a:spAutoFit/>
+          </a:bodyPr>
+          <a:lstStyle/>
+          <a:p>
+            <a:pPr algn="l">
+              <a:lnSpc>
+                <a:spcPct val="115000"/>
+              </a:lnSpc>
+            </a:pPr>
+            <a:r>
+              <a:rPr sz="3400" b="1" i="0">
+                <a:solidFill>
+                  <a:srgbClr val="17181A"/>
+                </a:solidFill>
+                <a:latin typeface="Verdana"/>
+              </a:rPr>
+              <a:t>Les deux sons dans les mots du module</a:t>
+            </a:r>
+          </a:p>
+        </p:txBody>
+      </p:sp>
+      <p:sp>
+        <p:nvSpPr>
+          <p:cNvPr id="7" name="Rounded Rectangle 6"/>
+          <p:cNvSpPr/>
+          <p:nvPr/>
+        </p:nvSpPr>
+        <p:spPr>
+          <a:xfrm>
+            <a:off x="566928" y="1810512"/>
+            <a:ext cx="11057839" cy="2322576"/>
+          </a:xfrm>
+          <a:prstGeom prst="roundRect">
+            <a:avLst>
+              <a:gd name="adj" fmla="val 6299"/>
+            </a:avLst>
+          </a:prstGeom>
+          <a:solidFill>
+            <a:srgbClr val="FFFFFF"/>
+          </a:solidFill>
+          <a:ln w="12700">
+            <a:solidFill>
+              <a:srgbClr val="EAEAE8"/>
+            </a:solidFill>
+          </a:ln>
+          <a:effectLst/>
+        </p:spPr>
+        <p:style>
+          <a:lnRef idx="1">
+            <a:schemeClr val="accent1"/>
+          </a:lnRef>
+          <a:fillRef idx="3">
+            <a:schemeClr val="accent1"/>
+          </a:fillRef>
+          <a:effectRef idx="2">
+            <a:schemeClr val="accent1"/>
+          </a:effectRef>
+          <a:fontRef idx="minor">
+            <a:schemeClr val="lt1"/>
+          </a:fontRef>
+        </p:style>
+        <p:txBody>
+          <a:bodyPr rtlCol="0" anchor="ctr"/>
+          <a:lstStyle/>
+          <a:p/>
+        </p:txBody>
+      </p:sp>
+      <p:sp>
+        <p:nvSpPr>
+          <p:cNvPr id="8" name="TextBox 7"/>
+          <p:cNvSpPr txBox="1"/>
+          <p:nvPr/>
+        </p:nvSpPr>
+        <p:spPr>
+          <a:xfrm>
+            <a:off x="932688" y="1975104"/>
+            <a:ext cx="3222650" cy="237744"/>
+          </a:xfrm>
+          <a:prstGeom prst="rect">
+            <a:avLst/>
+          </a:prstGeom>
+          <a:noFill/>
+        </p:spPr>
+        <p:txBody>
+          <a:bodyPr wrap="square" lIns="0" rIns="0" tIns="0" bIns="0" anchor="t">
+            <a:spAutoFit/>
+          </a:bodyPr>
+          <a:lstStyle/>
+          <a:p>
+            <a:pPr algn="l">
+              <a:lnSpc>
+                <a:spcPct val="135000"/>
+              </a:lnSpc>
+            </a:pPr>
+            <a:r>
+              <a:rPr sz="1300" b="1" i="0" spc="156">
+                <a:solidFill>
+                  <a:srgbClr val="6E7175"/>
+                </a:solidFill>
+                <a:latin typeface="Verdana"/>
+              </a:rPr>
+              <a:t>LE SON</a:t>
+            </a:r>
+          </a:p>
+        </p:txBody>
+      </p:sp>
+      <p:sp>
+        <p:nvSpPr>
+          <p:cNvPr id="9" name="TextBox 8"/>
+          <p:cNvSpPr txBox="1"/>
+          <p:nvPr/>
+        </p:nvSpPr>
+        <p:spPr>
+          <a:xfrm>
+            <a:off x="4374794" y="1975104"/>
+            <a:ext cx="3222650" cy="237744"/>
+          </a:xfrm>
+          <a:prstGeom prst="rect">
+            <a:avLst/>
+          </a:prstGeom>
+          <a:noFill/>
+        </p:spPr>
+        <p:txBody>
+          <a:bodyPr wrap="square" lIns="0" rIns="0" tIns="0" bIns="0" anchor="t">
+            <a:spAutoFit/>
+          </a:bodyPr>
+          <a:lstStyle/>
+          <a:p>
+            <a:pPr algn="l">
+              <a:lnSpc>
+                <a:spcPct val="135000"/>
+              </a:lnSpc>
+            </a:pPr>
+            <a:r>
+              <a:rPr sz="1300" b="1" i="0" spc="156">
+                <a:solidFill>
+                  <a:srgbClr val="6E7175"/>
+                </a:solidFill>
+                <a:latin typeface="Verdana"/>
+              </a:rPr>
+              <a:t>IL S'ÉCRIT</a:t>
+            </a:r>
+          </a:p>
+        </p:txBody>
+      </p:sp>
+      <p:sp>
+        <p:nvSpPr>
+          <p:cNvPr id="10" name="TextBox 9"/>
+          <p:cNvSpPr txBox="1"/>
+          <p:nvPr/>
+        </p:nvSpPr>
+        <p:spPr>
+          <a:xfrm>
+            <a:off x="7816900" y="1975104"/>
+            <a:ext cx="3222650" cy="237744"/>
+          </a:xfrm>
+          <a:prstGeom prst="rect">
+            <a:avLst/>
+          </a:prstGeom>
+          <a:noFill/>
+        </p:spPr>
+        <p:txBody>
+          <a:bodyPr wrap="square" lIns="0" rIns="0" tIns="0" bIns="0" anchor="t">
+            <a:spAutoFit/>
+          </a:bodyPr>
+          <a:lstStyle/>
+          <a:p>
+            <a:pPr algn="l">
+              <a:lnSpc>
+                <a:spcPct val="135000"/>
+              </a:lnSpc>
+            </a:pPr>
+            <a:r>
+              <a:rPr sz="1300" b="1" i="0" spc="156">
+                <a:solidFill>
+                  <a:srgbClr val="6E7175"/>
+                </a:solidFill>
+                <a:latin typeface="Verdana"/>
+              </a:rPr>
+              <a:t>MOTS DU MODULE</a:t>
+            </a:r>
+          </a:p>
+        </p:txBody>
+      </p:sp>
+      <p:sp>
+        <p:nvSpPr>
+          <p:cNvPr id="11" name="TextBox 10"/>
+          <p:cNvSpPr txBox="1"/>
+          <p:nvPr/>
+        </p:nvSpPr>
+        <p:spPr>
+          <a:xfrm>
+            <a:off x="932688" y="2395728"/>
+            <a:ext cx="3222650" cy="640080"/>
+          </a:xfrm>
+          <a:prstGeom prst="rect">
+            <a:avLst/>
+          </a:prstGeom>
+          <a:noFill/>
+        </p:spPr>
+        <p:txBody>
+          <a:bodyPr wrap="square" lIns="0" rIns="0" tIns="0" bIns="0" anchor="t">
+            <a:spAutoFit/>
+          </a:bodyPr>
+          <a:lstStyle/>
+          <a:p>
+            <a:pPr algn="l">
+              <a:lnSpc>
+                <a:spcPct val="132000"/>
+              </a:lnSpc>
+            </a:pPr>
+            <a:r>
+              <a:rPr sz="1800" b="1" i="0">
+                <a:solidFill>
+                  <a:srgbClr val="166534"/>
+                </a:solidFill>
+                <a:latin typeface="Verdana"/>
+              </a:rPr>
+              <a:t>le son « an »</a:t>
+            </a:r>
+          </a:p>
+        </p:txBody>
+      </p:sp>
+      <p:sp>
+        <p:nvSpPr>
+          <p:cNvPr id="12" name="TextBox 11"/>
+          <p:cNvSpPr txBox="1"/>
+          <p:nvPr/>
+        </p:nvSpPr>
+        <p:spPr>
+          <a:xfrm>
+            <a:off x="4374794" y="2395728"/>
+            <a:ext cx="3222650" cy="640080"/>
+          </a:xfrm>
+          <a:prstGeom prst="rect">
+            <a:avLst/>
+          </a:prstGeom>
+          <a:noFill/>
+        </p:spPr>
+        <p:txBody>
+          <a:bodyPr wrap="square" lIns="0" rIns="0" tIns="0" bIns="0" anchor="t">
+            <a:spAutoFit/>
+          </a:bodyPr>
+          <a:lstStyle/>
+          <a:p>
+            <a:pPr algn="l">
+              <a:lnSpc>
+                <a:spcPct val="132000"/>
+              </a:lnSpc>
+            </a:pPr>
+            <a:r>
+              <a:rPr sz="1800" b="0" i="0">
+                <a:solidFill>
+                  <a:srgbClr val="3A3D40"/>
+                </a:solidFill>
+                <a:latin typeface="Verdana"/>
+              </a:rPr>
+              <a:t>an, am, en, em</a:t>
+            </a:r>
+          </a:p>
+        </p:txBody>
+      </p:sp>
+      <p:sp>
+        <p:nvSpPr>
+          <p:cNvPr id="13" name="TextBox 12"/>
+          <p:cNvSpPr txBox="1"/>
+          <p:nvPr/>
+        </p:nvSpPr>
+        <p:spPr>
+          <a:xfrm>
+            <a:off x="7816900" y="2395728"/>
+            <a:ext cx="3222650" cy="640080"/>
+          </a:xfrm>
+          <a:prstGeom prst="rect">
+            <a:avLst/>
+          </a:prstGeom>
+          <a:noFill/>
+        </p:spPr>
+        <p:txBody>
+          <a:bodyPr wrap="square" lIns="0" rIns="0" tIns="0" bIns="0" anchor="t">
+            <a:spAutoFit/>
+          </a:bodyPr>
+          <a:lstStyle/>
+          <a:p>
+            <a:pPr algn="l">
+              <a:lnSpc>
+                <a:spcPct val="132000"/>
+              </a:lnSpc>
+            </a:pPr>
+            <a:r>
+              <a:rPr sz="1800" b="0" i="0">
+                <a:solidFill>
+                  <a:srgbClr val="3A3D40"/>
+                </a:solidFill>
+                <a:latin typeface="Verdana"/>
+              </a:rPr>
+              <a:t>attente, pendant, ordonnance, traitement</a:t>
+            </a:r>
+          </a:p>
+        </p:txBody>
+      </p:sp>
+      <p:sp>
+        <p:nvSpPr>
+          <p:cNvPr id="14" name="Rectangle 13"/>
+          <p:cNvSpPr/>
+          <p:nvPr/>
+        </p:nvSpPr>
+        <p:spPr>
+          <a:xfrm>
+            <a:off x="932688" y="3108960"/>
+            <a:ext cx="10326319" cy="10058"/>
+          </a:xfrm>
+          <a:prstGeom prst="rect">
+            <a:avLst/>
+          </a:prstGeom>
+          <a:solidFill>
+            <a:srgbClr val="EAEAE8"/>
+          </a:solidFill>
+          <a:ln>
+            <a:noFill/>
+          </a:ln>
+          <a:effectLst/>
+        </p:spPr>
+        <p:style>
+          <a:lnRef idx="1">
+            <a:schemeClr val="accent1"/>
+          </a:lnRef>
+          <a:fillRef idx="3">
+            <a:schemeClr val="accent1"/>
+          </a:fillRef>
+          <a:effectRef idx="2">
+            <a:schemeClr val="accent1"/>
+          </a:effectRef>
+          <a:fontRef idx="minor">
+            <a:schemeClr val="lt1"/>
+          </a:fontRef>
+        </p:style>
+        <p:txBody>
+          <a:bodyPr rtlCol="0" anchor="ctr"/>
+          <a:lstStyle/>
+          <a:p/>
+        </p:txBody>
+      </p:sp>
+      <p:sp>
+        <p:nvSpPr>
+          <p:cNvPr id="15" name="TextBox 14"/>
+          <p:cNvSpPr txBox="1"/>
+          <p:nvPr/>
+        </p:nvSpPr>
+        <p:spPr>
+          <a:xfrm>
+            <a:off x="932688" y="3236976"/>
+            <a:ext cx="3222650" cy="640080"/>
+          </a:xfrm>
+          <a:prstGeom prst="rect">
+            <a:avLst/>
+          </a:prstGeom>
+          <a:noFill/>
+        </p:spPr>
+        <p:txBody>
+          <a:bodyPr wrap="square" lIns="0" rIns="0" tIns="0" bIns="0" anchor="t">
+            <a:spAutoFit/>
+          </a:bodyPr>
+          <a:lstStyle/>
+          <a:p>
+            <a:pPr algn="l">
+              <a:lnSpc>
+                <a:spcPct val="132000"/>
+              </a:lnSpc>
+            </a:pPr>
+            <a:r>
+              <a:rPr sz="1800" b="1" i="0">
+                <a:solidFill>
+                  <a:srgbClr val="166534"/>
+                </a:solidFill>
+                <a:latin typeface="Verdana"/>
+              </a:rPr>
+              <a:t>le son « in »</a:t>
+            </a:r>
+          </a:p>
+        </p:txBody>
+      </p:sp>
+      <p:sp>
+        <p:nvSpPr>
+          <p:cNvPr id="16" name="TextBox 15"/>
+          <p:cNvSpPr txBox="1"/>
+          <p:nvPr/>
+        </p:nvSpPr>
+        <p:spPr>
+          <a:xfrm>
+            <a:off x="4374794" y="3236976"/>
+            <a:ext cx="3222650" cy="640080"/>
+          </a:xfrm>
+          <a:prstGeom prst="rect">
+            <a:avLst/>
+          </a:prstGeom>
+          <a:noFill/>
+        </p:spPr>
+        <p:txBody>
+          <a:bodyPr wrap="square" lIns="0" rIns="0" tIns="0" bIns="0" anchor="t">
+            <a:spAutoFit/>
+          </a:bodyPr>
+          <a:lstStyle/>
+          <a:p>
+            <a:pPr algn="l">
+              <a:lnSpc>
+                <a:spcPct val="132000"/>
+              </a:lnSpc>
+            </a:pPr>
+            <a:r>
+              <a:rPr sz="1800" b="0" i="0">
+                <a:solidFill>
+                  <a:srgbClr val="3A3D40"/>
+                </a:solidFill>
+                <a:latin typeface="Verdana"/>
+              </a:rPr>
+              <a:t>in, im, ain, ein, ien</a:t>
+            </a:r>
+          </a:p>
+        </p:txBody>
+      </p:sp>
+      <p:sp>
+        <p:nvSpPr>
+          <p:cNvPr id="17" name="TextBox 16"/>
+          <p:cNvSpPr txBox="1"/>
+          <p:nvPr/>
+        </p:nvSpPr>
+        <p:spPr>
+          <a:xfrm>
+            <a:off x="7816900" y="3236976"/>
+            <a:ext cx="3222650" cy="640080"/>
+          </a:xfrm>
+          <a:prstGeom prst="rect">
+            <a:avLst/>
+          </a:prstGeom>
+          <a:noFill/>
+        </p:spPr>
+        <p:txBody>
+          <a:bodyPr wrap="square" lIns="0" rIns="0" tIns="0" bIns="0" anchor="t">
+            <a:spAutoFit/>
+          </a:bodyPr>
+          <a:lstStyle/>
+          <a:p>
+            <a:pPr algn="l">
+              <a:lnSpc>
+                <a:spcPct val="132000"/>
+              </a:lnSpc>
+            </a:pPr>
+            <a:r>
+              <a:rPr sz="1800" b="0" i="0">
+                <a:solidFill>
+                  <a:srgbClr val="3A3D40"/>
+                </a:solidFill>
+                <a:latin typeface="Verdana"/>
+              </a:rPr>
+              <a:t>médecin, pharmacien, matin, bien</a:t>
+            </a:r>
+          </a:p>
+        </p:txBody>
+      </p:sp>
+      <p:sp>
+        <p:nvSpPr>
+          <p:cNvPr id="18" name="Rounded Rectangle 17"/>
+          <p:cNvSpPr/>
+          <p:nvPr/>
+        </p:nvSpPr>
+        <p:spPr>
+          <a:xfrm>
+            <a:off x="566928" y="4370831"/>
+            <a:ext cx="11057839" cy="1175004"/>
+          </a:xfrm>
+          <a:prstGeom prst="roundRect">
+            <a:avLst>
+              <a:gd name="adj" fmla="val 12451"/>
+            </a:avLst>
+          </a:prstGeom>
+          <a:solidFill>
+            <a:srgbClr val="FBFBFA"/>
+          </a:solidFill>
+          <a:ln w="12700">
+            <a:solidFill>
+              <a:srgbClr val="EAEAE8"/>
+            </a:solidFill>
+          </a:ln>
+          <a:effectLst/>
+        </p:spPr>
+        <p:style>
+          <a:lnRef idx="1">
+            <a:schemeClr val="accent1"/>
+          </a:lnRef>
+          <a:fillRef idx="3">
+            <a:schemeClr val="accent1"/>
+          </a:fillRef>
+          <a:effectRef idx="2">
+            <a:schemeClr val="accent1"/>
+          </a:effectRef>
+          <a:fontRef idx="minor">
+            <a:schemeClr val="lt1"/>
+          </a:fontRef>
+        </p:style>
+        <p:txBody>
+          <a:bodyPr rtlCol="0" anchor="ctr"/>
+          <a:lstStyle/>
+          <a:p/>
+        </p:txBody>
+      </p:sp>
+      <p:sp>
+        <p:nvSpPr>
+          <p:cNvPr id="19" name="TextBox 18"/>
+          <p:cNvSpPr txBox="1"/>
+          <p:nvPr/>
+        </p:nvSpPr>
+        <p:spPr>
+          <a:xfrm>
+            <a:off x="969264" y="4626864"/>
+            <a:ext cx="10234879" cy="717804"/>
+          </a:xfrm>
+          <a:prstGeom prst="rect">
+            <a:avLst/>
+          </a:prstGeom>
+          <a:noFill/>
+        </p:spPr>
+        <p:txBody>
+          <a:bodyPr wrap="square" lIns="0" rIns="0" tIns="0" bIns="0" anchor="t">
+            <a:spAutoFit/>
+          </a:bodyPr>
+          <a:lstStyle/>
+          <a:p>
+            <a:pPr algn="l">
+              <a:lnSpc>
+                <a:spcPct val="145000"/>
+              </a:lnSpc>
+            </a:pPr>
+            <a:r>
+              <a:rPr sz="1800" b="0" i="0">
+                <a:solidFill>
+                  <a:srgbClr val="4B4F52"/>
+                </a:solidFill>
+                <a:latin typeface="Verdana"/>
+              </a:rPr>
+              <a:t>Deux mots repères d'une syllabe : « dent » pour le son « an », « main » pour le son « in ». On y revient chaque fois qu'on hésite.</a:t>
+            </a:r>
+          </a:p>
+        </p:txBody>
+      </p:sp>
+    </p:spTree>
+  </p:cSld>
+  <p:clrMapOvr>
+    <a:masterClrMapping/>
+  </p:clrMapOvr>
+</p:sld>
+</file>
+
+<file path=ppt/slides/slide13.xml><?xml version="1.0" encoding="utf-8"?>
+<p:sld xmlns:a="http://schemas.openxmlformats.org/drawingml/2006/main" xmlns:p="http://schemas.openxmlformats.org/presentationml/2006/main" xmlns:r="http://schemas.openxmlformats.org/officeDocument/2006/relationships">
+  <p:cSld>
+    <p:spTree>
+      <p:nvGrpSpPr>
+        <p:cNvPr id="1" name=""/>
+        <p:cNvGrpSpPr/>
+        <p:nvPr/>
+      </p:nvGrpSpPr>
+      <p:grpSpPr/>
+      <p:sp>
+        <p:nvSpPr>
+          <p:cNvPr id="2" name="Rectangle 1"/>
+          <p:cNvSpPr/>
+          <p:nvPr/>
+        </p:nvSpPr>
+        <p:spPr>
+          <a:xfrm>
+            <a:off x="0" y="0"/>
+            <a:ext cx="12191695" cy="6858000"/>
+          </a:xfrm>
+          <a:prstGeom prst="rect">
+            <a:avLst/>
+          </a:prstGeom>
+          <a:solidFill>
+            <a:srgbClr val="F7F7F5"/>
+          </a:solidFill>
+          <a:ln>
+            <a:noFill/>
+          </a:ln>
+          <a:effectLst/>
+        </p:spPr>
+        <p:style>
+          <a:lnRef idx="1">
+            <a:schemeClr val="accent1"/>
+          </a:lnRef>
+          <a:fillRef idx="3">
+            <a:schemeClr val="accent1"/>
+          </a:fillRef>
+          <a:effectRef idx="2">
+            <a:schemeClr val="accent1"/>
+          </a:effectRef>
+          <a:fontRef idx="minor">
+            <a:schemeClr val="lt1"/>
+          </a:fontRef>
+        </p:style>
+        <p:txBody>
+          <a:bodyPr rtlCol="0" anchor="ctr"/>
+          <a:lstStyle/>
+          <a:p/>
+        </p:txBody>
+      </p:sp>
+      <p:sp>
+        <p:nvSpPr>
+          <p:cNvPr id="3" name="TextBox 2"/>
+          <p:cNvSpPr txBox="1"/>
+          <p:nvPr/>
+        </p:nvSpPr>
+        <p:spPr>
+          <a:xfrm>
+            <a:off x="566928" y="6355080"/>
+            <a:ext cx="6400800" cy="219456"/>
+          </a:xfrm>
+          <a:prstGeom prst="rect">
+            <a:avLst/>
+          </a:prstGeom>
+          <a:noFill/>
+        </p:spPr>
+        <p:txBody>
+          <a:bodyPr wrap="square" lIns="0" rIns="0" tIns="0" bIns="0" anchor="t">
+            <a:spAutoFit/>
+          </a:bodyPr>
+          <a:lstStyle/>
+          <a:p>
+            <a:pPr algn="l">
+              <a:lnSpc>
+                <a:spcPct val="135000"/>
+              </a:lnSpc>
+            </a:pPr>
+            <a:r>
+              <a:rPr sz="1200" b="0" i="0">
+                <a:solidFill>
+                  <a:srgbClr val="6E7175"/>
+                </a:solidFill>
+                <a:latin typeface="Verdana"/>
+              </a:rPr>
+              <a:t>A3 · Prendre rendez-vous et aller à la pharmacie</a:t>
+            </a:r>
+          </a:p>
+        </p:txBody>
+      </p:sp>
+      <p:sp>
+        <p:nvSpPr>
+          <p:cNvPr id="4" name="TextBox 3"/>
+          <p:cNvSpPr txBox="1"/>
+          <p:nvPr/>
+        </p:nvSpPr>
+        <p:spPr>
+          <a:xfrm>
+            <a:off x="10710367" y="6355080"/>
+            <a:ext cx="914400" cy="219456"/>
+          </a:xfrm>
+          <a:prstGeom prst="rect">
+            <a:avLst/>
+          </a:prstGeom>
+          <a:noFill/>
+        </p:spPr>
+        <p:txBody>
+          <a:bodyPr wrap="square" lIns="0" rIns="0" tIns="0" bIns="0" anchor="t">
+            <a:spAutoFit/>
+          </a:bodyPr>
+          <a:lstStyle/>
+          <a:p>
+            <a:pPr algn="r">
+              <a:lnSpc>
+                <a:spcPct val="135000"/>
+              </a:lnSpc>
+            </a:pPr>
+            <a:r>
+              <a:rPr sz="1200" b="0" i="0">
+                <a:solidFill>
+                  <a:srgbClr val="6E7175"/>
+                </a:solidFill>
+                <a:latin typeface="Verdana"/>
+              </a:rPr>
+              <a:t>13</a:t>
+            </a:r>
+          </a:p>
+        </p:txBody>
+      </p:sp>
+      <p:sp>
+        <p:nvSpPr>
+          <p:cNvPr id="5" name="TextBox 4"/>
+          <p:cNvSpPr txBox="1"/>
+          <p:nvPr/>
+        </p:nvSpPr>
+        <p:spPr>
+          <a:xfrm>
+            <a:off x="566928" y="420624"/>
+            <a:ext cx="11057839" cy="237744"/>
+          </a:xfrm>
+          <a:prstGeom prst="rect">
+            <a:avLst/>
+          </a:prstGeom>
+          <a:noFill/>
+        </p:spPr>
+        <p:txBody>
+          <a:bodyPr wrap="square" lIns="0" rIns="0" tIns="0" bIns="0" anchor="t">
+            <a:spAutoFit/>
+          </a:bodyPr>
+          <a:lstStyle/>
+          <a:p>
+            <a:pPr algn="l">
+              <a:lnSpc>
+                <a:spcPct val="135000"/>
+              </a:lnSpc>
+            </a:pPr>
+            <a:r>
+              <a:rPr sz="1300" b="1" i="0" spc="156">
+                <a:solidFill>
+                  <a:srgbClr val="166534"/>
+                </a:solidFill>
+                <a:latin typeface="Verdana"/>
+              </a:rPr>
+              <a:t>LE PIÈGE DE LA FINALE « -IEN »</a:t>
+            </a:r>
+          </a:p>
+        </p:txBody>
+      </p:sp>
+      <p:sp>
+        <p:nvSpPr>
+          <p:cNvPr id="6" name="TextBox 5"/>
+          <p:cNvSpPr txBox="1"/>
+          <p:nvPr/>
+        </p:nvSpPr>
+        <p:spPr>
+          <a:xfrm>
+            <a:off x="566928" y="749808"/>
+            <a:ext cx="11057839" cy="877824"/>
+          </a:xfrm>
+          <a:prstGeom prst="rect">
+            <a:avLst/>
+          </a:prstGeom>
+          <a:noFill/>
+        </p:spPr>
+        <p:txBody>
+          <a:bodyPr wrap="square" lIns="0" rIns="0" tIns="0" bIns="0" anchor="t">
+            <a:spAutoFit/>
+          </a:bodyPr>
+          <a:lstStyle/>
+          <a:p>
+            <a:pPr algn="l">
+              <a:lnSpc>
+                <a:spcPct val="115000"/>
+              </a:lnSpc>
+            </a:pPr>
+            <a:r>
+              <a:rPr sz="3400" b="1" i="0">
+                <a:solidFill>
+                  <a:srgbClr val="17181A"/>
+                </a:solidFill>
+                <a:latin typeface="Verdana"/>
+              </a:rPr>
+              <a:t>Le piège le plus fréquent</a:t>
+            </a:r>
+          </a:p>
+        </p:txBody>
+      </p:sp>
+      <p:sp>
+        <p:nvSpPr>
+          <p:cNvPr id="7" name="Rounded Rectangle 6"/>
+          <p:cNvSpPr/>
+          <p:nvPr/>
+        </p:nvSpPr>
+        <p:spPr>
+          <a:xfrm>
+            <a:off x="566928" y="1856232"/>
+            <a:ext cx="5428335" cy="2331720"/>
+          </a:xfrm>
+          <a:prstGeom prst="roundRect">
+            <a:avLst>
+              <a:gd name="adj" fmla="val 6274"/>
+            </a:avLst>
+          </a:prstGeom>
+          <a:solidFill>
+            <a:srgbClr val="FFF6F5"/>
+          </a:solidFill>
+          <a:ln w="12700">
+            <a:solidFill>
+              <a:srgbClr val="DC2626"/>
+            </a:solidFill>
+          </a:ln>
+          <a:effectLst/>
+        </p:spPr>
+        <p:style>
+          <a:lnRef idx="1">
+            <a:schemeClr val="accent1"/>
+          </a:lnRef>
+          <a:fillRef idx="3">
+            <a:schemeClr val="accent1"/>
+          </a:fillRef>
+          <a:effectRef idx="2">
+            <a:schemeClr val="accent1"/>
+          </a:effectRef>
+          <a:fontRef idx="minor">
+            <a:schemeClr val="lt1"/>
+          </a:fontRef>
+        </p:style>
+        <p:txBody>
+          <a:bodyPr rtlCol="0" anchor="ctr"/>
+          <a:lstStyle/>
+          <a:p/>
+        </p:txBody>
+      </p:sp>
+      <p:sp>
+        <p:nvSpPr>
+          <p:cNvPr id="8" name="TextBox 7"/>
+          <p:cNvSpPr txBox="1"/>
+          <p:nvPr/>
+        </p:nvSpPr>
+        <p:spPr>
+          <a:xfrm>
+            <a:off x="932688" y="2130552"/>
+            <a:ext cx="4696815" cy="274320"/>
+          </a:xfrm>
+          <a:prstGeom prst="rect">
+            <a:avLst/>
+          </a:prstGeom>
+          <a:noFill/>
+        </p:spPr>
+        <p:txBody>
+          <a:bodyPr wrap="square" lIns="0" rIns="0" tIns="0" bIns="0" anchor="t">
+            <a:spAutoFit/>
+          </a:bodyPr>
+          <a:lstStyle/>
+          <a:p>
+            <a:pPr algn="l">
+              <a:lnSpc>
+                <a:spcPct val="135000"/>
+              </a:lnSpc>
+            </a:pPr>
+            <a:r>
+              <a:rPr sz="1300" b="1" i="0" spc="156">
+                <a:solidFill>
+                  <a:srgbClr val="B91C1C"/>
+                </a:solidFill>
+                <a:latin typeface="Verdana"/>
+              </a:rPr>
+              <a:t>ON ENTEND SOUVENT</a:t>
+            </a:r>
+          </a:p>
+        </p:txBody>
+      </p:sp>
+      <p:sp>
+        <p:nvSpPr>
+          <p:cNvPr id="9" name="TextBox 8"/>
+          <p:cNvSpPr txBox="1"/>
+          <p:nvPr/>
+        </p:nvSpPr>
+        <p:spPr>
+          <a:xfrm>
+            <a:off x="932688" y="2569464"/>
+            <a:ext cx="4696815" cy="1417320"/>
+          </a:xfrm>
+          <a:prstGeom prst="rect">
+            <a:avLst/>
+          </a:prstGeom>
+          <a:noFill/>
+        </p:spPr>
+        <p:txBody>
+          <a:bodyPr wrap="square" lIns="0" rIns="0" tIns="0" bIns="0" anchor="t">
+            <a:spAutoFit/>
+          </a:bodyPr>
+          <a:lstStyle/>
+          <a:p>
+            <a:pPr algn="l">
+              <a:lnSpc>
+                <a:spcPct val="130000"/>
+              </a:lnSpc>
+            </a:pPr>
+            <a:r>
+              <a:rPr sz="2500" b="1" i="0">
+                <a:solidFill>
+                  <a:srgbClr val="17181A"/>
+                </a:solidFill>
+                <a:latin typeface="Verdana"/>
+              </a:rPr>
+              <a:t>pharmaci-an, traitement de la finale comme dans patient</a:t>
+            </a:r>
+          </a:p>
+        </p:txBody>
+      </p:sp>
+      <p:sp>
+        <p:nvSpPr>
+          <p:cNvPr id="10" name="Rounded Rectangle 9"/>
+          <p:cNvSpPr/>
+          <p:nvPr/>
+        </p:nvSpPr>
+        <p:spPr>
+          <a:xfrm>
+            <a:off x="6196431" y="1856232"/>
+            <a:ext cx="5428335" cy="2331720"/>
+          </a:xfrm>
+          <a:prstGeom prst="roundRect">
+            <a:avLst>
+              <a:gd name="adj" fmla="val 6274"/>
+            </a:avLst>
+          </a:prstGeom>
+          <a:solidFill>
+            <a:srgbClr val="E6F5EE"/>
+          </a:solidFill>
+          <a:ln w="12700">
+            <a:solidFill>
+              <a:srgbClr val="0A8F5B"/>
+            </a:solidFill>
+          </a:ln>
+          <a:effectLst/>
+        </p:spPr>
+        <p:style>
+          <a:lnRef idx="1">
+            <a:schemeClr val="accent1"/>
+          </a:lnRef>
+          <a:fillRef idx="3">
+            <a:schemeClr val="accent1"/>
+          </a:fillRef>
+          <a:effectRef idx="2">
+            <a:schemeClr val="accent1"/>
+          </a:effectRef>
+          <a:fontRef idx="minor">
+            <a:schemeClr val="lt1"/>
+          </a:fontRef>
+        </p:style>
+        <p:txBody>
+          <a:bodyPr rtlCol="0" anchor="ctr"/>
+          <a:lstStyle/>
+          <a:p/>
+        </p:txBody>
+      </p:sp>
+      <p:sp>
+        <p:nvSpPr>
+          <p:cNvPr id="11" name="TextBox 10"/>
+          <p:cNvSpPr txBox="1"/>
+          <p:nvPr/>
+        </p:nvSpPr>
+        <p:spPr>
+          <a:xfrm>
+            <a:off x="6562191" y="2130552"/>
+            <a:ext cx="4696815" cy="274320"/>
+          </a:xfrm>
+          <a:prstGeom prst="rect">
+            <a:avLst/>
+          </a:prstGeom>
+          <a:noFill/>
+        </p:spPr>
+        <p:txBody>
+          <a:bodyPr wrap="square" lIns="0" rIns="0" tIns="0" bIns="0" anchor="t">
+            <a:spAutoFit/>
+          </a:bodyPr>
+          <a:lstStyle/>
+          <a:p>
+            <a:pPr algn="l">
+              <a:lnSpc>
+                <a:spcPct val="135000"/>
+              </a:lnSpc>
+            </a:pPr>
+            <a:r>
+              <a:rPr sz="1300" b="1" i="0" spc="156">
+                <a:solidFill>
+                  <a:srgbClr val="07734A"/>
+                </a:solidFill>
+                <a:latin typeface="Verdana"/>
+              </a:rPr>
+              <a:t>IL FAUT DIRE PLUTÔT</a:t>
+            </a:r>
+          </a:p>
+        </p:txBody>
+      </p:sp>
+      <p:sp>
+        <p:nvSpPr>
+          <p:cNvPr id="12" name="TextBox 11"/>
+          <p:cNvSpPr txBox="1"/>
+          <p:nvPr/>
+        </p:nvSpPr>
+        <p:spPr>
+          <a:xfrm>
+            <a:off x="6562191" y="2569464"/>
+            <a:ext cx="4696815" cy="1417320"/>
+          </a:xfrm>
+          <a:prstGeom prst="rect">
+            <a:avLst/>
+          </a:prstGeom>
+          <a:noFill/>
+        </p:spPr>
+        <p:txBody>
+          <a:bodyPr wrap="square" lIns="0" rIns="0" tIns="0" bIns="0" anchor="t">
+            <a:spAutoFit/>
+          </a:bodyPr>
+          <a:lstStyle/>
+          <a:p>
+            <a:pPr algn="l">
+              <a:lnSpc>
+                <a:spcPct val="130000"/>
+              </a:lnSpc>
+            </a:pPr>
+            <a:r>
+              <a:rPr sz="2500" b="1" i="0">
+                <a:solidFill>
+                  <a:srgbClr val="17181A"/>
+                </a:solidFill>
+                <a:latin typeface="Verdana"/>
+              </a:rPr>
+              <a:t>pharmaci-en — la finale se dit comme « bien »</a:t>
+            </a:r>
+          </a:p>
+        </p:txBody>
+      </p:sp>
+      <p:sp>
+        <p:nvSpPr>
+          <p:cNvPr id="13" name="Rounded Rectangle 12"/>
+          <p:cNvSpPr/>
+          <p:nvPr/>
+        </p:nvSpPr>
+        <p:spPr>
+          <a:xfrm>
+            <a:off x="566928" y="4462272"/>
+            <a:ext cx="11057839" cy="1618487"/>
+          </a:xfrm>
+          <a:prstGeom prst="roundRect">
+            <a:avLst>
+              <a:gd name="adj" fmla="val 9039"/>
+            </a:avLst>
+          </a:prstGeom>
+          <a:solidFill>
+            <a:srgbClr val="FFFFFF"/>
+          </a:solidFill>
+          <a:ln w="12700">
+            <a:solidFill>
+              <a:srgbClr val="EAEAE8"/>
+            </a:solidFill>
+          </a:ln>
+          <a:effectLst/>
+        </p:spPr>
+        <p:style>
+          <a:lnRef idx="1">
+            <a:schemeClr val="accent1"/>
+          </a:lnRef>
+          <a:fillRef idx="3">
+            <a:schemeClr val="accent1"/>
+          </a:fillRef>
+          <a:effectRef idx="2">
+            <a:schemeClr val="accent1"/>
+          </a:effectRef>
+          <a:fontRef idx="minor">
+            <a:schemeClr val="lt1"/>
+          </a:fontRef>
+        </p:style>
+        <p:txBody>
+          <a:bodyPr rtlCol="0" anchor="ctr"/>
+          <a:lstStyle/>
+          <a:p/>
+        </p:txBody>
+      </p:sp>
+      <p:sp>
+        <p:nvSpPr>
+          <p:cNvPr id="14" name="TextBox 13"/>
+          <p:cNvSpPr txBox="1"/>
+          <p:nvPr/>
+        </p:nvSpPr>
+        <p:spPr>
+          <a:xfrm>
+            <a:off x="969264" y="4736592"/>
+            <a:ext cx="10234879" cy="1150620"/>
+          </a:xfrm>
+          <a:prstGeom prst="rect">
+            <a:avLst/>
+          </a:prstGeom>
+          <a:noFill/>
+        </p:spPr>
+        <p:txBody>
+          <a:bodyPr wrap="square" lIns="0" rIns="0" tIns="0" bIns="0" anchor="t">
+            <a:spAutoFit/>
+          </a:bodyPr>
+          <a:lstStyle/>
+          <a:p>
+            <a:pPr algn="l">
+              <a:lnSpc>
+                <a:spcPct val="145000"/>
+              </a:lnSpc>
+            </a:pPr>
+            <a:r>
+              <a:rPr sz="2000" b="0" i="0">
+                <a:solidFill>
+                  <a:srgbClr val="4B4F52"/>
+                </a:solidFill>
+                <a:latin typeface="Verdana"/>
+              </a:rPr>
+              <a:t>Les finales « -ien » et « -ent » ne se prononcent pas pareil : pharmacien et bien font le son « in », alors que patient et pendant font le son « an ». L'orthographe ne prévient pas : il faut retenir le mot entier.</a:t>
+            </a:r>
+          </a:p>
+        </p:txBody>
+      </p:sp>
+    </p:spTree>
+  </p:cSld>
+  <p:clrMapOvr>
+    <a:masterClrMapping/>
+  </p:clrMapOvr>
+</p:sld>
+</file>
+
+<file path=ppt/slides/slide14.xml><?xml version="1.0" encoding="utf-8"?>
+<p:sld xmlns:a="http://schemas.openxmlformats.org/drawingml/2006/main" xmlns:p="http://schemas.openxmlformats.org/presentationml/2006/main" xmlns:r="http://schemas.openxmlformats.org/officeDocument/2006/relationships">
+  <p:cSld>
+    <p:spTree>
+      <p:nvGrpSpPr>
+        <p:cNvPr id="1" name=""/>
+        <p:cNvGrpSpPr/>
+        <p:nvPr/>
+      </p:nvGrpSpPr>
+      <p:grpSpPr/>
+      <p:sp>
+        <p:nvSpPr>
+          <p:cNvPr id="2" name="Rectangle 1"/>
+          <p:cNvSpPr/>
+          <p:nvPr/>
+        </p:nvSpPr>
+        <p:spPr>
+          <a:xfrm>
+            <a:off x="0" y="0"/>
+            <a:ext cx="12191695" cy="6858000"/>
+          </a:xfrm>
+          <a:prstGeom prst="rect">
+            <a:avLst/>
+          </a:prstGeom>
+          <a:solidFill>
+            <a:srgbClr val="F7F7F5"/>
+          </a:solidFill>
+          <a:ln>
+            <a:noFill/>
+          </a:ln>
+          <a:effectLst/>
+        </p:spPr>
+        <p:style>
+          <a:lnRef idx="1">
+            <a:schemeClr val="accent1"/>
+          </a:lnRef>
+          <a:fillRef idx="3">
+            <a:schemeClr val="accent1"/>
+          </a:fillRef>
+          <a:effectRef idx="2">
+            <a:schemeClr val="accent1"/>
+          </a:effectRef>
+          <a:fontRef idx="minor">
+            <a:schemeClr val="lt1"/>
+          </a:fontRef>
+        </p:style>
+        <p:txBody>
+          <a:bodyPr rtlCol="0" anchor="ctr"/>
+          <a:lstStyle/>
+          <a:p/>
+        </p:txBody>
+      </p:sp>
+      <p:sp>
+        <p:nvSpPr>
+          <p:cNvPr id="3" name="TextBox 2"/>
+          <p:cNvSpPr txBox="1"/>
+          <p:nvPr/>
+        </p:nvSpPr>
+        <p:spPr>
+          <a:xfrm>
+            <a:off x="566928" y="6355080"/>
+            <a:ext cx="6400800" cy="219456"/>
+          </a:xfrm>
+          <a:prstGeom prst="rect">
+            <a:avLst/>
+          </a:prstGeom>
+          <a:noFill/>
+        </p:spPr>
+        <p:txBody>
+          <a:bodyPr wrap="square" lIns="0" rIns="0" tIns="0" bIns="0" anchor="t">
+            <a:spAutoFit/>
+          </a:bodyPr>
+          <a:lstStyle/>
+          <a:p>
+            <a:pPr algn="l">
+              <a:lnSpc>
+                <a:spcPct val="135000"/>
+              </a:lnSpc>
+            </a:pPr>
+            <a:r>
+              <a:rPr sz="1200" b="0" i="0">
+                <a:solidFill>
+                  <a:srgbClr val="6E7175"/>
+                </a:solidFill>
+                <a:latin typeface="Verdana"/>
+              </a:rPr>
+              <a:t>A3 · Prendre rendez-vous et aller à la pharmacie</a:t>
+            </a:r>
+          </a:p>
+        </p:txBody>
+      </p:sp>
+      <p:sp>
+        <p:nvSpPr>
+          <p:cNvPr id="4" name="TextBox 3"/>
+          <p:cNvSpPr txBox="1"/>
+          <p:nvPr/>
+        </p:nvSpPr>
+        <p:spPr>
+          <a:xfrm>
+            <a:off x="10710367" y="6355080"/>
+            <a:ext cx="914400" cy="219456"/>
+          </a:xfrm>
+          <a:prstGeom prst="rect">
+            <a:avLst/>
+          </a:prstGeom>
+          <a:noFill/>
+        </p:spPr>
+        <p:txBody>
+          <a:bodyPr wrap="square" lIns="0" rIns="0" tIns="0" bIns="0" anchor="t">
+            <a:spAutoFit/>
+          </a:bodyPr>
+          <a:lstStyle/>
+          <a:p>
+            <a:pPr algn="r">
+              <a:lnSpc>
+                <a:spcPct val="135000"/>
+              </a:lnSpc>
+            </a:pPr>
+            <a:r>
+              <a:rPr sz="1200" b="0" i="0">
+                <a:solidFill>
+                  <a:srgbClr val="6E7175"/>
+                </a:solidFill>
+                <a:latin typeface="Verdana"/>
+              </a:rPr>
+              <a:t>14</a:t>
+            </a:r>
+          </a:p>
+        </p:txBody>
+      </p:sp>
+      <p:sp>
+        <p:nvSpPr>
+          <p:cNvPr id="5" name="TextBox 4"/>
+          <p:cNvSpPr txBox="1"/>
+          <p:nvPr/>
+        </p:nvSpPr>
+        <p:spPr>
+          <a:xfrm>
+            <a:off x="566928" y="420624"/>
+            <a:ext cx="11057839" cy="237744"/>
+          </a:xfrm>
+          <a:prstGeom prst="rect">
+            <a:avLst/>
+          </a:prstGeom>
+          <a:noFill/>
+        </p:spPr>
+        <p:txBody>
+          <a:bodyPr wrap="square" lIns="0" rIns="0" tIns="0" bIns="0" anchor="t">
+            <a:spAutoFit/>
+          </a:bodyPr>
+          <a:lstStyle/>
+          <a:p>
+            <a:pPr algn="l">
+              <a:lnSpc>
+                <a:spcPct val="135000"/>
+              </a:lnSpc>
+            </a:pPr>
+            <a:r>
+              <a:rPr sz="1300" b="1" i="0" spc="156">
+                <a:solidFill>
+                  <a:srgbClr val="166534"/>
+                </a:solidFill>
+                <a:latin typeface="Verdana"/>
+              </a:rPr>
+              <a:t>PRATIQUE · 4 DE 5</a:t>
+            </a:r>
+          </a:p>
+        </p:txBody>
+      </p:sp>
+      <p:sp>
+        <p:nvSpPr>
+          <p:cNvPr id="6" name="TextBox 5"/>
+          <p:cNvSpPr txBox="1"/>
+          <p:nvPr/>
+        </p:nvSpPr>
+        <p:spPr>
+          <a:xfrm>
+            <a:off x="566928" y="749808"/>
+            <a:ext cx="11057839" cy="877824"/>
+          </a:xfrm>
+          <a:prstGeom prst="rect">
+            <a:avLst/>
+          </a:prstGeom>
+          <a:noFill/>
+        </p:spPr>
+        <p:txBody>
+          <a:bodyPr wrap="square" lIns="0" rIns="0" tIns="0" bIns="0" anchor="t">
+            <a:spAutoFit/>
+          </a:bodyPr>
+          <a:lstStyle/>
+          <a:p>
+            <a:pPr algn="l">
+              <a:lnSpc>
+                <a:spcPct val="115000"/>
+              </a:lnSpc>
+            </a:pPr>
+            <a:r>
+              <a:rPr sz="3400" b="1" i="0">
+                <a:solidFill>
+                  <a:srgbClr val="17181A"/>
+                </a:solidFill>
+                <a:latin typeface="Verdana"/>
+              </a:rPr>
+              <a:t>Quel son entendez-vous ?</a:t>
+            </a:r>
+          </a:p>
+        </p:txBody>
+      </p:sp>
+      <p:sp>
+        <p:nvSpPr>
+          <p:cNvPr id="7" name="TextBox 6"/>
+          <p:cNvSpPr txBox="1"/>
+          <p:nvPr/>
+        </p:nvSpPr>
+        <p:spPr>
+          <a:xfrm>
+            <a:off x="566928" y="1645920"/>
+            <a:ext cx="11057839" cy="329184"/>
+          </a:xfrm>
+          <a:prstGeom prst="rect">
+            <a:avLst/>
+          </a:prstGeom>
+          <a:noFill/>
+        </p:spPr>
+        <p:txBody>
+          <a:bodyPr wrap="square" lIns="0" rIns="0" tIns="0" bIns="0" anchor="t">
+            <a:spAutoFit/>
+          </a:bodyPr>
+          <a:lstStyle/>
+          <a:p>
+            <a:pPr algn="l">
+              <a:lnSpc>
+                <a:spcPct val="135000"/>
+              </a:lnSpc>
+            </a:pPr>
+            <a:r>
+              <a:rPr sz="1800" b="0" i="0">
+                <a:solidFill>
+                  <a:srgbClr val="6E7175"/>
+                </a:solidFill>
+                <a:latin typeface="Verdana"/>
+              </a:rPr>
+              <a:t>Écoutez le mot, écrivez « an » ou « in ».</a:t>
+            </a:r>
+          </a:p>
+        </p:txBody>
+      </p:sp>
+      <p:sp>
+        <p:nvSpPr>
+          <p:cNvPr id="8" name="Rounded Rectangle 7"/>
+          <p:cNvSpPr/>
+          <p:nvPr/>
+        </p:nvSpPr>
+        <p:spPr>
+          <a:xfrm>
+            <a:off x="566928" y="2139696"/>
+            <a:ext cx="5464911" cy="648716"/>
+          </a:xfrm>
+          <a:prstGeom prst="roundRect">
+            <a:avLst>
+              <a:gd name="adj" fmla="val 22552"/>
+            </a:avLst>
+          </a:prstGeom>
+          <a:solidFill>
+            <a:srgbClr val="FFFFFF"/>
+          </a:solidFill>
+          <a:ln w="12700">
+            <a:solidFill>
+              <a:srgbClr val="EAEAE8"/>
+            </a:solidFill>
+          </a:ln>
+          <a:effectLst/>
+        </p:spPr>
+        <p:style>
+          <a:lnRef idx="1">
+            <a:schemeClr val="accent1"/>
+          </a:lnRef>
+          <a:fillRef idx="3">
+            <a:schemeClr val="accent1"/>
+          </a:fillRef>
+          <a:effectRef idx="2">
+            <a:schemeClr val="accent1"/>
+          </a:effectRef>
+          <a:fontRef idx="minor">
+            <a:schemeClr val="lt1"/>
+          </a:fontRef>
+        </p:style>
+        <p:txBody>
+          <a:bodyPr rtlCol="0" anchor="ctr"/>
+          <a:lstStyle/>
+          <a:p/>
+        </p:txBody>
+      </p:sp>
+      <p:sp>
+        <p:nvSpPr>
+          <p:cNvPr id="9" name="Rounded Rectangle 8"/>
+          <p:cNvSpPr/>
+          <p:nvPr/>
+        </p:nvSpPr>
+        <p:spPr>
+          <a:xfrm>
+            <a:off x="841247" y="2281174"/>
+            <a:ext cx="365760" cy="365760"/>
+          </a:xfrm>
+          <a:prstGeom prst="roundRect">
+            <a:avLst>
+              <a:gd name="adj" fmla="val 32500"/>
+            </a:avLst>
+          </a:prstGeom>
+          <a:solidFill>
+            <a:srgbClr val="E3F1E7"/>
+          </a:solidFill>
+          <a:ln>
+            <a:noFill/>
+          </a:ln>
+          <a:effectLst/>
+        </p:spPr>
+        <p:style>
+          <a:lnRef idx="1">
+            <a:schemeClr val="accent1"/>
+          </a:lnRef>
+          <a:fillRef idx="3">
+            <a:schemeClr val="accent1"/>
+          </a:fillRef>
+          <a:effectRef idx="2">
+            <a:schemeClr val="accent1"/>
+          </a:effectRef>
+          <a:fontRef idx="minor">
+            <a:schemeClr val="lt1"/>
+          </a:fontRef>
+        </p:style>
+        <p:txBody>
+          <a:bodyPr rtlCol="0" anchor="ctr"/>
+          <a:lstStyle/>
+          <a:p/>
+        </p:txBody>
+      </p:sp>
+      <p:sp>
+        <p:nvSpPr>
+          <p:cNvPr id="10" name="TextBox 9"/>
+          <p:cNvSpPr txBox="1"/>
+          <p:nvPr/>
+        </p:nvSpPr>
+        <p:spPr>
+          <a:xfrm>
+            <a:off x="841247" y="2345182"/>
+            <a:ext cx="365760" cy="256032"/>
+          </a:xfrm>
+          <a:prstGeom prst="rect">
+            <a:avLst/>
+          </a:prstGeom>
+          <a:noFill/>
+        </p:spPr>
+        <p:txBody>
+          <a:bodyPr wrap="square" lIns="0" rIns="0" tIns="0" bIns="0" anchor="t">
+            <a:spAutoFit/>
+          </a:bodyPr>
+          <a:lstStyle/>
+          <a:p>
+            <a:pPr algn="ctr">
+              <a:lnSpc>
+                <a:spcPct val="135000"/>
+              </a:lnSpc>
+            </a:pPr>
+            <a:r>
+              <a:rPr sz="1500" b="1" i="0">
+                <a:solidFill>
+                  <a:srgbClr val="166534"/>
+                </a:solidFill>
+                <a:latin typeface="Verdana"/>
+              </a:rPr>
+              <a:t>1</a:t>
+            </a:r>
+          </a:p>
+        </p:txBody>
+      </p:sp>
+      <p:sp>
+        <p:nvSpPr>
+          <p:cNvPr id="11" name="TextBox 10"/>
+          <p:cNvSpPr txBox="1"/>
+          <p:nvPr/>
+        </p:nvSpPr>
+        <p:spPr>
+          <a:xfrm>
+            <a:off x="1344168" y="2295144"/>
+            <a:ext cx="4504791" cy="374396"/>
+          </a:xfrm>
+          <a:prstGeom prst="rect">
+            <a:avLst/>
+          </a:prstGeom>
+          <a:noFill/>
+        </p:spPr>
+        <p:txBody>
+          <a:bodyPr wrap="square" lIns="0" rIns="0" tIns="0" bIns="0" anchor="t">
+            <a:spAutoFit/>
+          </a:bodyPr>
+          <a:lstStyle/>
+          <a:p>
+            <a:pPr algn="l">
+              <a:lnSpc>
+                <a:spcPct val="140000"/>
+              </a:lnSpc>
+            </a:pPr>
+            <a:r>
+              <a:rPr sz="1900" b="0" i="0">
+                <a:solidFill>
+                  <a:srgbClr val="3A3D40"/>
+                </a:solidFill>
+                <a:latin typeface="Verdana"/>
+              </a:rPr>
+              <a:t>attente</a:t>
+            </a:r>
+          </a:p>
+        </p:txBody>
+      </p:sp>
+      <p:sp>
+        <p:nvSpPr>
+          <p:cNvPr id="12" name="Rounded Rectangle 11"/>
+          <p:cNvSpPr/>
+          <p:nvPr/>
+        </p:nvSpPr>
+        <p:spPr>
+          <a:xfrm>
+            <a:off x="6159855" y="2139696"/>
+            <a:ext cx="5464911" cy="648716"/>
+          </a:xfrm>
+          <a:prstGeom prst="roundRect">
+            <a:avLst>
+              <a:gd name="adj" fmla="val 22552"/>
+            </a:avLst>
+          </a:prstGeom>
+          <a:solidFill>
+            <a:srgbClr val="FFFFFF"/>
+          </a:solidFill>
+          <a:ln w="12700">
+            <a:solidFill>
+              <a:srgbClr val="EAEAE8"/>
+            </a:solidFill>
+          </a:ln>
+          <a:effectLst/>
+        </p:spPr>
+        <p:style>
+          <a:lnRef idx="1">
+            <a:schemeClr val="accent1"/>
+          </a:lnRef>
+          <a:fillRef idx="3">
+            <a:schemeClr val="accent1"/>
+          </a:fillRef>
+          <a:effectRef idx="2">
+            <a:schemeClr val="accent1"/>
+          </a:effectRef>
+          <a:fontRef idx="minor">
+            <a:schemeClr val="lt1"/>
+          </a:fontRef>
+        </p:style>
+        <p:txBody>
+          <a:bodyPr rtlCol="0" anchor="ctr"/>
+          <a:lstStyle/>
+          <a:p/>
+        </p:txBody>
+      </p:sp>
+      <p:sp>
+        <p:nvSpPr>
+          <p:cNvPr id="13" name="Rounded Rectangle 12"/>
+          <p:cNvSpPr/>
+          <p:nvPr/>
+        </p:nvSpPr>
+        <p:spPr>
+          <a:xfrm>
+            <a:off x="6434175" y="2281174"/>
+            <a:ext cx="365760" cy="365760"/>
+          </a:xfrm>
+          <a:prstGeom prst="roundRect">
+            <a:avLst>
+              <a:gd name="adj" fmla="val 32500"/>
+            </a:avLst>
+          </a:prstGeom>
+          <a:solidFill>
+            <a:srgbClr val="E3F1E7"/>
+          </a:solidFill>
+          <a:ln>
+            <a:noFill/>
+          </a:ln>
+          <a:effectLst/>
+        </p:spPr>
+        <p:style>
+          <a:lnRef idx="1">
+            <a:schemeClr val="accent1"/>
+          </a:lnRef>
+          <a:fillRef idx="3">
+            <a:schemeClr val="accent1"/>
+          </a:fillRef>
+          <a:effectRef idx="2">
+            <a:schemeClr val="accent1"/>
+          </a:effectRef>
+          <a:fontRef idx="minor">
+            <a:schemeClr val="lt1"/>
+          </a:fontRef>
+        </p:style>
+        <p:txBody>
+          <a:bodyPr rtlCol="0" anchor="ctr"/>
+          <a:lstStyle/>
+          <a:p/>
+        </p:txBody>
+      </p:sp>
+      <p:sp>
+        <p:nvSpPr>
+          <p:cNvPr id="14" name="TextBox 13"/>
+          <p:cNvSpPr txBox="1"/>
+          <p:nvPr/>
+        </p:nvSpPr>
+        <p:spPr>
+          <a:xfrm>
+            <a:off x="6434175" y="2345182"/>
+            <a:ext cx="365760" cy="256032"/>
+          </a:xfrm>
+          <a:prstGeom prst="rect">
+            <a:avLst/>
+          </a:prstGeom>
+          <a:noFill/>
+        </p:spPr>
+        <p:txBody>
+          <a:bodyPr wrap="square" lIns="0" rIns="0" tIns="0" bIns="0" anchor="t">
+            <a:spAutoFit/>
+          </a:bodyPr>
+          <a:lstStyle/>
+          <a:p>
+            <a:pPr algn="ctr">
+              <a:lnSpc>
+                <a:spcPct val="135000"/>
+              </a:lnSpc>
+            </a:pPr>
+            <a:r>
+              <a:rPr sz="1500" b="1" i="0">
+                <a:solidFill>
+                  <a:srgbClr val="166534"/>
+                </a:solidFill>
+                <a:latin typeface="Verdana"/>
+              </a:rPr>
+              <a:t>2</a:t>
+            </a:r>
+          </a:p>
+        </p:txBody>
+      </p:sp>
+      <p:sp>
+        <p:nvSpPr>
+          <p:cNvPr id="15" name="TextBox 14"/>
+          <p:cNvSpPr txBox="1"/>
+          <p:nvPr/>
+        </p:nvSpPr>
+        <p:spPr>
+          <a:xfrm>
+            <a:off x="6937095" y="2295144"/>
+            <a:ext cx="4504791" cy="374396"/>
+          </a:xfrm>
+          <a:prstGeom prst="rect">
+            <a:avLst/>
+          </a:prstGeom>
+          <a:noFill/>
+        </p:spPr>
+        <p:txBody>
+          <a:bodyPr wrap="square" lIns="0" rIns="0" tIns="0" bIns="0" anchor="t">
+            <a:spAutoFit/>
+          </a:bodyPr>
+          <a:lstStyle/>
+          <a:p>
+            <a:pPr algn="l">
+              <a:lnSpc>
+                <a:spcPct val="140000"/>
+              </a:lnSpc>
+            </a:pPr>
+            <a:r>
+              <a:rPr sz="1900" b="0" i="0">
+                <a:solidFill>
+                  <a:srgbClr val="3A3D40"/>
+                </a:solidFill>
+                <a:latin typeface="Verdana"/>
+              </a:rPr>
+              <a:t>pharmacien</a:t>
+            </a:r>
+          </a:p>
+        </p:txBody>
+      </p:sp>
+      <p:sp>
+        <p:nvSpPr>
+          <p:cNvPr id="16" name="Rounded Rectangle 15"/>
+          <p:cNvSpPr/>
+          <p:nvPr/>
+        </p:nvSpPr>
+        <p:spPr>
+          <a:xfrm>
+            <a:off x="566928" y="2916428"/>
+            <a:ext cx="5464911" cy="648716"/>
+          </a:xfrm>
+          <a:prstGeom prst="roundRect">
+            <a:avLst>
+              <a:gd name="adj" fmla="val 22552"/>
+            </a:avLst>
+          </a:prstGeom>
+          <a:solidFill>
+            <a:srgbClr val="FFFFFF"/>
+          </a:solidFill>
+          <a:ln w="12700">
+            <a:solidFill>
+              <a:srgbClr val="EAEAE8"/>
+            </a:solidFill>
+          </a:ln>
+          <a:effectLst/>
+        </p:spPr>
+        <p:style>
+          <a:lnRef idx="1">
+            <a:schemeClr val="accent1"/>
+          </a:lnRef>
+          <a:fillRef idx="3">
+            <a:schemeClr val="accent1"/>
+          </a:fillRef>
+          <a:effectRef idx="2">
+            <a:schemeClr val="accent1"/>
+          </a:effectRef>
+          <a:fontRef idx="minor">
+            <a:schemeClr val="lt1"/>
+          </a:fontRef>
+        </p:style>
+        <p:txBody>
+          <a:bodyPr rtlCol="0" anchor="ctr"/>
+          <a:lstStyle/>
+          <a:p/>
+        </p:txBody>
+      </p:sp>
+      <p:sp>
+        <p:nvSpPr>
+          <p:cNvPr id="17" name="Rounded Rectangle 16"/>
+          <p:cNvSpPr/>
+          <p:nvPr/>
+        </p:nvSpPr>
+        <p:spPr>
+          <a:xfrm>
+            <a:off x="841247" y="3057905"/>
+            <a:ext cx="365760" cy="365760"/>
+          </a:xfrm>
+          <a:prstGeom prst="roundRect">
+            <a:avLst>
+              <a:gd name="adj" fmla="val 32500"/>
+            </a:avLst>
+          </a:prstGeom>
+          <a:solidFill>
+            <a:srgbClr val="E3F1E7"/>
+          </a:solidFill>
+          <a:ln>
+            <a:noFill/>
+          </a:ln>
+          <a:effectLst/>
+        </p:spPr>
+        <p:style>
+          <a:lnRef idx="1">
+            <a:schemeClr val="accent1"/>
+          </a:lnRef>
+          <a:fillRef idx="3">
+            <a:schemeClr val="accent1"/>
+          </a:fillRef>
+          <a:effectRef idx="2">
+            <a:schemeClr val="accent1"/>
+          </a:effectRef>
+          <a:fontRef idx="minor">
+            <a:schemeClr val="lt1"/>
+          </a:fontRef>
+        </p:style>
+        <p:txBody>
+          <a:bodyPr rtlCol="0" anchor="ctr"/>
+          <a:lstStyle/>
+          <a:p/>
+        </p:txBody>
+      </p:sp>
+      <p:sp>
+        <p:nvSpPr>
+          <p:cNvPr id="18" name="TextBox 17"/>
+          <p:cNvSpPr txBox="1"/>
+          <p:nvPr/>
+        </p:nvSpPr>
+        <p:spPr>
+          <a:xfrm>
+            <a:off x="841247" y="3121913"/>
+            <a:ext cx="365760" cy="256032"/>
+          </a:xfrm>
+          <a:prstGeom prst="rect">
+            <a:avLst/>
+          </a:prstGeom>
+          <a:noFill/>
+        </p:spPr>
+        <p:txBody>
+          <a:bodyPr wrap="square" lIns="0" rIns="0" tIns="0" bIns="0" anchor="t">
+            <a:spAutoFit/>
+          </a:bodyPr>
+          <a:lstStyle/>
+          <a:p>
+            <a:pPr algn="ctr">
+              <a:lnSpc>
+                <a:spcPct val="135000"/>
+              </a:lnSpc>
+            </a:pPr>
+            <a:r>
+              <a:rPr sz="1500" b="1" i="0">
+                <a:solidFill>
+                  <a:srgbClr val="166534"/>
+                </a:solidFill>
+                <a:latin typeface="Verdana"/>
+              </a:rPr>
+              <a:t>3</a:t>
+            </a:r>
+          </a:p>
+        </p:txBody>
+      </p:sp>
+      <p:sp>
+        <p:nvSpPr>
+          <p:cNvPr id="19" name="TextBox 18"/>
+          <p:cNvSpPr txBox="1"/>
+          <p:nvPr/>
+        </p:nvSpPr>
+        <p:spPr>
+          <a:xfrm>
+            <a:off x="1344168" y="3071876"/>
+            <a:ext cx="4504791" cy="374396"/>
+          </a:xfrm>
+          <a:prstGeom prst="rect">
+            <a:avLst/>
+          </a:prstGeom>
+          <a:noFill/>
+        </p:spPr>
+        <p:txBody>
+          <a:bodyPr wrap="square" lIns="0" rIns="0" tIns="0" bIns="0" anchor="t">
+            <a:spAutoFit/>
+          </a:bodyPr>
+          <a:lstStyle/>
+          <a:p>
+            <a:pPr algn="l">
+              <a:lnSpc>
+                <a:spcPct val="140000"/>
+              </a:lnSpc>
+            </a:pPr>
+            <a:r>
+              <a:rPr sz="1900" b="0" i="0">
+                <a:solidFill>
+                  <a:srgbClr val="3A3D40"/>
+                </a:solidFill>
+                <a:latin typeface="Verdana"/>
+              </a:rPr>
+              <a:t>ordonnance</a:t>
+            </a:r>
+          </a:p>
+        </p:txBody>
+      </p:sp>
+      <p:sp>
+        <p:nvSpPr>
+          <p:cNvPr id="20" name="Rounded Rectangle 19"/>
+          <p:cNvSpPr/>
+          <p:nvPr/>
+        </p:nvSpPr>
+        <p:spPr>
+          <a:xfrm>
+            <a:off x="6159855" y="2916428"/>
+            <a:ext cx="5464911" cy="648716"/>
+          </a:xfrm>
+          <a:prstGeom prst="roundRect">
+            <a:avLst>
+              <a:gd name="adj" fmla="val 22552"/>
+            </a:avLst>
+          </a:prstGeom>
+          <a:solidFill>
+            <a:srgbClr val="FFFFFF"/>
+          </a:solidFill>
+          <a:ln w="12700">
+            <a:solidFill>
+              <a:srgbClr val="EAEAE8"/>
+            </a:solidFill>
+          </a:ln>
+          <a:effectLst/>
+        </p:spPr>
+        <p:style>
+          <a:lnRef idx="1">
+            <a:schemeClr val="accent1"/>
+          </a:lnRef>
+          <a:fillRef idx="3">
+            <a:schemeClr val="accent1"/>
+          </a:fillRef>
+          <a:effectRef idx="2">
+            <a:schemeClr val="accent1"/>
+          </a:effectRef>
+          <a:fontRef idx="minor">
+            <a:schemeClr val="lt1"/>
+          </a:fontRef>
+        </p:style>
+        <p:txBody>
+          <a:bodyPr rtlCol="0" anchor="ctr"/>
+          <a:lstStyle/>
+          <a:p/>
+        </p:txBody>
+      </p:sp>
+      <p:sp>
+        <p:nvSpPr>
+          <p:cNvPr id="21" name="Rounded Rectangle 20"/>
+          <p:cNvSpPr/>
+          <p:nvPr/>
+        </p:nvSpPr>
+        <p:spPr>
+          <a:xfrm>
+            <a:off x="6434175" y="3057905"/>
+            <a:ext cx="365760" cy="365760"/>
+          </a:xfrm>
+          <a:prstGeom prst="roundRect">
+            <a:avLst>
+              <a:gd name="adj" fmla="val 32500"/>
+            </a:avLst>
+          </a:prstGeom>
+          <a:solidFill>
+            <a:srgbClr val="E3F1E7"/>
+          </a:solidFill>
+          <a:ln>
+            <a:noFill/>
+          </a:ln>
+          <a:effectLst/>
+        </p:spPr>
+        <p:style>
+          <a:lnRef idx="1">
+            <a:schemeClr val="accent1"/>
+          </a:lnRef>
+          <a:fillRef idx="3">
+            <a:schemeClr val="accent1"/>
+          </a:fillRef>
+          <a:effectRef idx="2">
+            <a:schemeClr val="accent1"/>
+          </a:effectRef>
+          <a:fontRef idx="minor">
+            <a:schemeClr val="lt1"/>
+          </a:fontRef>
+        </p:style>
+        <p:txBody>
+          <a:bodyPr rtlCol="0" anchor="ctr"/>
+          <a:lstStyle/>
+          <a:p/>
+        </p:txBody>
+      </p:sp>
+      <p:sp>
+        <p:nvSpPr>
+          <p:cNvPr id="22" name="TextBox 21"/>
+          <p:cNvSpPr txBox="1"/>
+          <p:nvPr/>
+        </p:nvSpPr>
+        <p:spPr>
+          <a:xfrm>
+            <a:off x="6434175" y="3121913"/>
+            <a:ext cx="365760" cy="256032"/>
+          </a:xfrm>
+          <a:prstGeom prst="rect">
+            <a:avLst/>
+          </a:prstGeom>
+          <a:noFill/>
+        </p:spPr>
+        <p:txBody>
+          <a:bodyPr wrap="square" lIns="0" rIns="0" tIns="0" bIns="0" anchor="t">
+            <a:spAutoFit/>
+          </a:bodyPr>
+          <a:lstStyle/>
+          <a:p>
+            <a:pPr algn="ctr">
+              <a:lnSpc>
+                <a:spcPct val="135000"/>
+              </a:lnSpc>
+            </a:pPr>
+            <a:r>
+              <a:rPr sz="1500" b="1" i="0">
+                <a:solidFill>
+                  <a:srgbClr val="166534"/>
+                </a:solidFill>
+                <a:latin typeface="Verdana"/>
+              </a:rPr>
+              <a:t>4</a:t>
+            </a:r>
+          </a:p>
+        </p:txBody>
+      </p:sp>
+      <p:sp>
+        <p:nvSpPr>
+          <p:cNvPr id="23" name="TextBox 22"/>
+          <p:cNvSpPr txBox="1"/>
+          <p:nvPr/>
+        </p:nvSpPr>
+        <p:spPr>
+          <a:xfrm>
+            <a:off x="6937095" y="3071876"/>
+            <a:ext cx="4504791" cy="374396"/>
+          </a:xfrm>
+          <a:prstGeom prst="rect">
+            <a:avLst/>
+          </a:prstGeom>
+          <a:noFill/>
+        </p:spPr>
+        <p:txBody>
+          <a:bodyPr wrap="square" lIns="0" rIns="0" tIns="0" bIns="0" anchor="t">
+            <a:spAutoFit/>
+          </a:bodyPr>
+          <a:lstStyle/>
+          <a:p>
+            <a:pPr algn="l">
+              <a:lnSpc>
+                <a:spcPct val="140000"/>
+              </a:lnSpc>
+            </a:pPr>
+            <a:r>
+              <a:rPr sz="1900" b="0" i="0">
+                <a:solidFill>
+                  <a:srgbClr val="3A3D40"/>
+                </a:solidFill>
+                <a:latin typeface="Verdana"/>
+              </a:rPr>
+              <a:t>médecin</a:t>
+            </a:r>
+          </a:p>
+        </p:txBody>
+      </p:sp>
+      <p:sp>
+        <p:nvSpPr>
+          <p:cNvPr id="24" name="Rounded Rectangle 23"/>
+          <p:cNvSpPr/>
+          <p:nvPr/>
+        </p:nvSpPr>
+        <p:spPr>
+          <a:xfrm>
+            <a:off x="566928" y="3693160"/>
+            <a:ext cx="5464911" cy="648716"/>
+          </a:xfrm>
+          <a:prstGeom prst="roundRect">
+            <a:avLst>
+              <a:gd name="adj" fmla="val 22552"/>
+            </a:avLst>
+          </a:prstGeom>
+          <a:solidFill>
+            <a:srgbClr val="FFFFFF"/>
+          </a:solidFill>
+          <a:ln w="12700">
+            <a:solidFill>
+              <a:srgbClr val="EAEAE8"/>
+            </a:solidFill>
+          </a:ln>
+          <a:effectLst/>
+        </p:spPr>
+        <p:style>
+          <a:lnRef idx="1">
+            <a:schemeClr val="accent1"/>
+          </a:lnRef>
+          <a:fillRef idx="3">
+            <a:schemeClr val="accent1"/>
+          </a:fillRef>
+          <a:effectRef idx="2">
+            <a:schemeClr val="accent1"/>
+          </a:effectRef>
+          <a:fontRef idx="minor">
+            <a:schemeClr val="lt1"/>
+          </a:fontRef>
+        </p:style>
+        <p:txBody>
+          <a:bodyPr rtlCol="0" anchor="ctr"/>
+          <a:lstStyle/>
+          <a:p/>
+        </p:txBody>
+      </p:sp>
+      <p:sp>
+        <p:nvSpPr>
+          <p:cNvPr id="25" name="Rounded Rectangle 24"/>
+          <p:cNvSpPr/>
+          <p:nvPr/>
+        </p:nvSpPr>
+        <p:spPr>
+          <a:xfrm>
+            <a:off x="841247" y="3834638"/>
+            <a:ext cx="365760" cy="365760"/>
+          </a:xfrm>
+          <a:prstGeom prst="roundRect">
+            <a:avLst>
+              <a:gd name="adj" fmla="val 32500"/>
+            </a:avLst>
+          </a:prstGeom>
+          <a:solidFill>
+            <a:srgbClr val="E3F1E7"/>
+          </a:solidFill>
+          <a:ln>
+            <a:noFill/>
+          </a:ln>
+          <a:effectLst/>
+        </p:spPr>
+        <p:style>
+          <a:lnRef idx="1">
+            <a:schemeClr val="accent1"/>
+          </a:lnRef>
+          <a:fillRef idx="3">
+            <a:schemeClr val="accent1"/>
+          </a:fillRef>
+          <a:effectRef idx="2">
+            <a:schemeClr val="accent1"/>
+          </a:effectRef>
+          <a:fontRef idx="minor">
+            <a:schemeClr val="lt1"/>
+          </a:fontRef>
+        </p:style>
+        <p:txBody>
+          <a:bodyPr rtlCol="0" anchor="ctr"/>
+          <a:lstStyle/>
+          <a:p/>
+        </p:txBody>
+      </p:sp>
+      <p:sp>
+        <p:nvSpPr>
+          <p:cNvPr id="26" name="TextBox 25"/>
+          <p:cNvSpPr txBox="1"/>
+          <p:nvPr/>
+        </p:nvSpPr>
+        <p:spPr>
+          <a:xfrm>
+            <a:off x="841247" y="3898646"/>
+            <a:ext cx="365760" cy="256032"/>
+          </a:xfrm>
+          <a:prstGeom prst="rect">
+            <a:avLst/>
+          </a:prstGeom>
+          <a:noFill/>
+        </p:spPr>
+        <p:txBody>
+          <a:bodyPr wrap="square" lIns="0" rIns="0" tIns="0" bIns="0" anchor="t">
+            <a:spAutoFit/>
+          </a:bodyPr>
+          <a:lstStyle/>
+          <a:p>
+            <a:pPr algn="ctr">
+              <a:lnSpc>
+                <a:spcPct val="135000"/>
+              </a:lnSpc>
+            </a:pPr>
+            <a:r>
+              <a:rPr sz="1500" b="1" i="0">
+                <a:solidFill>
+                  <a:srgbClr val="166534"/>
+                </a:solidFill>
+                <a:latin typeface="Verdana"/>
+              </a:rPr>
+              <a:t>5</a:t>
+            </a:r>
+          </a:p>
+        </p:txBody>
+      </p:sp>
+      <p:sp>
+        <p:nvSpPr>
+          <p:cNvPr id="27" name="TextBox 26"/>
+          <p:cNvSpPr txBox="1"/>
+          <p:nvPr/>
+        </p:nvSpPr>
+        <p:spPr>
+          <a:xfrm>
+            <a:off x="1344168" y="3848608"/>
+            <a:ext cx="4504791" cy="374396"/>
+          </a:xfrm>
+          <a:prstGeom prst="rect">
+            <a:avLst/>
+          </a:prstGeom>
+          <a:noFill/>
+        </p:spPr>
+        <p:txBody>
+          <a:bodyPr wrap="square" lIns="0" rIns="0" tIns="0" bIns="0" anchor="t">
+            <a:spAutoFit/>
+          </a:bodyPr>
+          <a:lstStyle/>
+          <a:p>
+            <a:pPr algn="l">
+              <a:lnSpc>
+                <a:spcPct val="140000"/>
+              </a:lnSpc>
+            </a:pPr>
+            <a:r>
+              <a:rPr sz="1900" b="0" i="0">
+                <a:solidFill>
+                  <a:srgbClr val="3A3D40"/>
+                </a:solidFill>
+                <a:latin typeface="Verdana"/>
+              </a:rPr>
+              <a:t>traitement</a:t>
+            </a:r>
+          </a:p>
+        </p:txBody>
+      </p:sp>
+      <p:sp>
+        <p:nvSpPr>
+          <p:cNvPr id="28" name="Rounded Rectangle 27"/>
+          <p:cNvSpPr/>
+          <p:nvPr/>
+        </p:nvSpPr>
+        <p:spPr>
+          <a:xfrm>
+            <a:off x="6159855" y="3693160"/>
+            <a:ext cx="5464911" cy="648716"/>
+          </a:xfrm>
+          <a:prstGeom prst="roundRect">
+            <a:avLst>
+              <a:gd name="adj" fmla="val 22552"/>
+            </a:avLst>
+          </a:prstGeom>
+          <a:solidFill>
+            <a:srgbClr val="FFFFFF"/>
+          </a:solidFill>
+          <a:ln w="12700">
+            <a:solidFill>
+              <a:srgbClr val="EAEAE8"/>
+            </a:solidFill>
+          </a:ln>
+          <a:effectLst/>
+        </p:spPr>
+        <p:style>
+          <a:lnRef idx="1">
+            <a:schemeClr val="accent1"/>
+          </a:lnRef>
+          <a:fillRef idx="3">
+            <a:schemeClr val="accent1"/>
+          </a:fillRef>
+          <a:effectRef idx="2">
+            <a:schemeClr val="accent1"/>
+          </a:effectRef>
+          <a:fontRef idx="minor">
+            <a:schemeClr val="lt1"/>
+          </a:fontRef>
+        </p:style>
+        <p:txBody>
+          <a:bodyPr rtlCol="0" anchor="ctr"/>
+          <a:lstStyle/>
+          <a:p/>
+        </p:txBody>
+      </p:sp>
+      <p:sp>
+        <p:nvSpPr>
+          <p:cNvPr id="29" name="Rounded Rectangle 28"/>
+          <p:cNvSpPr/>
+          <p:nvPr/>
+        </p:nvSpPr>
+        <p:spPr>
+          <a:xfrm>
+            <a:off x="6434175" y="3834638"/>
+            <a:ext cx="365760" cy="365760"/>
+          </a:xfrm>
+          <a:prstGeom prst="roundRect">
+            <a:avLst>
+              <a:gd name="adj" fmla="val 32500"/>
+            </a:avLst>
+          </a:prstGeom>
+          <a:solidFill>
+            <a:srgbClr val="E3F1E7"/>
+          </a:solidFill>
+          <a:ln>
+            <a:noFill/>
+          </a:ln>
+          <a:effectLst/>
+        </p:spPr>
+        <p:style>
+          <a:lnRef idx="1">
+            <a:schemeClr val="accent1"/>
+          </a:lnRef>
+          <a:fillRef idx="3">
+            <a:schemeClr val="accent1"/>
+          </a:fillRef>
+          <a:effectRef idx="2">
+            <a:schemeClr val="accent1"/>
+          </a:effectRef>
+          <a:fontRef idx="minor">
+            <a:schemeClr val="lt1"/>
+          </a:fontRef>
+        </p:style>
+        <p:txBody>
+          <a:bodyPr rtlCol="0" anchor="ctr"/>
+          <a:lstStyle/>
+          <a:p/>
+        </p:txBody>
+      </p:sp>
+      <p:sp>
+        <p:nvSpPr>
+          <p:cNvPr id="30" name="TextBox 29"/>
+          <p:cNvSpPr txBox="1"/>
+          <p:nvPr/>
+        </p:nvSpPr>
+        <p:spPr>
+          <a:xfrm>
+            <a:off x="6434175" y="3898646"/>
+            <a:ext cx="365760" cy="256032"/>
+          </a:xfrm>
+          <a:prstGeom prst="rect">
+            <a:avLst/>
+          </a:prstGeom>
+          <a:noFill/>
+        </p:spPr>
+        <p:txBody>
+          <a:bodyPr wrap="square" lIns="0" rIns="0" tIns="0" bIns="0" anchor="t">
+            <a:spAutoFit/>
+          </a:bodyPr>
+          <a:lstStyle/>
+          <a:p>
+            <a:pPr algn="ctr">
+              <a:lnSpc>
+                <a:spcPct val="135000"/>
+              </a:lnSpc>
+            </a:pPr>
+            <a:r>
+              <a:rPr sz="1500" b="1" i="0">
+                <a:solidFill>
+                  <a:srgbClr val="166534"/>
+                </a:solidFill>
+                <a:latin typeface="Verdana"/>
+              </a:rPr>
+              <a:t>6</a:t>
+            </a:r>
+          </a:p>
+        </p:txBody>
+      </p:sp>
+      <p:sp>
+        <p:nvSpPr>
+          <p:cNvPr id="31" name="TextBox 30"/>
+          <p:cNvSpPr txBox="1"/>
+          <p:nvPr/>
+        </p:nvSpPr>
+        <p:spPr>
+          <a:xfrm>
+            <a:off x="6937095" y="3848608"/>
+            <a:ext cx="4504791" cy="374396"/>
+          </a:xfrm>
+          <a:prstGeom prst="rect">
+            <a:avLst/>
+          </a:prstGeom>
+          <a:noFill/>
+        </p:spPr>
+        <p:txBody>
+          <a:bodyPr wrap="square" lIns="0" rIns="0" tIns="0" bIns="0" anchor="t">
+            <a:spAutoFit/>
+          </a:bodyPr>
+          <a:lstStyle/>
+          <a:p>
+            <a:pPr algn="l">
+              <a:lnSpc>
+                <a:spcPct val="140000"/>
+              </a:lnSpc>
+            </a:pPr>
+            <a:r>
+              <a:rPr sz="1900" b="0" i="0">
+                <a:solidFill>
+                  <a:srgbClr val="3A3D40"/>
+                </a:solidFill>
+                <a:latin typeface="Verdana"/>
+              </a:rPr>
+              <a:t>matin</a:t>
+            </a:r>
+          </a:p>
+        </p:txBody>
+      </p:sp>
+      <p:sp>
+        <p:nvSpPr>
+          <p:cNvPr id="32" name="Rounded Rectangle 31"/>
+          <p:cNvSpPr/>
+          <p:nvPr/>
+        </p:nvSpPr>
+        <p:spPr>
+          <a:xfrm>
+            <a:off x="566928" y="4469892"/>
+            <a:ext cx="5464911" cy="648716"/>
+          </a:xfrm>
+          <a:prstGeom prst="roundRect">
+            <a:avLst>
+              <a:gd name="adj" fmla="val 22552"/>
+            </a:avLst>
+          </a:prstGeom>
+          <a:solidFill>
+            <a:srgbClr val="FFFFFF"/>
+          </a:solidFill>
+          <a:ln w="12700">
+            <a:solidFill>
+              <a:srgbClr val="EAEAE8"/>
+            </a:solidFill>
+          </a:ln>
+          <a:effectLst/>
+        </p:spPr>
+        <p:style>
+          <a:lnRef idx="1">
+            <a:schemeClr val="accent1"/>
+          </a:lnRef>
+          <a:fillRef idx="3">
+            <a:schemeClr val="accent1"/>
+          </a:fillRef>
+          <a:effectRef idx="2">
+            <a:schemeClr val="accent1"/>
+          </a:effectRef>
+          <a:fontRef idx="minor">
+            <a:schemeClr val="lt1"/>
+          </a:fontRef>
+        </p:style>
+        <p:txBody>
+          <a:bodyPr rtlCol="0" anchor="ctr"/>
+          <a:lstStyle/>
+          <a:p/>
+        </p:txBody>
+      </p:sp>
+      <p:sp>
+        <p:nvSpPr>
+          <p:cNvPr id="33" name="Rounded Rectangle 32"/>
+          <p:cNvSpPr/>
+          <p:nvPr/>
+        </p:nvSpPr>
+        <p:spPr>
+          <a:xfrm>
+            <a:off x="841247" y="4611370"/>
+            <a:ext cx="365760" cy="365760"/>
+          </a:xfrm>
+          <a:prstGeom prst="roundRect">
+            <a:avLst>
+              <a:gd name="adj" fmla="val 32500"/>
+            </a:avLst>
+          </a:prstGeom>
+          <a:solidFill>
+            <a:srgbClr val="E3F1E7"/>
+          </a:solidFill>
+          <a:ln>
+            <a:noFill/>
+          </a:ln>
+          <a:effectLst/>
+        </p:spPr>
+        <p:style>
+          <a:lnRef idx="1">
+            <a:schemeClr val="accent1"/>
+          </a:lnRef>
+          <a:fillRef idx="3">
+            <a:schemeClr val="accent1"/>
+          </a:fillRef>
+          <a:effectRef idx="2">
+            <a:schemeClr val="accent1"/>
+          </a:effectRef>
+          <a:fontRef idx="minor">
+            <a:schemeClr val="lt1"/>
+          </a:fontRef>
+        </p:style>
+        <p:txBody>
+          <a:bodyPr rtlCol="0" anchor="ctr"/>
+          <a:lstStyle/>
+          <a:p/>
+        </p:txBody>
+      </p:sp>
+      <p:sp>
+        <p:nvSpPr>
+          <p:cNvPr id="34" name="TextBox 33"/>
+          <p:cNvSpPr txBox="1"/>
+          <p:nvPr/>
+        </p:nvSpPr>
+        <p:spPr>
+          <a:xfrm>
+            <a:off x="841247" y="4675378"/>
+            <a:ext cx="365760" cy="256032"/>
+          </a:xfrm>
+          <a:prstGeom prst="rect">
+            <a:avLst/>
+          </a:prstGeom>
+          <a:noFill/>
+        </p:spPr>
+        <p:txBody>
+          <a:bodyPr wrap="square" lIns="0" rIns="0" tIns="0" bIns="0" anchor="t">
+            <a:spAutoFit/>
+          </a:bodyPr>
+          <a:lstStyle/>
+          <a:p>
+            <a:pPr algn="ctr">
+              <a:lnSpc>
+                <a:spcPct val="135000"/>
+              </a:lnSpc>
+            </a:pPr>
+            <a:r>
+              <a:rPr sz="1500" b="1" i="0">
+                <a:solidFill>
+                  <a:srgbClr val="166534"/>
+                </a:solidFill>
+                <a:latin typeface="Verdana"/>
+              </a:rPr>
+              <a:t>7</a:t>
+            </a:r>
+          </a:p>
+        </p:txBody>
+      </p:sp>
+      <p:sp>
+        <p:nvSpPr>
+          <p:cNvPr id="35" name="TextBox 34"/>
+          <p:cNvSpPr txBox="1"/>
+          <p:nvPr/>
+        </p:nvSpPr>
+        <p:spPr>
+          <a:xfrm>
+            <a:off x="1344168" y="4625340"/>
+            <a:ext cx="4504791" cy="374396"/>
+          </a:xfrm>
+          <a:prstGeom prst="rect">
+            <a:avLst/>
+          </a:prstGeom>
+          <a:noFill/>
+        </p:spPr>
+        <p:txBody>
+          <a:bodyPr wrap="square" lIns="0" rIns="0" tIns="0" bIns="0" anchor="t">
+            <a:spAutoFit/>
+          </a:bodyPr>
+          <a:lstStyle/>
+          <a:p>
+            <a:pPr algn="l">
+              <a:lnSpc>
+                <a:spcPct val="140000"/>
+              </a:lnSpc>
+            </a:pPr>
+            <a:r>
+              <a:rPr sz="1900" b="0" i="0">
+                <a:solidFill>
+                  <a:srgbClr val="3A3D40"/>
+                </a:solidFill>
+                <a:latin typeface="Verdana"/>
+              </a:rPr>
+              <a:t>pendant</a:t>
+            </a:r>
+          </a:p>
+        </p:txBody>
+      </p:sp>
+      <p:sp>
+        <p:nvSpPr>
+          <p:cNvPr id="36" name="Rounded Rectangle 35"/>
+          <p:cNvSpPr/>
+          <p:nvPr/>
+        </p:nvSpPr>
+        <p:spPr>
+          <a:xfrm>
+            <a:off x="6159855" y="4469892"/>
+            <a:ext cx="5464911" cy="648716"/>
+          </a:xfrm>
+          <a:prstGeom prst="roundRect">
+            <a:avLst>
+              <a:gd name="adj" fmla="val 22552"/>
+            </a:avLst>
+          </a:prstGeom>
+          <a:solidFill>
+            <a:srgbClr val="FFFFFF"/>
+          </a:solidFill>
+          <a:ln w="12700">
+            <a:solidFill>
+              <a:srgbClr val="EAEAE8"/>
+            </a:solidFill>
+          </a:ln>
+          <a:effectLst/>
+        </p:spPr>
+        <p:style>
+          <a:lnRef idx="1">
+            <a:schemeClr val="accent1"/>
+          </a:lnRef>
+          <a:fillRef idx="3">
+            <a:schemeClr val="accent1"/>
+          </a:fillRef>
+          <a:effectRef idx="2">
+            <a:schemeClr val="accent1"/>
+          </a:effectRef>
+          <a:fontRef idx="minor">
+            <a:schemeClr val="lt1"/>
+          </a:fontRef>
+        </p:style>
+        <p:txBody>
+          <a:bodyPr rtlCol="0" anchor="ctr"/>
+          <a:lstStyle/>
+          <a:p/>
+        </p:txBody>
+      </p:sp>
+      <p:sp>
+        <p:nvSpPr>
+          <p:cNvPr id="37" name="Rounded Rectangle 36"/>
+          <p:cNvSpPr/>
+          <p:nvPr/>
+        </p:nvSpPr>
+        <p:spPr>
+          <a:xfrm>
+            <a:off x="6434175" y="4611370"/>
+            <a:ext cx="365760" cy="365760"/>
+          </a:xfrm>
+          <a:prstGeom prst="roundRect">
+            <a:avLst>
+              <a:gd name="adj" fmla="val 32500"/>
+            </a:avLst>
+          </a:prstGeom>
+          <a:solidFill>
+            <a:srgbClr val="E3F1E7"/>
+          </a:solidFill>
+          <a:ln>
+            <a:noFill/>
+          </a:ln>
+          <a:effectLst/>
+        </p:spPr>
+        <p:style>
+          <a:lnRef idx="1">
+            <a:schemeClr val="accent1"/>
+          </a:lnRef>
+          <a:fillRef idx="3">
+            <a:schemeClr val="accent1"/>
+          </a:fillRef>
+          <a:effectRef idx="2">
+            <a:schemeClr val="accent1"/>
+          </a:effectRef>
+          <a:fontRef idx="minor">
+            <a:schemeClr val="lt1"/>
+          </a:fontRef>
+        </p:style>
+        <p:txBody>
+          <a:bodyPr rtlCol="0" anchor="ctr"/>
+          <a:lstStyle/>
+          <a:p/>
+        </p:txBody>
+      </p:sp>
+      <p:sp>
+        <p:nvSpPr>
+          <p:cNvPr id="38" name="TextBox 37"/>
+          <p:cNvSpPr txBox="1"/>
+          <p:nvPr/>
+        </p:nvSpPr>
+        <p:spPr>
+          <a:xfrm>
+            <a:off x="6434175" y="4675378"/>
+            <a:ext cx="365760" cy="256032"/>
+          </a:xfrm>
+          <a:prstGeom prst="rect">
+            <a:avLst/>
+          </a:prstGeom>
+          <a:noFill/>
+        </p:spPr>
+        <p:txBody>
+          <a:bodyPr wrap="square" lIns="0" rIns="0" tIns="0" bIns="0" anchor="t">
+            <a:spAutoFit/>
+          </a:bodyPr>
+          <a:lstStyle/>
+          <a:p>
+            <a:pPr algn="ctr">
+              <a:lnSpc>
+                <a:spcPct val="135000"/>
+              </a:lnSpc>
+            </a:pPr>
+            <a:r>
+              <a:rPr sz="1500" b="1" i="0">
+                <a:solidFill>
+                  <a:srgbClr val="166534"/>
+                </a:solidFill>
+                <a:latin typeface="Verdana"/>
+              </a:rPr>
+              <a:t>8</a:t>
+            </a:r>
+          </a:p>
+        </p:txBody>
+      </p:sp>
+      <p:sp>
+        <p:nvSpPr>
+          <p:cNvPr id="39" name="TextBox 38"/>
+          <p:cNvSpPr txBox="1"/>
+          <p:nvPr/>
+        </p:nvSpPr>
+        <p:spPr>
+          <a:xfrm>
+            <a:off x="6937095" y="4625340"/>
+            <a:ext cx="4504791" cy="374396"/>
+          </a:xfrm>
+          <a:prstGeom prst="rect">
+            <a:avLst/>
+          </a:prstGeom>
+          <a:noFill/>
+        </p:spPr>
+        <p:txBody>
+          <a:bodyPr wrap="square" lIns="0" rIns="0" tIns="0" bIns="0" anchor="t">
+            <a:spAutoFit/>
+          </a:bodyPr>
+          <a:lstStyle/>
+          <a:p>
+            <a:pPr algn="l">
+              <a:lnSpc>
+                <a:spcPct val="140000"/>
+              </a:lnSpc>
+            </a:pPr>
+            <a:r>
+              <a:rPr sz="1900" b="0" i="0">
+                <a:solidFill>
+                  <a:srgbClr val="3A3D40"/>
+                </a:solidFill>
+                <a:latin typeface="Verdana"/>
+              </a:rPr>
+              <a:t>bien</a:t>
+            </a:r>
+          </a:p>
+        </p:txBody>
+      </p:sp>
+    </p:spTree>
+  </p:cSld>
+  <p:clrMapOvr>
+    <a:masterClrMapping/>
+  </p:clrMapOvr>
+</p:sld>
+</file>
+
+<file path=ppt/slides/slide15.xml><?xml version="1.0" encoding="utf-8"?>
+<p:sld xmlns:a="http://schemas.openxmlformats.org/drawingml/2006/main" xmlns:p="http://schemas.openxmlformats.org/presentationml/2006/main" xmlns:r="http://schemas.openxmlformats.org/officeDocument/2006/relationships">
+  <p:cSld>
+    <p:spTree>
+      <p:nvGrpSpPr>
+        <p:cNvPr id="1" name=""/>
+        <p:cNvGrpSpPr/>
+        <p:nvPr/>
+      </p:nvGrpSpPr>
+      <p:grpSpPr/>
+      <p:sp>
+        <p:nvSpPr>
+          <p:cNvPr id="2" name="Rectangle 1"/>
+          <p:cNvSpPr/>
+          <p:nvPr/>
+        </p:nvSpPr>
+        <p:spPr>
+          <a:xfrm>
+            <a:off x="0" y="0"/>
+            <a:ext cx="12191695" cy="6858000"/>
+          </a:xfrm>
+          <a:prstGeom prst="rect">
+            <a:avLst/>
+          </a:prstGeom>
+          <a:solidFill>
+            <a:srgbClr val="F7F7F5"/>
+          </a:solidFill>
+          <a:ln>
+            <a:noFill/>
+          </a:ln>
+          <a:effectLst/>
+        </p:spPr>
+        <p:style>
+          <a:lnRef idx="1">
+            <a:schemeClr val="accent1"/>
+          </a:lnRef>
+          <a:fillRef idx="3">
+            <a:schemeClr val="accent1"/>
+          </a:fillRef>
+          <a:effectRef idx="2">
+            <a:schemeClr val="accent1"/>
+          </a:effectRef>
+          <a:fontRef idx="minor">
+            <a:schemeClr val="lt1"/>
+          </a:fontRef>
+        </p:style>
+        <p:txBody>
+          <a:bodyPr rtlCol="0" anchor="ctr"/>
+          <a:lstStyle/>
+          <a:p/>
+        </p:txBody>
+      </p:sp>
+      <p:sp>
+        <p:nvSpPr>
+          <p:cNvPr id="3" name="TextBox 2"/>
+          <p:cNvSpPr txBox="1"/>
+          <p:nvPr/>
+        </p:nvSpPr>
+        <p:spPr>
+          <a:xfrm>
+            <a:off x="566928" y="6355080"/>
+            <a:ext cx="6400800" cy="219456"/>
+          </a:xfrm>
+          <a:prstGeom prst="rect">
+            <a:avLst/>
+          </a:prstGeom>
+          <a:noFill/>
+        </p:spPr>
+        <p:txBody>
+          <a:bodyPr wrap="square" lIns="0" rIns="0" tIns="0" bIns="0" anchor="t">
+            <a:spAutoFit/>
+          </a:bodyPr>
+          <a:lstStyle/>
+          <a:p>
+            <a:pPr algn="l">
+              <a:lnSpc>
+                <a:spcPct val="135000"/>
+              </a:lnSpc>
+            </a:pPr>
+            <a:r>
+              <a:rPr sz="1200" b="0" i="0">
+                <a:solidFill>
+                  <a:srgbClr val="6E7175"/>
+                </a:solidFill>
+                <a:latin typeface="Verdana"/>
+              </a:rPr>
+              <a:t>A3 · Prendre rendez-vous et aller à la pharmacie</a:t>
+            </a:r>
+          </a:p>
+        </p:txBody>
+      </p:sp>
+      <p:sp>
+        <p:nvSpPr>
+          <p:cNvPr id="4" name="TextBox 3"/>
+          <p:cNvSpPr txBox="1"/>
+          <p:nvPr/>
+        </p:nvSpPr>
+        <p:spPr>
+          <a:xfrm>
+            <a:off x="10710367" y="6355080"/>
+            <a:ext cx="914400" cy="219456"/>
+          </a:xfrm>
+          <a:prstGeom prst="rect">
+            <a:avLst/>
+          </a:prstGeom>
+          <a:noFill/>
+        </p:spPr>
+        <p:txBody>
+          <a:bodyPr wrap="square" lIns="0" rIns="0" tIns="0" bIns="0" anchor="t">
+            <a:spAutoFit/>
+          </a:bodyPr>
+          <a:lstStyle/>
+          <a:p>
+            <a:pPr algn="r">
+              <a:lnSpc>
+                <a:spcPct val="135000"/>
+              </a:lnSpc>
+            </a:pPr>
+            <a:r>
+              <a:rPr sz="1200" b="0" i="0">
+                <a:solidFill>
+                  <a:srgbClr val="6E7175"/>
+                </a:solidFill>
+                <a:latin typeface="Verdana"/>
+              </a:rPr>
+              <a:t>15</a:t>
+            </a:r>
+          </a:p>
+        </p:txBody>
+      </p:sp>
+      <p:sp>
+        <p:nvSpPr>
+          <p:cNvPr id="5" name="TextBox 4"/>
+          <p:cNvSpPr txBox="1"/>
+          <p:nvPr/>
+        </p:nvSpPr>
+        <p:spPr>
+          <a:xfrm>
+            <a:off x="566928" y="420624"/>
+            <a:ext cx="11057839" cy="237744"/>
+          </a:xfrm>
+          <a:prstGeom prst="rect">
+            <a:avLst/>
+          </a:prstGeom>
+          <a:noFill/>
+        </p:spPr>
+        <p:txBody>
+          <a:bodyPr wrap="square" lIns="0" rIns="0" tIns="0" bIns="0" anchor="t">
+            <a:spAutoFit/>
+          </a:bodyPr>
+          <a:lstStyle/>
+          <a:p>
+            <a:pPr algn="l">
+              <a:lnSpc>
+                <a:spcPct val="135000"/>
+              </a:lnSpc>
+            </a:pPr>
+            <a:r>
+              <a:rPr sz="1300" b="1" i="0" spc="156">
+                <a:solidFill>
+                  <a:srgbClr val="166534"/>
+                </a:solidFill>
+                <a:latin typeface="Verdana"/>
+              </a:rPr>
+              <a:t>CORRECTION</a:t>
+            </a:r>
+          </a:p>
+        </p:txBody>
+      </p:sp>
+      <p:sp>
+        <p:nvSpPr>
+          <p:cNvPr id="6" name="TextBox 5"/>
+          <p:cNvSpPr txBox="1"/>
+          <p:nvPr/>
+        </p:nvSpPr>
+        <p:spPr>
+          <a:xfrm>
+            <a:off x="566928" y="749808"/>
+            <a:ext cx="11057839" cy="877824"/>
+          </a:xfrm>
+          <a:prstGeom prst="rect">
+            <a:avLst/>
+          </a:prstGeom>
+          <a:noFill/>
+        </p:spPr>
+        <p:txBody>
+          <a:bodyPr wrap="square" lIns="0" rIns="0" tIns="0" bIns="0" anchor="t">
+            <a:spAutoFit/>
+          </a:bodyPr>
+          <a:lstStyle/>
+          <a:p>
+            <a:pPr algn="l">
+              <a:lnSpc>
+                <a:spcPct val="115000"/>
+              </a:lnSpc>
+            </a:pPr>
+            <a:r>
+              <a:rPr sz="3400" b="1" i="0">
+                <a:solidFill>
+                  <a:srgbClr val="17181A"/>
+                </a:solidFill>
+                <a:latin typeface="Verdana"/>
+              </a:rPr>
+              <a:t>Quel son entendez-vous ?</a:t>
+            </a:r>
+          </a:p>
+        </p:txBody>
+      </p:sp>
+      <p:sp>
+        <p:nvSpPr>
+          <p:cNvPr id="7" name="TextBox 6"/>
+          <p:cNvSpPr txBox="1"/>
+          <p:nvPr/>
+        </p:nvSpPr>
+        <p:spPr>
+          <a:xfrm>
+            <a:off x="566928" y="1645920"/>
+            <a:ext cx="11057839" cy="329184"/>
+          </a:xfrm>
+          <a:prstGeom prst="rect">
+            <a:avLst/>
+          </a:prstGeom>
+          <a:noFill/>
+        </p:spPr>
+        <p:txBody>
+          <a:bodyPr wrap="square" lIns="0" rIns="0" tIns="0" bIns="0" anchor="t">
+            <a:spAutoFit/>
+          </a:bodyPr>
+          <a:lstStyle/>
+          <a:p>
+            <a:pPr algn="l">
+              <a:lnSpc>
+                <a:spcPct val="135000"/>
+              </a:lnSpc>
+            </a:pPr>
+            <a:r>
+              <a:rPr sz="1800" b="0" i="0">
+                <a:solidFill>
+                  <a:srgbClr val="6E7175"/>
+                </a:solidFill>
+                <a:latin typeface="Verdana"/>
+              </a:rPr>
+              <a:t>Correction — on lit la réponse, on ne commente pas l'erreur.</a:t>
+            </a:r>
+          </a:p>
+        </p:txBody>
+      </p:sp>
+      <p:sp>
+        <p:nvSpPr>
+          <p:cNvPr id="8" name="Rounded Rectangle 7"/>
+          <p:cNvSpPr/>
+          <p:nvPr/>
+        </p:nvSpPr>
+        <p:spPr>
+          <a:xfrm>
+            <a:off x="566928" y="2139696"/>
+            <a:ext cx="5464911" cy="648716"/>
+          </a:xfrm>
+          <a:prstGeom prst="roundRect">
+            <a:avLst>
+              <a:gd name="adj" fmla="val 22552"/>
+            </a:avLst>
+          </a:prstGeom>
+          <a:solidFill>
+            <a:srgbClr val="E6F5EE"/>
+          </a:solidFill>
+          <a:ln w="12700">
+            <a:solidFill>
+              <a:srgbClr val="EAEAE8"/>
+            </a:solidFill>
+          </a:ln>
+          <a:effectLst/>
+        </p:spPr>
+        <p:style>
+          <a:lnRef idx="1">
+            <a:schemeClr val="accent1"/>
+          </a:lnRef>
+          <a:fillRef idx="3">
+            <a:schemeClr val="accent1"/>
+          </a:fillRef>
+          <a:effectRef idx="2">
+            <a:schemeClr val="accent1"/>
+          </a:effectRef>
+          <a:fontRef idx="minor">
+            <a:schemeClr val="lt1"/>
+          </a:fontRef>
+        </p:style>
+        <p:txBody>
+          <a:bodyPr rtlCol="0" anchor="ctr"/>
+          <a:lstStyle/>
+          <a:p/>
+        </p:txBody>
+      </p:sp>
+      <p:sp>
+        <p:nvSpPr>
+          <p:cNvPr id="9" name="Rounded Rectangle 8"/>
+          <p:cNvSpPr/>
+          <p:nvPr/>
+        </p:nvSpPr>
+        <p:spPr>
+          <a:xfrm>
+            <a:off x="841247" y="2281174"/>
+            <a:ext cx="365760" cy="365760"/>
+          </a:xfrm>
+          <a:prstGeom prst="roundRect">
+            <a:avLst>
+              <a:gd name="adj" fmla="val 32500"/>
+            </a:avLst>
+          </a:prstGeom>
+          <a:solidFill>
+            <a:srgbClr val="E3F1E7"/>
+          </a:solidFill>
+          <a:ln>
+            <a:noFill/>
+          </a:ln>
+          <a:effectLst/>
+        </p:spPr>
+        <p:style>
+          <a:lnRef idx="1">
+            <a:schemeClr val="accent1"/>
+          </a:lnRef>
+          <a:fillRef idx="3">
+            <a:schemeClr val="accent1"/>
+          </a:fillRef>
+          <a:effectRef idx="2">
+            <a:schemeClr val="accent1"/>
+          </a:effectRef>
+          <a:fontRef idx="minor">
+            <a:schemeClr val="lt1"/>
+          </a:fontRef>
+        </p:style>
+        <p:txBody>
+          <a:bodyPr rtlCol="0" anchor="ctr"/>
+          <a:lstStyle/>
+          <a:p/>
+        </p:txBody>
+      </p:sp>
+      <p:sp>
+        <p:nvSpPr>
+          <p:cNvPr id="10" name="TextBox 9"/>
+          <p:cNvSpPr txBox="1"/>
+          <p:nvPr/>
+        </p:nvSpPr>
+        <p:spPr>
+          <a:xfrm>
+            <a:off x="841247" y="2345182"/>
+            <a:ext cx="365760" cy="256032"/>
+          </a:xfrm>
+          <a:prstGeom prst="rect">
+            <a:avLst/>
+          </a:prstGeom>
+          <a:noFill/>
+        </p:spPr>
+        <p:txBody>
+          <a:bodyPr wrap="square" lIns="0" rIns="0" tIns="0" bIns="0" anchor="t">
+            <a:spAutoFit/>
+          </a:bodyPr>
+          <a:lstStyle/>
+          <a:p>
+            <a:pPr algn="ctr">
+              <a:lnSpc>
+                <a:spcPct val="135000"/>
+              </a:lnSpc>
+            </a:pPr>
+            <a:r>
+              <a:rPr sz="1500" b="1" i="0">
+                <a:solidFill>
+                  <a:srgbClr val="166534"/>
+                </a:solidFill>
+                <a:latin typeface="Verdana"/>
+              </a:rPr>
+              <a:t>1</a:t>
+            </a:r>
+          </a:p>
+        </p:txBody>
+      </p:sp>
+      <p:sp>
+        <p:nvSpPr>
+          <p:cNvPr id="11" name="TextBox 10"/>
+          <p:cNvSpPr txBox="1"/>
+          <p:nvPr/>
+        </p:nvSpPr>
+        <p:spPr>
+          <a:xfrm>
+            <a:off x="1344168" y="2295144"/>
+            <a:ext cx="4504791" cy="374396"/>
+          </a:xfrm>
+          <a:prstGeom prst="rect">
+            <a:avLst/>
+          </a:prstGeom>
+          <a:noFill/>
+        </p:spPr>
+        <p:txBody>
+          <a:bodyPr wrap="square" lIns="0" rIns="0" tIns="0" bIns="0" anchor="t">
+            <a:spAutoFit/>
+          </a:bodyPr>
+          <a:lstStyle/>
+          <a:p>
+            <a:pPr algn="l">
+              <a:lnSpc>
+                <a:spcPct val="140000"/>
+              </a:lnSpc>
+            </a:pPr>
+            <a:r>
+              <a:rPr sz="1900" b="0" i="0">
+                <a:solidFill>
+                  <a:srgbClr val="3A3D40"/>
+                </a:solidFill>
+                <a:latin typeface="Verdana"/>
+              </a:rPr>
+              <a:t>attente   </a:t>
+            </a:r>
+            <a:r>
+              <a:rPr sz="1900" b="1" i="0">
+                <a:solidFill>
+                  <a:srgbClr val="07734A"/>
+                </a:solidFill>
+                <a:latin typeface="Verdana"/>
+              </a:rPr>
+              <a:t>» le son « an »</a:t>
+            </a:r>
+          </a:p>
+        </p:txBody>
+      </p:sp>
+      <p:sp>
+        <p:nvSpPr>
+          <p:cNvPr id="12" name="Rounded Rectangle 11"/>
+          <p:cNvSpPr/>
+          <p:nvPr/>
+        </p:nvSpPr>
+        <p:spPr>
+          <a:xfrm>
+            <a:off x="6159855" y="2139696"/>
+            <a:ext cx="5464911" cy="648716"/>
+          </a:xfrm>
+          <a:prstGeom prst="roundRect">
+            <a:avLst>
+              <a:gd name="adj" fmla="val 22552"/>
+            </a:avLst>
+          </a:prstGeom>
+          <a:solidFill>
+            <a:srgbClr val="E6F5EE"/>
+          </a:solidFill>
+          <a:ln w="12700">
+            <a:solidFill>
+              <a:srgbClr val="EAEAE8"/>
+            </a:solidFill>
+          </a:ln>
+          <a:effectLst/>
+        </p:spPr>
+        <p:style>
+          <a:lnRef idx="1">
+            <a:schemeClr val="accent1"/>
+          </a:lnRef>
+          <a:fillRef idx="3">
+            <a:schemeClr val="accent1"/>
+          </a:fillRef>
+          <a:effectRef idx="2">
+            <a:schemeClr val="accent1"/>
+          </a:effectRef>
+          <a:fontRef idx="minor">
+            <a:schemeClr val="lt1"/>
+          </a:fontRef>
+        </p:style>
+        <p:txBody>
+          <a:bodyPr rtlCol="0" anchor="ctr"/>
+          <a:lstStyle/>
+          <a:p/>
+        </p:txBody>
+      </p:sp>
+      <p:sp>
+        <p:nvSpPr>
+          <p:cNvPr id="13" name="Rounded Rectangle 12"/>
+          <p:cNvSpPr/>
+          <p:nvPr/>
+        </p:nvSpPr>
+        <p:spPr>
+          <a:xfrm>
+            <a:off x="6434175" y="2281174"/>
+            <a:ext cx="365760" cy="365760"/>
+          </a:xfrm>
+          <a:prstGeom prst="roundRect">
+            <a:avLst>
+              <a:gd name="adj" fmla="val 32500"/>
+            </a:avLst>
+          </a:prstGeom>
+          <a:solidFill>
+            <a:srgbClr val="E3F1E7"/>
+          </a:solidFill>
+          <a:ln>
+            <a:noFill/>
+          </a:ln>
+          <a:effectLst/>
+        </p:spPr>
+        <p:style>
+          <a:lnRef idx="1">
+            <a:schemeClr val="accent1"/>
+          </a:lnRef>
+          <a:fillRef idx="3">
+            <a:schemeClr val="accent1"/>
+          </a:fillRef>
+          <a:effectRef idx="2">
+            <a:schemeClr val="accent1"/>
+          </a:effectRef>
+          <a:fontRef idx="minor">
+            <a:schemeClr val="lt1"/>
+          </a:fontRef>
+        </p:style>
+        <p:txBody>
+          <a:bodyPr rtlCol="0" anchor="ctr"/>
+          <a:lstStyle/>
+          <a:p/>
+        </p:txBody>
+      </p:sp>
+      <p:sp>
+        <p:nvSpPr>
+          <p:cNvPr id="14" name="TextBox 13"/>
+          <p:cNvSpPr txBox="1"/>
+          <p:nvPr/>
+        </p:nvSpPr>
+        <p:spPr>
+          <a:xfrm>
+            <a:off x="6434175" y="2345182"/>
+            <a:ext cx="365760" cy="256032"/>
+          </a:xfrm>
+          <a:prstGeom prst="rect">
+            <a:avLst/>
+          </a:prstGeom>
+          <a:noFill/>
+        </p:spPr>
+        <p:txBody>
+          <a:bodyPr wrap="square" lIns="0" rIns="0" tIns="0" bIns="0" anchor="t">
+            <a:spAutoFit/>
+          </a:bodyPr>
+          <a:lstStyle/>
+          <a:p>
+            <a:pPr algn="ctr">
+              <a:lnSpc>
+                <a:spcPct val="135000"/>
+              </a:lnSpc>
+            </a:pPr>
+            <a:r>
+              <a:rPr sz="1500" b="1" i="0">
+                <a:solidFill>
+                  <a:srgbClr val="166534"/>
+                </a:solidFill>
+                <a:latin typeface="Verdana"/>
+              </a:rPr>
+              <a:t>2</a:t>
+            </a:r>
+          </a:p>
+        </p:txBody>
+      </p:sp>
+      <p:sp>
+        <p:nvSpPr>
+          <p:cNvPr id="15" name="TextBox 14"/>
+          <p:cNvSpPr txBox="1"/>
+          <p:nvPr/>
+        </p:nvSpPr>
+        <p:spPr>
+          <a:xfrm>
+            <a:off x="6937095" y="2295144"/>
+            <a:ext cx="4504791" cy="374396"/>
+          </a:xfrm>
+          <a:prstGeom prst="rect">
+            <a:avLst/>
+          </a:prstGeom>
+          <a:noFill/>
+        </p:spPr>
+        <p:txBody>
+          <a:bodyPr wrap="square" lIns="0" rIns="0" tIns="0" bIns="0" anchor="t">
+            <a:spAutoFit/>
+          </a:bodyPr>
+          <a:lstStyle/>
+          <a:p>
+            <a:pPr algn="l">
+              <a:lnSpc>
+                <a:spcPct val="140000"/>
+              </a:lnSpc>
+            </a:pPr>
+            <a:r>
+              <a:rPr sz="1900" b="0" i="0">
+                <a:solidFill>
+                  <a:srgbClr val="3A3D40"/>
+                </a:solidFill>
+                <a:latin typeface="Verdana"/>
+              </a:rPr>
+              <a:t>pharmacien   </a:t>
+            </a:r>
+            <a:r>
+              <a:rPr sz="1900" b="1" i="0">
+                <a:solidFill>
+                  <a:srgbClr val="07734A"/>
+                </a:solidFill>
+                <a:latin typeface="Verdana"/>
+              </a:rPr>
+              <a:t>» le son « in »</a:t>
+            </a:r>
+          </a:p>
+        </p:txBody>
+      </p:sp>
+      <p:sp>
+        <p:nvSpPr>
+          <p:cNvPr id="16" name="Rounded Rectangle 15"/>
+          <p:cNvSpPr/>
+          <p:nvPr/>
+        </p:nvSpPr>
+        <p:spPr>
+          <a:xfrm>
+            <a:off x="566928" y="2916428"/>
+            <a:ext cx="5464911" cy="648716"/>
+          </a:xfrm>
+          <a:prstGeom prst="roundRect">
+            <a:avLst>
+              <a:gd name="adj" fmla="val 22552"/>
+            </a:avLst>
+          </a:prstGeom>
+          <a:solidFill>
+            <a:srgbClr val="E6F5EE"/>
+          </a:solidFill>
+          <a:ln w="12700">
+            <a:solidFill>
+              <a:srgbClr val="EAEAE8"/>
+            </a:solidFill>
+          </a:ln>
+          <a:effectLst/>
+        </p:spPr>
+        <p:style>
+          <a:lnRef idx="1">
+            <a:schemeClr val="accent1"/>
+          </a:lnRef>
+          <a:fillRef idx="3">
+            <a:schemeClr val="accent1"/>
+          </a:fillRef>
+          <a:effectRef idx="2">
+            <a:schemeClr val="accent1"/>
+          </a:effectRef>
+          <a:fontRef idx="minor">
+            <a:schemeClr val="lt1"/>
+          </a:fontRef>
+        </p:style>
+        <p:txBody>
+          <a:bodyPr rtlCol="0" anchor="ctr"/>
+          <a:lstStyle/>
+          <a:p/>
+        </p:txBody>
+      </p:sp>
+      <p:sp>
+        <p:nvSpPr>
+          <p:cNvPr id="17" name="Rounded Rectangle 16"/>
+          <p:cNvSpPr/>
+          <p:nvPr/>
+        </p:nvSpPr>
+        <p:spPr>
+          <a:xfrm>
+            <a:off x="841247" y="3057905"/>
+            <a:ext cx="365760" cy="365760"/>
+          </a:xfrm>
+          <a:prstGeom prst="roundRect">
+            <a:avLst>
+              <a:gd name="adj" fmla="val 32500"/>
+            </a:avLst>
+          </a:prstGeom>
+          <a:solidFill>
+            <a:srgbClr val="E3F1E7"/>
+          </a:solidFill>
+          <a:ln>
+            <a:noFill/>
+          </a:ln>
+          <a:effectLst/>
+        </p:spPr>
+        <p:style>
+          <a:lnRef idx="1">
+            <a:schemeClr val="accent1"/>
+          </a:lnRef>
+          <a:fillRef idx="3">
+            <a:schemeClr val="accent1"/>
+          </a:fillRef>
+          <a:effectRef idx="2">
+            <a:schemeClr val="accent1"/>
+          </a:effectRef>
+          <a:fontRef idx="minor">
+            <a:schemeClr val="lt1"/>
+          </a:fontRef>
+        </p:style>
+        <p:txBody>
+          <a:bodyPr rtlCol="0" anchor="ctr"/>
+          <a:lstStyle/>
+          <a:p/>
+        </p:txBody>
+      </p:sp>
+      <p:sp>
+        <p:nvSpPr>
+          <p:cNvPr id="18" name="TextBox 17"/>
+          <p:cNvSpPr txBox="1"/>
+          <p:nvPr/>
+        </p:nvSpPr>
+        <p:spPr>
+          <a:xfrm>
+            <a:off x="841247" y="3121913"/>
+            <a:ext cx="365760" cy="256032"/>
+          </a:xfrm>
+          <a:prstGeom prst="rect">
+            <a:avLst/>
+          </a:prstGeom>
+          <a:noFill/>
+        </p:spPr>
+        <p:txBody>
+          <a:bodyPr wrap="square" lIns="0" rIns="0" tIns="0" bIns="0" anchor="t">
+            <a:spAutoFit/>
+          </a:bodyPr>
+          <a:lstStyle/>
+          <a:p>
+            <a:pPr algn="ctr">
+              <a:lnSpc>
+                <a:spcPct val="135000"/>
+              </a:lnSpc>
+            </a:pPr>
+            <a:r>
+              <a:rPr sz="1500" b="1" i="0">
+                <a:solidFill>
+                  <a:srgbClr val="166534"/>
+                </a:solidFill>
+                <a:latin typeface="Verdana"/>
+              </a:rPr>
+              <a:t>3</a:t>
+            </a:r>
+          </a:p>
+        </p:txBody>
+      </p:sp>
+      <p:sp>
+        <p:nvSpPr>
+          <p:cNvPr id="19" name="TextBox 18"/>
+          <p:cNvSpPr txBox="1"/>
+          <p:nvPr/>
+        </p:nvSpPr>
+        <p:spPr>
+          <a:xfrm>
+            <a:off x="1344168" y="3071876"/>
+            <a:ext cx="4504791" cy="374396"/>
+          </a:xfrm>
+          <a:prstGeom prst="rect">
+            <a:avLst/>
+          </a:prstGeom>
+          <a:noFill/>
+        </p:spPr>
+        <p:txBody>
+          <a:bodyPr wrap="square" lIns="0" rIns="0" tIns="0" bIns="0" anchor="t">
+            <a:spAutoFit/>
+          </a:bodyPr>
+          <a:lstStyle/>
+          <a:p>
+            <a:pPr algn="l">
+              <a:lnSpc>
+                <a:spcPct val="140000"/>
+              </a:lnSpc>
+            </a:pPr>
+            <a:r>
+              <a:rPr sz="1900" b="0" i="0">
+                <a:solidFill>
+                  <a:srgbClr val="3A3D40"/>
+                </a:solidFill>
+                <a:latin typeface="Verdana"/>
+              </a:rPr>
+              <a:t>ordonnance   </a:t>
+            </a:r>
+            <a:r>
+              <a:rPr sz="1900" b="1" i="0">
+                <a:solidFill>
+                  <a:srgbClr val="07734A"/>
+                </a:solidFill>
+                <a:latin typeface="Verdana"/>
+              </a:rPr>
+              <a:t>» le son « an »</a:t>
+            </a:r>
+          </a:p>
+        </p:txBody>
+      </p:sp>
+      <p:sp>
+        <p:nvSpPr>
+          <p:cNvPr id="20" name="Rounded Rectangle 19"/>
+          <p:cNvSpPr/>
+          <p:nvPr/>
+        </p:nvSpPr>
+        <p:spPr>
+          <a:xfrm>
+            <a:off x="6159855" y="2916428"/>
+            <a:ext cx="5464911" cy="648716"/>
+          </a:xfrm>
+          <a:prstGeom prst="roundRect">
+            <a:avLst>
+              <a:gd name="adj" fmla="val 22552"/>
+            </a:avLst>
+          </a:prstGeom>
+          <a:solidFill>
+            <a:srgbClr val="E6F5EE"/>
+          </a:solidFill>
+          <a:ln w="12700">
+            <a:solidFill>
+              <a:srgbClr val="EAEAE8"/>
+            </a:solidFill>
+          </a:ln>
+          <a:effectLst/>
+        </p:spPr>
+        <p:style>
+          <a:lnRef idx="1">
+            <a:schemeClr val="accent1"/>
+          </a:lnRef>
+          <a:fillRef idx="3">
+            <a:schemeClr val="accent1"/>
+          </a:fillRef>
+          <a:effectRef idx="2">
+            <a:schemeClr val="accent1"/>
+          </a:effectRef>
+          <a:fontRef idx="minor">
+            <a:schemeClr val="lt1"/>
+          </a:fontRef>
+        </p:style>
+        <p:txBody>
+          <a:bodyPr rtlCol="0" anchor="ctr"/>
+          <a:lstStyle/>
+          <a:p/>
+        </p:txBody>
+      </p:sp>
+      <p:sp>
+        <p:nvSpPr>
+          <p:cNvPr id="21" name="Rounded Rectangle 20"/>
+          <p:cNvSpPr/>
+          <p:nvPr/>
+        </p:nvSpPr>
+        <p:spPr>
+          <a:xfrm>
+            <a:off x="6434175" y="3057905"/>
+            <a:ext cx="365760" cy="365760"/>
+          </a:xfrm>
+          <a:prstGeom prst="roundRect">
+            <a:avLst>
+              <a:gd name="adj" fmla="val 32500"/>
+            </a:avLst>
+          </a:prstGeom>
+          <a:solidFill>
+            <a:srgbClr val="E3F1E7"/>
+          </a:solidFill>
+          <a:ln>
+            <a:noFill/>
+          </a:ln>
+          <a:effectLst/>
+        </p:spPr>
+        <p:style>
+          <a:lnRef idx="1">
+            <a:schemeClr val="accent1"/>
+          </a:lnRef>
+          <a:fillRef idx="3">
+            <a:schemeClr val="accent1"/>
+          </a:fillRef>
+          <a:effectRef idx="2">
+            <a:schemeClr val="accent1"/>
+          </a:effectRef>
+          <a:fontRef idx="minor">
+            <a:schemeClr val="lt1"/>
+          </a:fontRef>
+        </p:style>
+        <p:txBody>
+          <a:bodyPr rtlCol="0" anchor="ctr"/>
+          <a:lstStyle/>
+          <a:p/>
+        </p:txBody>
+      </p:sp>
+      <p:sp>
+        <p:nvSpPr>
+          <p:cNvPr id="22" name="TextBox 21"/>
+          <p:cNvSpPr txBox="1"/>
+          <p:nvPr/>
+        </p:nvSpPr>
+        <p:spPr>
+          <a:xfrm>
+            <a:off x="6434175" y="3121913"/>
+            <a:ext cx="365760" cy="256032"/>
+          </a:xfrm>
+          <a:prstGeom prst="rect">
+            <a:avLst/>
+          </a:prstGeom>
+          <a:noFill/>
+        </p:spPr>
+        <p:txBody>
+          <a:bodyPr wrap="square" lIns="0" rIns="0" tIns="0" bIns="0" anchor="t">
+            <a:spAutoFit/>
+          </a:bodyPr>
+          <a:lstStyle/>
+          <a:p>
+            <a:pPr algn="ctr">
+              <a:lnSpc>
+                <a:spcPct val="135000"/>
+              </a:lnSpc>
+            </a:pPr>
+            <a:r>
+              <a:rPr sz="1500" b="1" i="0">
+                <a:solidFill>
+                  <a:srgbClr val="166534"/>
+                </a:solidFill>
+                <a:latin typeface="Verdana"/>
+              </a:rPr>
+              <a:t>4</a:t>
+            </a:r>
+          </a:p>
+        </p:txBody>
+      </p:sp>
+      <p:sp>
+        <p:nvSpPr>
+          <p:cNvPr id="23" name="TextBox 22"/>
+          <p:cNvSpPr txBox="1"/>
+          <p:nvPr/>
+        </p:nvSpPr>
+        <p:spPr>
+          <a:xfrm>
+            <a:off x="6937095" y="3071876"/>
+            <a:ext cx="4504791" cy="374396"/>
+          </a:xfrm>
+          <a:prstGeom prst="rect">
+            <a:avLst/>
+          </a:prstGeom>
+          <a:noFill/>
+        </p:spPr>
+        <p:txBody>
+          <a:bodyPr wrap="square" lIns="0" rIns="0" tIns="0" bIns="0" anchor="t">
+            <a:spAutoFit/>
+          </a:bodyPr>
+          <a:lstStyle/>
+          <a:p>
+            <a:pPr algn="l">
+              <a:lnSpc>
+                <a:spcPct val="140000"/>
+              </a:lnSpc>
+            </a:pPr>
+            <a:r>
+              <a:rPr sz="1900" b="0" i="0">
+                <a:solidFill>
+                  <a:srgbClr val="3A3D40"/>
+                </a:solidFill>
+                <a:latin typeface="Verdana"/>
+              </a:rPr>
+              <a:t>médecin   </a:t>
+            </a:r>
+            <a:r>
+              <a:rPr sz="1900" b="1" i="0">
+                <a:solidFill>
+                  <a:srgbClr val="07734A"/>
+                </a:solidFill>
+                <a:latin typeface="Verdana"/>
+              </a:rPr>
+              <a:t>» le son « in »</a:t>
+            </a:r>
+          </a:p>
+        </p:txBody>
+      </p:sp>
+      <p:sp>
+        <p:nvSpPr>
+          <p:cNvPr id="24" name="Rounded Rectangle 23"/>
+          <p:cNvSpPr/>
+          <p:nvPr/>
+        </p:nvSpPr>
+        <p:spPr>
+          <a:xfrm>
+            <a:off x="566928" y="3693160"/>
+            <a:ext cx="5464911" cy="648716"/>
+          </a:xfrm>
+          <a:prstGeom prst="roundRect">
+            <a:avLst>
+              <a:gd name="adj" fmla="val 22552"/>
+            </a:avLst>
+          </a:prstGeom>
+          <a:solidFill>
+            <a:srgbClr val="E6F5EE"/>
+          </a:solidFill>
+          <a:ln w="12700">
+            <a:solidFill>
+              <a:srgbClr val="EAEAE8"/>
+            </a:solidFill>
+          </a:ln>
+          <a:effectLst/>
+        </p:spPr>
+        <p:style>
+          <a:lnRef idx="1">
+            <a:schemeClr val="accent1"/>
+          </a:lnRef>
+          <a:fillRef idx="3">
+            <a:schemeClr val="accent1"/>
+          </a:fillRef>
+          <a:effectRef idx="2">
+            <a:schemeClr val="accent1"/>
+          </a:effectRef>
+          <a:fontRef idx="minor">
+            <a:schemeClr val="lt1"/>
+          </a:fontRef>
+        </p:style>
+        <p:txBody>
+          <a:bodyPr rtlCol="0" anchor="ctr"/>
+          <a:lstStyle/>
+          <a:p/>
+        </p:txBody>
+      </p:sp>
+      <p:sp>
+        <p:nvSpPr>
+          <p:cNvPr id="25" name="Rounded Rectangle 24"/>
+          <p:cNvSpPr/>
+          <p:nvPr/>
+        </p:nvSpPr>
+        <p:spPr>
+          <a:xfrm>
+            <a:off x="841247" y="3834638"/>
+            <a:ext cx="365760" cy="365760"/>
+          </a:xfrm>
+          <a:prstGeom prst="roundRect">
+            <a:avLst>
+              <a:gd name="adj" fmla="val 32500"/>
+            </a:avLst>
+          </a:prstGeom>
+          <a:solidFill>
+            <a:srgbClr val="E3F1E7"/>
+          </a:solidFill>
+          <a:ln>
+            <a:noFill/>
+          </a:ln>
+          <a:effectLst/>
+        </p:spPr>
+        <p:style>
+          <a:lnRef idx="1">
+            <a:schemeClr val="accent1"/>
+          </a:lnRef>
+          <a:fillRef idx="3">
+            <a:schemeClr val="accent1"/>
+          </a:fillRef>
+          <a:effectRef idx="2">
+            <a:schemeClr val="accent1"/>
+          </a:effectRef>
+          <a:fontRef idx="minor">
+            <a:schemeClr val="lt1"/>
+          </a:fontRef>
+        </p:style>
+        <p:txBody>
+          <a:bodyPr rtlCol="0" anchor="ctr"/>
+          <a:lstStyle/>
+          <a:p/>
+        </p:txBody>
+      </p:sp>
+      <p:sp>
+        <p:nvSpPr>
+          <p:cNvPr id="26" name="TextBox 25"/>
+          <p:cNvSpPr txBox="1"/>
+          <p:nvPr/>
+        </p:nvSpPr>
+        <p:spPr>
+          <a:xfrm>
+            <a:off x="841247" y="3898646"/>
+            <a:ext cx="365760" cy="256032"/>
+          </a:xfrm>
+          <a:prstGeom prst="rect">
+            <a:avLst/>
+          </a:prstGeom>
+          <a:noFill/>
+        </p:spPr>
+        <p:txBody>
+          <a:bodyPr wrap="square" lIns="0" rIns="0" tIns="0" bIns="0" anchor="t">
+            <a:spAutoFit/>
+          </a:bodyPr>
+          <a:lstStyle/>
+          <a:p>
+            <a:pPr algn="ctr">
+              <a:lnSpc>
+                <a:spcPct val="135000"/>
+              </a:lnSpc>
+            </a:pPr>
+            <a:r>
+              <a:rPr sz="1500" b="1" i="0">
+                <a:solidFill>
+                  <a:srgbClr val="166534"/>
+                </a:solidFill>
+                <a:latin typeface="Verdana"/>
+              </a:rPr>
+              <a:t>5</a:t>
+            </a:r>
+          </a:p>
+        </p:txBody>
+      </p:sp>
+      <p:sp>
+        <p:nvSpPr>
+          <p:cNvPr id="27" name="TextBox 26"/>
+          <p:cNvSpPr txBox="1"/>
+          <p:nvPr/>
+        </p:nvSpPr>
+        <p:spPr>
+          <a:xfrm>
+            <a:off x="1344168" y="3848608"/>
+            <a:ext cx="4504791" cy="374396"/>
+          </a:xfrm>
+          <a:prstGeom prst="rect">
+            <a:avLst/>
+          </a:prstGeom>
+          <a:noFill/>
+        </p:spPr>
+        <p:txBody>
+          <a:bodyPr wrap="square" lIns="0" rIns="0" tIns="0" bIns="0" anchor="t">
+            <a:spAutoFit/>
+          </a:bodyPr>
+          <a:lstStyle/>
+          <a:p>
+            <a:pPr algn="l">
+              <a:lnSpc>
+                <a:spcPct val="140000"/>
+              </a:lnSpc>
+            </a:pPr>
+            <a:r>
+              <a:rPr sz="1900" b="0" i="0">
+                <a:solidFill>
+                  <a:srgbClr val="3A3D40"/>
+                </a:solidFill>
+                <a:latin typeface="Verdana"/>
+              </a:rPr>
+              <a:t>traitement   </a:t>
+            </a:r>
+            <a:r>
+              <a:rPr sz="1900" b="1" i="0">
+                <a:solidFill>
+                  <a:srgbClr val="07734A"/>
+                </a:solidFill>
+                <a:latin typeface="Verdana"/>
+              </a:rPr>
+              <a:t>» le son « an »</a:t>
+            </a:r>
+          </a:p>
+        </p:txBody>
+      </p:sp>
+      <p:sp>
+        <p:nvSpPr>
+          <p:cNvPr id="28" name="Rounded Rectangle 27"/>
+          <p:cNvSpPr/>
+          <p:nvPr/>
+        </p:nvSpPr>
+        <p:spPr>
+          <a:xfrm>
+            <a:off x="6159855" y="3693160"/>
+            <a:ext cx="5464911" cy="648716"/>
+          </a:xfrm>
+          <a:prstGeom prst="roundRect">
+            <a:avLst>
+              <a:gd name="adj" fmla="val 22552"/>
+            </a:avLst>
+          </a:prstGeom>
+          <a:solidFill>
+            <a:srgbClr val="E6F5EE"/>
+          </a:solidFill>
+          <a:ln w="12700">
+            <a:solidFill>
+              <a:srgbClr val="EAEAE8"/>
+            </a:solidFill>
+          </a:ln>
+          <a:effectLst/>
+        </p:spPr>
+        <p:style>
+          <a:lnRef idx="1">
+            <a:schemeClr val="accent1"/>
+          </a:lnRef>
+          <a:fillRef idx="3">
+            <a:schemeClr val="accent1"/>
+          </a:fillRef>
+          <a:effectRef idx="2">
+            <a:schemeClr val="accent1"/>
+          </a:effectRef>
+          <a:fontRef idx="minor">
+            <a:schemeClr val="lt1"/>
+          </a:fontRef>
+        </p:style>
+        <p:txBody>
+          <a:bodyPr rtlCol="0" anchor="ctr"/>
+          <a:lstStyle/>
+          <a:p/>
+        </p:txBody>
+      </p:sp>
+      <p:sp>
+        <p:nvSpPr>
+          <p:cNvPr id="29" name="Rounded Rectangle 28"/>
+          <p:cNvSpPr/>
+          <p:nvPr/>
+        </p:nvSpPr>
+        <p:spPr>
+          <a:xfrm>
+            <a:off x="6434175" y="3834638"/>
+            <a:ext cx="365760" cy="365760"/>
+          </a:xfrm>
+          <a:prstGeom prst="roundRect">
+            <a:avLst>
+              <a:gd name="adj" fmla="val 32500"/>
+            </a:avLst>
+          </a:prstGeom>
+          <a:solidFill>
+            <a:srgbClr val="E3F1E7"/>
+          </a:solidFill>
+          <a:ln>
+            <a:noFill/>
+          </a:ln>
+          <a:effectLst/>
+        </p:spPr>
+        <p:style>
+          <a:lnRef idx="1">
+            <a:schemeClr val="accent1"/>
+          </a:lnRef>
+          <a:fillRef idx="3">
+            <a:schemeClr val="accent1"/>
+          </a:fillRef>
+          <a:effectRef idx="2">
+            <a:schemeClr val="accent1"/>
+          </a:effectRef>
+          <a:fontRef idx="minor">
+            <a:schemeClr val="lt1"/>
+          </a:fontRef>
+        </p:style>
+        <p:txBody>
+          <a:bodyPr rtlCol="0" anchor="ctr"/>
+          <a:lstStyle/>
+          <a:p/>
+        </p:txBody>
+      </p:sp>
+      <p:sp>
+        <p:nvSpPr>
+          <p:cNvPr id="30" name="TextBox 29"/>
+          <p:cNvSpPr txBox="1"/>
+          <p:nvPr/>
+        </p:nvSpPr>
+        <p:spPr>
+          <a:xfrm>
+            <a:off x="6434175" y="3898646"/>
+            <a:ext cx="365760" cy="256032"/>
+          </a:xfrm>
+          <a:prstGeom prst="rect">
+            <a:avLst/>
+          </a:prstGeom>
+          <a:noFill/>
+        </p:spPr>
+        <p:txBody>
+          <a:bodyPr wrap="square" lIns="0" rIns="0" tIns="0" bIns="0" anchor="t">
+            <a:spAutoFit/>
+          </a:bodyPr>
+          <a:lstStyle/>
+          <a:p>
+            <a:pPr algn="ctr">
+              <a:lnSpc>
+                <a:spcPct val="135000"/>
+              </a:lnSpc>
+            </a:pPr>
+            <a:r>
+              <a:rPr sz="1500" b="1" i="0">
+                <a:solidFill>
+                  <a:srgbClr val="166534"/>
+                </a:solidFill>
+                <a:latin typeface="Verdana"/>
+              </a:rPr>
+              <a:t>6</a:t>
+            </a:r>
+          </a:p>
+        </p:txBody>
+      </p:sp>
+      <p:sp>
+        <p:nvSpPr>
+          <p:cNvPr id="31" name="TextBox 30"/>
+          <p:cNvSpPr txBox="1"/>
+          <p:nvPr/>
+        </p:nvSpPr>
+        <p:spPr>
+          <a:xfrm>
+            <a:off x="6937095" y="3848608"/>
+            <a:ext cx="4504791" cy="374396"/>
+          </a:xfrm>
+          <a:prstGeom prst="rect">
+            <a:avLst/>
+          </a:prstGeom>
+          <a:noFill/>
+        </p:spPr>
+        <p:txBody>
+          <a:bodyPr wrap="square" lIns="0" rIns="0" tIns="0" bIns="0" anchor="t">
+            <a:spAutoFit/>
+          </a:bodyPr>
+          <a:lstStyle/>
+          <a:p>
+            <a:pPr algn="l">
+              <a:lnSpc>
+                <a:spcPct val="140000"/>
+              </a:lnSpc>
+            </a:pPr>
+            <a:r>
+              <a:rPr sz="1900" b="0" i="0">
+                <a:solidFill>
+                  <a:srgbClr val="3A3D40"/>
+                </a:solidFill>
+                <a:latin typeface="Verdana"/>
+              </a:rPr>
+              <a:t>matin   </a:t>
+            </a:r>
+            <a:r>
+              <a:rPr sz="1900" b="1" i="0">
+                <a:solidFill>
+                  <a:srgbClr val="07734A"/>
+                </a:solidFill>
+                <a:latin typeface="Verdana"/>
+              </a:rPr>
+              <a:t>» le son « in »</a:t>
+            </a:r>
+          </a:p>
+        </p:txBody>
+      </p:sp>
+      <p:sp>
+        <p:nvSpPr>
+          <p:cNvPr id="32" name="Rounded Rectangle 31"/>
+          <p:cNvSpPr/>
+          <p:nvPr/>
+        </p:nvSpPr>
+        <p:spPr>
+          <a:xfrm>
+            <a:off x="566928" y="4469892"/>
+            <a:ext cx="5464911" cy="648716"/>
+          </a:xfrm>
+          <a:prstGeom prst="roundRect">
+            <a:avLst>
+              <a:gd name="adj" fmla="val 22552"/>
+            </a:avLst>
+          </a:prstGeom>
+          <a:solidFill>
+            <a:srgbClr val="E6F5EE"/>
+          </a:solidFill>
+          <a:ln w="12700">
+            <a:solidFill>
+              <a:srgbClr val="EAEAE8"/>
+            </a:solidFill>
+          </a:ln>
+          <a:effectLst/>
+        </p:spPr>
+        <p:style>
+          <a:lnRef idx="1">
+            <a:schemeClr val="accent1"/>
+          </a:lnRef>
+          <a:fillRef idx="3">
+            <a:schemeClr val="accent1"/>
+          </a:fillRef>
+          <a:effectRef idx="2">
+            <a:schemeClr val="accent1"/>
+          </a:effectRef>
+          <a:fontRef idx="minor">
+            <a:schemeClr val="lt1"/>
+          </a:fontRef>
+        </p:style>
+        <p:txBody>
+          <a:bodyPr rtlCol="0" anchor="ctr"/>
+          <a:lstStyle/>
+          <a:p/>
+        </p:txBody>
+      </p:sp>
+      <p:sp>
+        <p:nvSpPr>
+          <p:cNvPr id="33" name="Rounded Rectangle 32"/>
+          <p:cNvSpPr/>
+          <p:nvPr/>
+        </p:nvSpPr>
+        <p:spPr>
+          <a:xfrm>
+            <a:off x="841247" y="4611370"/>
+            <a:ext cx="365760" cy="365760"/>
+          </a:xfrm>
+          <a:prstGeom prst="roundRect">
+            <a:avLst>
+              <a:gd name="adj" fmla="val 32500"/>
+            </a:avLst>
+          </a:prstGeom>
+          <a:solidFill>
+            <a:srgbClr val="E3F1E7"/>
+          </a:solidFill>
+          <a:ln>
+            <a:noFill/>
+          </a:ln>
+          <a:effectLst/>
+        </p:spPr>
+        <p:style>
+          <a:lnRef idx="1">
+            <a:schemeClr val="accent1"/>
+          </a:lnRef>
+          <a:fillRef idx="3">
+            <a:schemeClr val="accent1"/>
+          </a:fillRef>
+          <a:effectRef idx="2">
+            <a:schemeClr val="accent1"/>
+          </a:effectRef>
+          <a:fontRef idx="minor">
+            <a:schemeClr val="lt1"/>
+          </a:fontRef>
+        </p:style>
+        <p:txBody>
+          <a:bodyPr rtlCol="0" anchor="ctr"/>
+          <a:lstStyle/>
+          <a:p/>
+        </p:txBody>
+      </p:sp>
+      <p:sp>
+        <p:nvSpPr>
+          <p:cNvPr id="34" name="TextBox 33"/>
+          <p:cNvSpPr txBox="1"/>
+          <p:nvPr/>
+        </p:nvSpPr>
+        <p:spPr>
+          <a:xfrm>
+            <a:off x="841247" y="4675378"/>
+            <a:ext cx="365760" cy="256032"/>
+          </a:xfrm>
+          <a:prstGeom prst="rect">
+            <a:avLst/>
+          </a:prstGeom>
+          <a:noFill/>
+        </p:spPr>
+        <p:txBody>
+          <a:bodyPr wrap="square" lIns="0" rIns="0" tIns="0" bIns="0" anchor="t">
+            <a:spAutoFit/>
+          </a:bodyPr>
+          <a:lstStyle/>
+          <a:p>
+            <a:pPr algn="ctr">
+              <a:lnSpc>
+                <a:spcPct val="135000"/>
+              </a:lnSpc>
+            </a:pPr>
+            <a:r>
+              <a:rPr sz="1500" b="1" i="0">
+                <a:solidFill>
+                  <a:srgbClr val="166534"/>
+                </a:solidFill>
+                <a:latin typeface="Verdana"/>
+              </a:rPr>
+              <a:t>7</a:t>
+            </a:r>
+          </a:p>
+        </p:txBody>
+      </p:sp>
+      <p:sp>
+        <p:nvSpPr>
+          <p:cNvPr id="35" name="TextBox 34"/>
+          <p:cNvSpPr txBox="1"/>
+          <p:nvPr/>
+        </p:nvSpPr>
+        <p:spPr>
+          <a:xfrm>
+            <a:off x="1344168" y="4625340"/>
+            <a:ext cx="4504791" cy="374396"/>
+          </a:xfrm>
+          <a:prstGeom prst="rect">
+            <a:avLst/>
+          </a:prstGeom>
+          <a:noFill/>
+        </p:spPr>
+        <p:txBody>
+          <a:bodyPr wrap="square" lIns="0" rIns="0" tIns="0" bIns="0" anchor="t">
+            <a:spAutoFit/>
+          </a:bodyPr>
+          <a:lstStyle/>
+          <a:p>
+            <a:pPr algn="l">
+              <a:lnSpc>
+                <a:spcPct val="140000"/>
+              </a:lnSpc>
+            </a:pPr>
+            <a:r>
+              <a:rPr sz="1900" b="0" i="0">
+                <a:solidFill>
+                  <a:srgbClr val="3A3D40"/>
+                </a:solidFill>
+                <a:latin typeface="Verdana"/>
+              </a:rPr>
+              <a:t>pendant   </a:t>
+            </a:r>
+            <a:r>
+              <a:rPr sz="1900" b="1" i="0">
+                <a:solidFill>
+                  <a:srgbClr val="07734A"/>
+                </a:solidFill>
+                <a:latin typeface="Verdana"/>
+              </a:rPr>
+              <a:t>» le son « an »</a:t>
+            </a:r>
+          </a:p>
+        </p:txBody>
+      </p:sp>
+      <p:sp>
+        <p:nvSpPr>
+          <p:cNvPr id="36" name="Rounded Rectangle 35"/>
+          <p:cNvSpPr/>
+          <p:nvPr/>
+        </p:nvSpPr>
+        <p:spPr>
+          <a:xfrm>
+            <a:off x="6159855" y="4469892"/>
+            <a:ext cx="5464911" cy="648716"/>
+          </a:xfrm>
+          <a:prstGeom prst="roundRect">
+            <a:avLst>
+              <a:gd name="adj" fmla="val 22552"/>
+            </a:avLst>
+          </a:prstGeom>
+          <a:solidFill>
+            <a:srgbClr val="E6F5EE"/>
+          </a:solidFill>
+          <a:ln w="12700">
+            <a:solidFill>
+              <a:srgbClr val="EAEAE8"/>
+            </a:solidFill>
+          </a:ln>
+          <a:effectLst/>
+        </p:spPr>
+        <p:style>
+          <a:lnRef idx="1">
+            <a:schemeClr val="accent1"/>
+          </a:lnRef>
+          <a:fillRef idx="3">
+            <a:schemeClr val="accent1"/>
+          </a:fillRef>
+          <a:effectRef idx="2">
+            <a:schemeClr val="accent1"/>
+          </a:effectRef>
+          <a:fontRef idx="minor">
+            <a:schemeClr val="lt1"/>
+          </a:fontRef>
+        </p:style>
+        <p:txBody>
+          <a:bodyPr rtlCol="0" anchor="ctr"/>
+          <a:lstStyle/>
+          <a:p/>
+        </p:txBody>
+      </p:sp>
+      <p:sp>
+        <p:nvSpPr>
+          <p:cNvPr id="37" name="Rounded Rectangle 36"/>
+          <p:cNvSpPr/>
+          <p:nvPr/>
+        </p:nvSpPr>
+        <p:spPr>
+          <a:xfrm>
+            <a:off x="6434175" y="4611370"/>
+            <a:ext cx="365760" cy="365760"/>
+          </a:xfrm>
+          <a:prstGeom prst="roundRect">
+            <a:avLst>
+              <a:gd name="adj" fmla="val 32500"/>
+            </a:avLst>
+          </a:prstGeom>
+          <a:solidFill>
+            <a:srgbClr val="E3F1E7"/>
+          </a:solidFill>
+          <a:ln>
+            <a:noFill/>
+          </a:ln>
+          <a:effectLst/>
+        </p:spPr>
+        <p:style>
+          <a:lnRef idx="1">
+            <a:schemeClr val="accent1"/>
+          </a:lnRef>
+          <a:fillRef idx="3">
+            <a:schemeClr val="accent1"/>
+          </a:fillRef>
+          <a:effectRef idx="2">
+            <a:schemeClr val="accent1"/>
+          </a:effectRef>
+          <a:fontRef idx="minor">
+            <a:schemeClr val="lt1"/>
+          </a:fontRef>
+        </p:style>
+        <p:txBody>
+          <a:bodyPr rtlCol="0" anchor="ctr"/>
+          <a:lstStyle/>
+          <a:p/>
+        </p:txBody>
+      </p:sp>
+      <p:sp>
+        <p:nvSpPr>
+          <p:cNvPr id="38" name="TextBox 37"/>
+          <p:cNvSpPr txBox="1"/>
+          <p:nvPr/>
+        </p:nvSpPr>
+        <p:spPr>
+          <a:xfrm>
+            <a:off x="6434175" y="4675378"/>
+            <a:ext cx="365760" cy="256032"/>
+          </a:xfrm>
+          <a:prstGeom prst="rect">
+            <a:avLst/>
+          </a:prstGeom>
+          <a:noFill/>
+        </p:spPr>
+        <p:txBody>
+          <a:bodyPr wrap="square" lIns="0" rIns="0" tIns="0" bIns="0" anchor="t">
+            <a:spAutoFit/>
+          </a:bodyPr>
+          <a:lstStyle/>
+          <a:p>
+            <a:pPr algn="ctr">
+              <a:lnSpc>
+                <a:spcPct val="135000"/>
+              </a:lnSpc>
+            </a:pPr>
+            <a:r>
+              <a:rPr sz="1500" b="1" i="0">
+                <a:solidFill>
+                  <a:srgbClr val="166534"/>
+                </a:solidFill>
+                <a:latin typeface="Verdana"/>
+              </a:rPr>
+              <a:t>8</a:t>
+            </a:r>
+          </a:p>
+        </p:txBody>
+      </p:sp>
+      <p:sp>
+        <p:nvSpPr>
+          <p:cNvPr id="39" name="TextBox 38"/>
+          <p:cNvSpPr txBox="1"/>
+          <p:nvPr/>
+        </p:nvSpPr>
+        <p:spPr>
+          <a:xfrm>
+            <a:off x="6937095" y="4625340"/>
+            <a:ext cx="4504791" cy="374396"/>
+          </a:xfrm>
+          <a:prstGeom prst="rect">
+            <a:avLst/>
+          </a:prstGeom>
+          <a:noFill/>
+        </p:spPr>
+        <p:txBody>
+          <a:bodyPr wrap="square" lIns="0" rIns="0" tIns="0" bIns="0" anchor="t">
+            <a:spAutoFit/>
+          </a:bodyPr>
+          <a:lstStyle/>
+          <a:p>
+            <a:pPr algn="l">
+              <a:lnSpc>
+                <a:spcPct val="140000"/>
+              </a:lnSpc>
+            </a:pPr>
+            <a:r>
+              <a:rPr sz="1900" b="0" i="0">
+                <a:solidFill>
+                  <a:srgbClr val="3A3D40"/>
+                </a:solidFill>
+                <a:latin typeface="Verdana"/>
+              </a:rPr>
+              <a:t>bien   </a:t>
+            </a:r>
+            <a:r>
+              <a:rPr sz="1900" b="1" i="0">
+                <a:solidFill>
+                  <a:srgbClr val="07734A"/>
+                </a:solidFill>
+                <a:latin typeface="Verdana"/>
+              </a:rPr>
+              <a:t>» le son « in »</a:t>
+            </a:r>
+          </a:p>
+        </p:txBody>
+      </p:sp>
+    </p:spTree>
+  </p:cSld>
+  <p:clrMapOvr>
+    <a:masterClrMapping/>
+  </p:clrMapOvr>
+</p:sld>
+</file>
+
+<file path=ppt/slides/slide16.xml><?xml version="1.0" encoding="utf-8"?>
+<p:sld xmlns:a="http://schemas.openxmlformats.org/drawingml/2006/main" xmlns:p="http://schemas.openxmlformats.org/presentationml/2006/main" xmlns:r="http://schemas.openxmlformats.org/officeDocument/2006/relationships">
+  <p:cSld>
+    <p:spTree>
+      <p:nvGrpSpPr>
+        <p:cNvPr id="1" name=""/>
+        <p:cNvGrpSpPr/>
+        <p:nvPr/>
+      </p:nvGrpSpPr>
+      <p:grpSpPr/>
+      <p:sp>
+        <p:nvSpPr>
+          <p:cNvPr id="2" name="Rectangle 1"/>
+          <p:cNvSpPr/>
+          <p:nvPr/>
+        </p:nvSpPr>
+        <p:spPr>
+          <a:xfrm>
+            <a:off x="0" y="0"/>
+            <a:ext cx="12191695" cy="6858000"/>
+          </a:xfrm>
+          <a:prstGeom prst="rect">
+            <a:avLst/>
+          </a:prstGeom>
+          <a:solidFill>
+            <a:srgbClr val="F7F7F5"/>
+          </a:solidFill>
+          <a:ln>
+            <a:noFill/>
+          </a:ln>
+          <a:effectLst/>
+        </p:spPr>
+        <p:style>
+          <a:lnRef idx="1">
+            <a:schemeClr val="accent1"/>
+          </a:lnRef>
+          <a:fillRef idx="3">
+            <a:schemeClr val="accent1"/>
+          </a:fillRef>
+          <a:effectRef idx="2">
+            <a:schemeClr val="accent1"/>
+          </a:effectRef>
+          <a:fontRef idx="minor">
+            <a:schemeClr val="lt1"/>
+          </a:fontRef>
+        </p:style>
+        <p:txBody>
+          <a:bodyPr rtlCol="0" anchor="ctr"/>
+          <a:lstStyle/>
+          <a:p/>
+        </p:txBody>
+      </p:sp>
+      <p:sp>
+        <p:nvSpPr>
+          <p:cNvPr id="3" name="TextBox 2"/>
+          <p:cNvSpPr txBox="1"/>
+          <p:nvPr/>
+        </p:nvSpPr>
+        <p:spPr>
+          <a:xfrm>
+            <a:off x="566928" y="6355080"/>
+            <a:ext cx="6400800" cy="219456"/>
+          </a:xfrm>
+          <a:prstGeom prst="rect">
+            <a:avLst/>
+          </a:prstGeom>
+          <a:noFill/>
+        </p:spPr>
+        <p:txBody>
+          <a:bodyPr wrap="square" lIns="0" rIns="0" tIns="0" bIns="0" anchor="t">
+            <a:spAutoFit/>
+          </a:bodyPr>
+          <a:lstStyle/>
+          <a:p>
+            <a:pPr algn="l">
+              <a:lnSpc>
+                <a:spcPct val="135000"/>
+              </a:lnSpc>
+            </a:pPr>
+            <a:r>
+              <a:rPr sz="1200" b="0" i="0">
+                <a:solidFill>
+                  <a:srgbClr val="6E7175"/>
+                </a:solidFill>
+                <a:latin typeface="Verdana"/>
+              </a:rPr>
+              <a:t>A3 · Prendre rendez-vous et aller à la pharmacie</a:t>
+            </a:r>
+          </a:p>
+        </p:txBody>
+      </p:sp>
+      <p:sp>
+        <p:nvSpPr>
+          <p:cNvPr id="4" name="TextBox 3"/>
+          <p:cNvSpPr txBox="1"/>
+          <p:nvPr/>
+        </p:nvSpPr>
+        <p:spPr>
+          <a:xfrm>
+            <a:off x="10710367" y="6355080"/>
+            <a:ext cx="914400" cy="219456"/>
+          </a:xfrm>
+          <a:prstGeom prst="rect">
+            <a:avLst/>
+          </a:prstGeom>
+          <a:noFill/>
+        </p:spPr>
+        <p:txBody>
+          <a:bodyPr wrap="square" lIns="0" rIns="0" tIns="0" bIns="0" anchor="t">
+            <a:spAutoFit/>
+          </a:bodyPr>
+          <a:lstStyle/>
+          <a:p>
+            <a:pPr algn="r">
+              <a:lnSpc>
+                <a:spcPct val="135000"/>
+              </a:lnSpc>
+            </a:pPr>
+            <a:r>
+              <a:rPr sz="1200" b="0" i="0">
+                <a:solidFill>
+                  <a:srgbClr val="6E7175"/>
+                </a:solidFill>
+                <a:latin typeface="Verdana"/>
+              </a:rPr>
+              <a:t>16</a:t>
+            </a:r>
+          </a:p>
+        </p:txBody>
+      </p:sp>
+      <p:sp>
+        <p:nvSpPr>
+          <p:cNvPr id="5" name="TextBox 4"/>
+          <p:cNvSpPr txBox="1"/>
+          <p:nvPr/>
+        </p:nvSpPr>
+        <p:spPr>
+          <a:xfrm>
+            <a:off x="566928" y="420624"/>
+            <a:ext cx="11057839" cy="237744"/>
+          </a:xfrm>
+          <a:prstGeom prst="rect">
+            <a:avLst/>
+          </a:prstGeom>
+          <a:noFill/>
+        </p:spPr>
+        <p:txBody>
+          <a:bodyPr wrap="square" lIns="0" rIns="0" tIns="0" bIns="0" anchor="t">
+            <a:spAutoFit/>
+          </a:bodyPr>
+          <a:lstStyle/>
+          <a:p>
+            <a:pPr algn="l">
+              <a:lnSpc>
+                <a:spcPct val="135000"/>
+              </a:lnSpc>
+            </a:pPr>
+            <a:r>
+              <a:rPr sz="1300" b="1" i="0" spc="156">
+                <a:solidFill>
+                  <a:srgbClr val="166534"/>
+                </a:solidFill>
+                <a:latin typeface="Verdana"/>
+              </a:rPr>
+              <a:t>PRATIQUE · 5 DE 5</a:t>
+            </a:r>
+          </a:p>
+        </p:txBody>
+      </p:sp>
+      <p:sp>
+        <p:nvSpPr>
+          <p:cNvPr id="6" name="TextBox 5"/>
+          <p:cNvSpPr txBox="1"/>
+          <p:nvPr/>
+        </p:nvSpPr>
+        <p:spPr>
+          <a:xfrm>
+            <a:off x="566928" y="749808"/>
+            <a:ext cx="11057839" cy="877824"/>
+          </a:xfrm>
+          <a:prstGeom prst="rect">
+            <a:avLst/>
+          </a:prstGeom>
+          <a:noFill/>
+        </p:spPr>
+        <p:txBody>
+          <a:bodyPr wrap="square" lIns="0" rIns="0" tIns="0" bIns="0" anchor="t">
+            <a:spAutoFit/>
+          </a:bodyPr>
+          <a:lstStyle/>
+          <a:p>
+            <a:pPr algn="l">
+              <a:lnSpc>
+                <a:spcPct val="115000"/>
+              </a:lnSpc>
+            </a:pPr>
+            <a:r>
+              <a:rPr sz="3400" b="1" i="0">
+                <a:solidFill>
+                  <a:srgbClr val="17181A"/>
+                </a:solidFill>
+                <a:latin typeface="Verdana"/>
+              </a:rPr>
+              <a:t>Trois phrases à lire à voix haute</a:t>
+            </a:r>
+          </a:p>
+        </p:txBody>
+      </p:sp>
+      <p:sp>
+        <p:nvSpPr>
+          <p:cNvPr id="7" name="TextBox 6"/>
+          <p:cNvSpPr txBox="1"/>
+          <p:nvPr/>
+        </p:nvSpPr>
+        <p:spPr>
+          <a:xfrm>
+            <a:off x="566928" y="1645920"/>
+            <a:ext cx="11057839" cy="329184"/>
+          </a:xfrm>
+          <a:prstGeom prst="rect">
+            <a:avLst/>
+          </a:prstGeom>
+          <a:noFill/>
+        </p:spPr>
+        <p:txBody>
+          <a:bodyPr wrap="square" lIns="0" rIns="0" tIns="0" bIns="0" anchor="t">
+            <a:spAutoFit/>
+          </a:bodyPr>
+          <a:lstStyle/>
+          <a:p>
+            <a:pPr algn="l">
+              <a:lnSpc>
+                <a:spcPct val="135000"/>
+              </a:lnSpc>
+            </a:pPr>
+            <a:r>
+              <a:rPr sz="1800" b="0" i="0">
+                <a:solidFill>
+                  <a:srgbClr val="6E7175"/>
+                </a:solidFill>
+                <a:latin typeface="Verdana"/>
+              </a:rPr>
+              <a:t>Chacun lit une phrase. Le groupe ne corrige que les sons nasaux.</a:t>
+            </a:r>
+          </a:p>
+        </p:txBody>
+      </p:sp>
+      <p:sp>
+        <p:nvSpPr>
+          <p:cNvPr id="8" name="Rounded Rectangle 7"/>
+          <p:cNvSpPr/>
+          <p:nvPr/>
+        </p:nvSpPr>
+        <p:spPr>
+          <a:xfrm>
+            <a:off x="566928" y="2139696"/>
+            <a:ext cx="11057839" cy="648716"/>
+          </a:xfrm>
+          <a:prstGeom prst="roundRect">
+            <a:avLst>
+              <a:gd name="adj" fmla="val 22552"/>
+            </a:avLst>
+          </a:prstGeom>
+          <a:solidFill>
+            <a:srgbClr val="FFFFFF"/>
+          </a:solidFill>
+          <a:ln w="12700">
+            <a:solidFill>
+              <a:srgbClr val="EAEAE8"/>
+            </a:solidFill>
+          </a:ln>
+          <a:effectLst/>
+        </p:spPr>
+        <p:style>
+          <a:lnRef idx="1">
+            <a:schemeClr val="accent1"/>
+          </a:lnRef>
+          <a:fillRef idx="3">
+            <a:schemeClr val="accent1"/>
+          </a:fillRef>
+          <a:effectRef idx="2">
+            <a:schemeClr val="accent1"/>
+          </a:effectRef>
+          <a:fontRef idx="minor">
+            <a:schemeClr val="lt1"/>
+          </a:fontRef>
+        </p:style>
+        <p:txBody>
+          <a:bodyPr rtlCol="0" anchor="ctr"/>
+          <a:lstStyle/>
+          <a:p/>
+        </p:txBody>
+      </p:sp>
+      <p:sp>
+        <p:nvSpPr>
+          <p:cNvPr id="9" name="Rounded Rectangle 8"/>
+          <p:cNvSpPr/>
+          <p:nvPr/>
+        </p:nvSpPr>
+        <p:spPr>
+          <a:xfrm>
+            <a:off x="841247" y="2281174"/>
+            <a:ext cx="365760" cy="365760"/>
+          </a:xfrm>
+          <a:prstGeom prst="roundRect">
+            <a:avLst>
+              <a:gd name="adj" fmla="val 32500"/>
+            </a:avLst>
+          </a:prstGeom>
+          <a:solidFill>
+            <a:srgbClr val="E3F1E7"/>
+          </a:solidFill>
+          <a:ln>
+            <a:noFill/>
+          </a:ln>
+          <a:effectLst/>
+        </p:spPr>
+        <p:style>
+          <a:lnRef idx="1">
+            <a:schemeClr val="accent1"/>
+          </a:lnRef>
+          <a:fillRef idx="3">
+            <a:schemeClr val="accent1"/>
+          </a:fillRef>
+          <a:effectRef idx="2">
+            <a:schemeClr val="accent1"/>
+          </a:effectRef>
+          <a:fontRef idx="minor">
+            <a:schemeClr val="lt1"/>
+          </a:fontRef>
+        </p:style>
+        <p:txBody>
+          <a:bodyPr rtlCol="0" anchor="ctr"/>
+          <a:lstStyle/>
+          <a:p/>
+        </p:txBody>
+      </p:sp>
+      <p:sp>
+        <p:nvSpPr>
+          <p:cNvPr id="10" name="TextBox 9"/>
+          <p:cNvSpPr txBox="1"/>
+          <p:nvPr/>
+        </p:nvSpPr>
+        <p:spPr>
+          <a:xfrm>
+            <a:off x="841247" y="2345182"/>
+            <a:ext cx="365760" cy="256032"/>
+          </a:xfrm>
+          <a:prstGeom prst="rect">
+            <a:avLst/>
+          </a:prstGeom>
+          <a:noFill/>
+        </p:spPr>
+        <p:txBody>
+          <a:bodyPr wrap="square" lIns="0" rIns="0" tIns="0" bIns="0" anchor="t">
+            <a:spAutoFit/>
+          </a:bodyPr>
+          <a:lstStyle/>
+          <a:p>
+            <a:pPr algn="ctr">
+              <a:lnSpc>
+                <a:spcPct val="135000"/>
+              </a:lnSpc>
+            </a:pPr>
+            <a:r>
+              <a:rPr sz="1500" b="1" i="0">
+                <a:solidFill>
+                  <a:srgbClr val="166534"/>
+                </a:solidFill>
+                <a:latin typeface="Verdana"/>
+              </a:rPr>
+              <a:t>1</a:t>
+            </a:r>
+          </a:p>
+        </p:txBody>
+      </p:sp>
+      <p:sp>
+        <p:nvSpPr>
+          <p:cNvPr id="11" name="TextBox 10"/>
+          <p:cNvSpPr txBox="1"/>
+          <p:nvPr/>
+        </p:nvSpPr>
+        <p:spPr>
+          <a:xfrm>
+            <a:off x="1344168" y="2295144"/>
+            <a:ext cx="10097719" cy="374396"/>
+          </a:xfrm>
+          <a:prstGeom prst="rect">
+            <a:avLst/>
+          </a:prstGeom>
+          <a:noFill/>
+        </p:spPr>
+        <p:txBody>
+          <a:bodyPr wrap="square" lIns="0" rIns="0" tIns="0" bIns="0" anchor="t">
+            <a:spAutoFit/>
+          </a:bodyPr>
+          <a:lstStyle/>
+          <a:p>
+            <a:pPr algn="l">
+              <a:lnSpc>
+                <a:spcPct val="140000"/>
+              </a:lnSpc>
+            </a:pPr>
+            <a:r>
+              <a:rPr sz="1900" b="0" i="0">
+                <a:solidFill>
+                  <a:srgbClr val="3A3D40"/>
+                </a:solidFill>
+                <a:latin typeface="Verdana"/>
+              </a:rPr>
+              <a:t>Le pharmacien explique le traitement.</a:t>
+            </a:r>
+          </a:p>
+        </p:txBody>
+      </p:sp>
+      <p:sp>
+        <p:nvSpPr>
+          <p:cNvPr id="12" name="Rounded Rectangle 11"/>
+          <p:cNvSpPr/>
+          <p:nvPr/>
+        </p:nvSpPr>
+        <p:spPr>
+          <a:xfrm>
+            <a:off x="566928" y="2916428"/>
+            <a:ext cx="11057839" cy="648716"/>
+          </a:xfrm>
+          <a:prstGeom prst="roundRect">
+            <a:avLst>
+              <a:gd name="adj" fmla="val 22552"/>
+            </a:avLst>
+          </a:prstGeom>
+          <a:solidFill>
+            <a:srgbClr val="FFFFFF"/>
+          </a:solidFill>
+          <a:ln w="12700">
+            <a:solidFill>
+              <a:srgbClr val="EAEAE8"/>
+            </a:solidFill>
+          </a:ln>
+          <a:effectLst/>
+        </p:spPr>
+        <p:style>
+          <a:lnRef idx="1">
+            <a:schemeClr val="accent1"/>
+          </a:lnRef>
+          <a:fillRef idx="3">
+            <a:schemeClr val="accent1"/>
+          </a:fillRef>
+          <a:effectRef idx="2">
+            <a:schemeClr val="accent1"/>
+          </a:effectRef>
+          <a:fontRef idx="minor">
+            <a:schemeClr val="lt1"/>
+          </a:fontRef>
+        </p:style>
+        <p:txBody>
+          <a:bodyPr rtlCol="0" anchor="ctr"/>
+          <a:lstStyle/>
+          <a:p/>
+        </p:txBody>
+      </p:sp>
+      <p:sp>
+        <p:nvSpPr>
+          <p:cNvPr id="13" name="Rounded Rectangle 12"/>
+          <p:cNvSpPr/>
+          <p:nvPr/>
+        </p:nvSpPr>
+        <p:spPr>
+          <a:xfrm>
+            <a:off x="841247" y="3057905"/>
+            <a:ext cx="365760" cy="365760"/>
+          </a:xfrm>
+          <a:prstGeom prst="roundRect">
+            <a:avLst>
+              <a:gd name="adj" fmla="val 32500"/>
+            </a:avLst>
+          </a:prstGeom>
+          <a:solidFill>
+            <a:srgbClr val="E3F1E7"/>
+          </a:solidFill>
+          <a:ln>
+            <a:noFill/>
+          </a:ln>
+          <a:effectLst/>
+        </p:spPr>
+        <p:style>
+          <a:lnRef idx="1">
+            <a:schemeClr val="accent1"/>
+          </a:lnRef>
+          <a:fillRef idx="3">
+            <a:schemeClr val="accent1"/>
+          </a:fillRef>
+          <a:effectRef idx="2">
+            <a:schemeClr val="accent1"/>
+          </a:effectRef>
+          <a:fontRef idx="minor">
+            <a:schemeClr val="lt1"/>
+          </a:fontRef>
+        </p:style>
+        <p:txBody>
+          <a:bodyPr rtlCol="0" anchor="ctr"/>
+          <a:lstStyle/>
+          <a:p/>
+        </p:txBody>
+      </p:sp>
+      <p:sp>
+        <p:nvSpPr>
+          <p:cNvPr id="14" name="TextBox 13"/>
+          <p:cNvSpPr txBox="1"/>
+          <p:nvPr/>
+        </p:nvSpPr>
+        <p:spPr>
+          <a:xfrm>
+            <a:off x="841247" y="3121913"/>
+            <a:ext cx="365760" cy="256032"/>
+          </a:xfrm>
+          <a:prstGeom prst="rect">
+            <a:avLst/>
+          </a:prstGeom>
+          <a:noFill/>
+        </p:spPr>
+        <p:txBody>
+          <a:bodyPr wrap="square" lIns="0" rIns="0" tIns="0" bIns="0" anchor="t">
+            <a:spAutoFit/>
+          </a:bodyPr>
+          <a:lstStyle/>
+          <a:p>
+            <a:pPr algn="ctr">
+              <a:lnSpc>
+                <a:spcPct val="135000"/>
+              </a:lnSpc>
+            </a:pPr>
+            <a:r>
+              <a:rPr sz="1500" b="1" i="0">
+                <a:solidFill>
+                  <a:srgbClr val="166534"/>
+                </a:solidFill>
+                <a:latin typeface="Verdana"/>
+              </a:rPr>
+              <a:t>2</a:t>
+            </a:r>
+          </a:p>
+        </p:txBody>
+      </p:sp>
+      <p:sp>
+        <p:nvSpPr>
+          <p:cNvPr id="15" name="TextBox 14"/>
+          <p:cNvSpPr txBox="1"/>
+          <p:nvPr/>
+        </p:nvSpPr>
+        <p:spPr>
+          <a:xfrm>
+            <a:off x="1344168" y="3071876"/>
+            <a:ext cx="10097719" cy="374396"/>
+          </a:xfrm>
+          <a:prstGeom prst="rect">
+            <a:avLst/>
+          </a:prstGeom>
+          <a:noFill/>
+        </p:spPr>
+        <p:txBody>
+          <a:bodyPr wrap="square" lIns="0" rIns="0" tIns="0" bIns="0" anchor="t">
+            <a:spAutoFit/>
+          </a:bodyPr>
+          <a:lstStyle/>
+          <a:p>
+            <a:pPr algn="l">
+              <a:lnSpc>
+                <a:spcPct val="140000"/>
+              </a:lnSpc>
+            </a:pPr>
+            <a:r>
+              <a:rPr sz="1900" b="0" i="0">
+                <a:solidFill>
+                  <a:srgbClr val="3A3D40"/>
+                </a:solidFill>
+                <a:latin typeface="Verdana"/>
+              </a:rPr>
+              <a:t>Un comprimé le matin, pendant sept jours.</a:t>
+            </a:r>
+          </a:p>
+        </p:txBody>
+      </p:sp>
+      <p:sp>
+        <p:nvSpPr>
+          <p:cNvPr id="16" name="Rounded Rectangle 15"/>
+          <p:cNvSpPr/>
+          <p:nvPr/>
+        </p:nvSpPr>
+        <p:spPr>
+          <a:xfrm>
+            <a:off x="566928" y="3693160"/>
+            <a:ext cx="11057839" cy="648716"/>
+          </a:xfrm>
+          <a:prstGeom prst="roundRect">
+            <a:avLst>
+              <a:gd name="adj" fmla="val 22552"/>
+            </a:avLst>
+          </a:prstGeom>
+          <a:solidFill>
+            <a:srgbClr val="FFFFFF"/>
+          </a:solidFill>
+          <a:ln w="12700">
+            <a:solidFill>
+              <a:srgbClr val="EAEAE8"/>
+            </a:solidFill>
+          </a:ln>
+          <a:effectLst/>
+        </p:spPr>
+        <p:style>
+          <a:lnRef idx="1">
+            <a:schemeClr val="accent1"/>
+          </a:lnRef>
+          <a:fillRef idx="3">
+            <a:schemeClr val="accent1"/>
+          </a:fillRef>
+          <a:effectRef idx="2">
+            <a:schemeClr val="accent1"/>
+          </a:effectRef>
+          <a:fontRef idx="minor">
+            <a:schemeClr val="lt1"/>
+          </a:fontRef>
+        </p:style>
+        <p:txBody>
+          <a:bodyPr rtlCol="0" anchor="ctr"/>
+          <a:lstStyle/>
+          <a:p/>
+        </p:txBody>
+      </p:sp>
+      <p:sp>
+        <p:nvSpPr>
+          <p:cNvPr id="17" name="Rounded Rectangle 16"/>
+          <p:cNvSpPr/>
+          <p:nvPr/>
+        </p:nvSpPr>
+        <p:spPr>
+          <a:xfrm>
+            <a:off x="841247" y="3834638"/>
+            <a:ext cx="365760" cy="365760"/>
+          </a:xfrm>
+          <a:prstGeom prst="roundRect">
+            <a:avLst>
+              <a:gd name="adj" fmla="val 32500"/>
+            </a:avLst>
+          </a:prstGeom>
+          <a:solidFill>
+            <a:srgbClr val="E3F1E7"/>
+          </a:solidFill>
+          <a:ln>
+            <a:noFill/>
+          </a:ln>
+          <a:effectLst/>
+        </p:spPr>
+        <p:style>
+          <a:lnRef idx="1">
+            <a:schemeClr val="accent1"/>
+          </a:lnRef>
+          <a:fillRef idx="3">
+            <a:schemeClr val="accent1"/>
+          </a:fillRef>
+          <a:effectRef idx="2">
+            <a:schemeClr val="accent1"/>
+          </a:effectRef>
+          <a:fontRef idx="minor">
+            <a:schemeClr val="lt1"/>
+          </a:fontRef>
+        </p:style>
+        <p:txBody>
+          <a:bodyPr rtlCol="0" anchor="ctr"/>
+          <a:lstStyle/>
+          <a:p/>
+        </p:txBody>
+      </p:sp>
+      <p:sp>
+        <p:nvSpPr>
+          <p:cNvPr id="18" name="TextBox 17"/>
+          <p:cNvSpPr txBox="1"/>
+          <p:nvPr/>
+        </p:nvSpPr>
+        <p:spPr>
+          <a:xfrm>
+            <a:off x="841247" y="3898646"/>
+            <a:ext cx="365760" cy="256032"/>
+          </a:xfrm>
+          <a:prstGeom prst="rect">
+            <a:avLst/>
+          </a:prstGeom>
+          <a:noFill/>
+        </p:spPr>
+        <p:txBody>
+          <a:bodyPr wrap="square" lIns="0" rIns="0" tIns="0" bIns="0" anchor="t">
+            <a:spAutoFit/>
+          </a:bodyPr>
+          <a:lstStyle/>
+          <a:p>
+            <a:pPr algn="ctr">
+              <a:lnSpc>
+                <a:spcPct val="135000"/>
+              </a:lnSpc>
+            </a:pPr>
+            <a:r>
+              <a:rPr sz="1500" b="1" i="0">
+                <a:solidFill>
+                  <a:srgbClr val="166534"/>
+                </a:solidFill>
+                <a:latin typeface="Verdana"/>
+              </a:rPr>
+              <a:t>3</a:t>
+            </a:r>
+          </a:p>
+        </p:txBody>
+      </p:sp>
+      <p:sp>
+        <p:nvSpPr>
+          <p:cNvPr id="19" name="TextBox 18"/>
+          <p:cNvSpPr txBox="1"/>
+          <p:nvPr/>
+        </p:nvSpPr>
+        <p:spPr>
+          <a:xfrm>
+            <a:off x="1344168" y="3848608"/>
+            <a:ext cx="10097719" cy="374396"/>
+          </a:xfrm>
+          <a:prstGeom prst="rect">
+            <a:avLst/>
+          </a:prstGeom>
+          <a:noFill/>
+        </p:spPr>
+        <p:txBody>
+          <a:bodyPr wrap="square" lIns="0" rIns="0" tIns="0" bIns="0" anchor="t">
+            <a:spAutoFit/>
+          </a:bodyPr>
+          <a:lstStyle/>
+          <a:p>
+            <a:pPr algn="l">
+              <a:lnSpc>
+                <a:spcPct val="140000"/>
+              </a:lnSpc>
+            </a:pPr>
+            <a:r>
+              <a:rPr sz="1900" b="0" i="0">
+                <a:solidFill>
+                  <a:srgbClr val="3A3D40"/>
+                </a:solidFill>
+                <a:latin typeface="Verdana"/>
+              </a:rPr>
+              <a:t>La salle d'attente est pleine, mais je me sens bien.</a:t>
+            </a:r>
+          </a:p>
+        </p:txBody>
+      </p:sp>
+    </p:spTree>
+  </p:cSld>
+  <p:clrMapOvr>
+    <a:masterClrMapping/>
+  </p:clrMapOvr>
+</p:sld>
+</file>
+
+<file path=ppt/slides/slide17.xml><?xml version="1.0" encoding="utf-8"?>
+<p:sld xmlns:a="http://schemas.openxmlformats.org/drawingml/2006/main" xmlns:p="http://schemas.openxmlformats.org/presentationml/2006/main" xmlns:r="http://schemas.openxmlformats.org/officeDocument/2006/relationships">
+  <p:cSld>
+    <p:spTree>
+      <p:nvGrpSpPr>
+        <p:cNvPr id="1" name=""/>
+        <p:cNvGrpSpPr/>
+        <p:nvPr/>
+      </p:nvGrpSpPr>
+      <p:grpSpPr/>
+      <p:sp>
+        <p:nvSpPr>
+          <p:cNvPr id="2" name="Rectangle 1"/>
+          <p:cNvSpPr/>
+          <p:nvPr/>
+        </p:nvSpPr>
+        <p:spPr>
+          <a:xfrm>
+            <a:off x="0" y="0"/>
+            <a:ext cx="12191695" cy="6858000"/>
+          </a:xfrm>
+          <a:prstGeom prst="rect">
+            <a:avLst/>
+          </a:prstGeom>
+          <a:solidFill>
+            <a:srgbClr val="F7F7F5"/>
+          </a:solidFill>
+          <a:ln>
+            <a:noFill/>
+          </a:ln>
+          <a:effectLst/>
+        </p:spPr>
+        <p:style>
+          <a:lnRef idx="1">
+            <a:schemeClr val="accent1"/>
+          </a:lnRef>
+          <a:fillRef idx="3">
+            <a:schemeClr val="accent1"/>
+          </a:fillRef>
+          <a:effectRef idx="2">
+            <a:schemeClr val="accent1"/>
+          </a:effectRef>
+          <a:fontRef idx="minor">
+            <a:schemeClr val="lt1"/>
+          </a:fontRef>
+        </p:style>
+        <p:txBody>
+          <a:bodyPr rtlCol="0" anchor="ctr"/>
+          <a:lstStyle/>
+          <a:p/>
+        </p:txBody>
+      </p:sp>
+      <p:sp>
+        <p:nvSpPr>
+          <p:cNvPr id="3" name="TextBox 2"/>
+          <p:cNvSpPr txBox="1"/>
+          <p:nvPr/>
+        </p:nvSpPr>
+        <p:spPr>
+          <a:xfrm>
+            <a:off x="566928" y="6355080"/>
+            <a:ext cx="6400800" cy="219456"/>
+          </a:xfrm>
+          <a:prstGeom prst="rect">
+            <a:avLst/>
+          </a:prstGeom>
+          <a:noFill/>
+        </p:spPr>
+        <p:txBody>
+          <a:bodyPr wrap="square" lIns="0" rIns="0" tIns="0" bIns="0" anchor="t">
+            <a:spAutoFit/>
+          </a:bodyPr>
+          <a:lstStyle/>
+          <a:p>
+            <a:pPr algn="l">
+              <a:lnSpc>
+                <a:spcPct val="135000"/>
+              </a:lnSpc>
+            </a:pPr>
+            <a:r>
+              <a:rPr sz="1200" b="0" i="0">
+                <a:solidFill>
+                  <a:srgbClr val="6E7175"/>
+                </a:solidFill>
+                <a:latin typeface="Verdana"/>
+              </a:rPr>
+              <a:t>A3 · Prendre rendez-vous et aller à la pharmacie</a:t>
+            </a:r>
+          </a:p>
+        </p:txBody>
+      </p:sp>
+      <p:sp>
+        <p:nvSpPr>
+          <p:cNvPr id="4" name="TextBox 3"/>
+          <p:cNvSpPr txBox="1"/>
+          <p:nvPr/>
+        </p:nvSpPr>
+        <p:spPr>
+          <a:xfrm>
+            <a:off x="10710367" y="6355080"/>
+            <a:ext cx="914400" cy="219456"/>
+          </a:xfrm>
+          <a:prstGeom prst="rect">
+            <a:avLst/>
+          </a:prstGeom>
+          <a:noFill/>
+        </p:spPr>
+        <p:txBody>
+          <a:bodyPr wrap="square" lIns="0" rIns="0" tIns="0" bIns="0" anchor="t">
+            <a:spAutoFit/>
+          </a:bodyPr>
+          <a:lstStyle/>
+          <a:p>
+            <a:pPr algn="r">
+              <a:lnSpc>
+                <a:spcPct val="135000"/>
+              </a:lnSpc>
+            </a:pPr>
+            <a:r>
+              <a:rPr sz="1200" b="0" i="0">
+                <a:solidFill>
+                  <a:srgbClr val="6E7175"/>
+                </a:solidFill>
+                <a:latin typeface="Verdana"/>
+              </a:rPr>
+              <a:t>17</a:t>
+            </a:r>
+          </a:p>
+        </p:txBody>
+      </p:sp>
+      <p:sp>
+        <p:nvSpPr>
+          <p:cNvPr id="5" name="TextBox 4"/>
+          <p:cNvSpPr txBox="1"/>
+          <p:nvPr/>
+        </p:nvSpPr>
+        <p:spPr>
+          <a:xfrm>
+            <a:off x="566928" y="420624"/>
+            <a:ext cx="11057839" cy="237744"/>
+          </a:xfrm>
+          <a:prstGeom prst="rect">
+            <a:avLst/>
+          </a:prstGeom>
+          <a:noFill/>
+        </p:spPr>
+        <p:txBody>
+          <a:bodyPr wrap="square" lIns="0" rIns="0" tIns="0" bIns="0" anchor="t">
+            <a:spAutoFit/>
+          </a:bodyPr>
+          <a:lstStyle/>
+          <a:p>
+            <a:pPr algn="l">
+              <a:lnSpc>
+                <a:spcPct val="135000"/>
+              </a:lnSpc>
+            </a:pPr>
+            <a:r>
+              <a:rPr sz="1300" b="1" i="0" spc="156">
+                <a:solidFill>
+                  <a:srgbClr val="166534"/>
+                </a:solidFill>
+                <a:latin typeface="Verdana"/>
+              </a:rPr>
+              <a:t>CORRECTION</a:t>
+            </a:r>
+          </a:p>
+        </p:txBody>
+      </p:sp>
+      <p:sp>
+        <p:nvSpPr>
+          <p:cNvPr id="6" name="TextBox 5"/>
+          <p:cNvSpPr txBox="1"/>
+          <p:nvPr/>
+        </p:nvSpPr>
+        <p:spPr>
+          <a:xfrm>
+            <a:off x="566928" y="749808"/>
+            <a:ext cx="11057839" cy="877824"/>
+          </a:xfrm>
+          <a:prstGeom prst="rect">
+            <a:avLst/>
+          </a:prstGeom>
+          <a:noFill/>
+        </p:spPr>
+        <p:txBody>
+          <a:bodyPr wrap="square" lIns="0" rIns="0" tIns="0" bIns="0" anchor="t">
+            <a:spAutoFit/>
+          </a:bodyPr>
+          <a:lstStyle/>
+          <a:p>
+            <a:pPr algn="l">
+              <a:lnSpc>
+                <a:spcPct val="115000"/>
+              </a:lnSpc>
+            </a:pPr>
+            <a:r>
+              <a:rPr sz="3400" b="1" i="0">
+                <a:solidFill>
+                  <a:srgbClr val="17181A"/>
+                </a:solidFill>
+                <a:latin typeface="Verdana"/>
+              </a:rPr>
+              <a:t>Trois phrases à lire à voix haute</a:t>
+            </a:r>
+          </a:p>
+        </p:txBody>
+      </p:sp>
+      <p:sp>
+        <p:nvSpPr>
+          <p:cNvPr id="7" name="TextBox 6"/>
+          <p:cNvSpPr txBox="1"/>
+          <p:nvPr/>
+        </p:nvSpPr>
+        <p:spPr>
+          <a:xfrm>
+            <a:off x="566928" y="1645920"/>
+            <a:ext cx="11057839" cy="329184"/>
+          </a:xfrm>
+          <a:prstGeom prst="rect">
+            <a:avLst/>
+          </a:prstGeom>
+          <a:noFill/>
+        </p:spPr>
+        <p:txBody>
+          <a:bodyPr wrap="square" lIns="0" rIns="0" tIns="0" bIns="0" anchor="t">
+            <a:spAutoFit/>
+          </a:bodyPr>
+          <a:lstStyle/>
+          <a:p>
+            <a:pPr algn="l">
+              <a:lnSpc>
+                <a:spcPct val="135000"/>
+              </a:lnSpc>
+            </a:pPr>
+            <a:r>
+              <a:rPr sz="1800" b="0" i="0">
+                <a:solidFill>
+                  <a:srgbClr val="6E7175"/>
+                </a:solidFill>
+                <a:latin typeface="Verdana"/>
+              </a:rPr>
+              <a:t>Correction — on lit la réponse, on ne commente pas l'erreur.</a:t>
+            </a:r>
+          </a:p>
+        </p:txBody>
+      </p:sp>
+      <p:sp>
+        <p:nvSpPr>
+          <p:cNvPr id="8" name="Rounded Rectangle 7"/>
+          <p:cNvSpPr/>
+          <p:nvPr/>
+        </p:nvSpPr>
+        <p:spPr>
+          <a:xfrm>
+            <a:off x="566928" y="2139696"/>
+            <a:ext cx="11057839" cy="648716"/>
+          </a:xfrm>
+          <a:prstGeom prst="roundRect">
+            <a:avLst>
+              <a:gd name="adj" fmla="val 22552"/>
+            </a:avLst>
+          </a:prstGeom>
+          <a:solidFill>
+            <a:srgbClr val="E6F5EE"/>
+          </a:solidFill>
+          <a:ln w="12700">
+            <a:solidFill>
+              <a:srgbClr val="EAEAE8"/>
+            </a:solidFill>
+          </a:ln>
+          <a:effectLst/>
+        </p:spPr>
+        <p:style>
+          <a:lnRef idx="1">
+            <a:schemeClr val="accent1"/>
+          </a:lnRef>
+          <a:fillRef idx="3">
+            <a:schemeClr val="accent1"/>
+          </a:fillRef>
+          <a:effectRef idx="2">
+            <a:schemeClr val="accent1"/>
+          </a:effectRef>
+          <a:fontRef idx="minor">
+            <a:schemeClr val="lt1"/>
+          </a:fontRef>
+        </p:style>
+        <p:txBody>
+          <a:bodyPr rtlCol="0" anchor="ctr"/>
+          <a:lstStyle/>
+          <a:p/>
+        </p:txBody>
+      </p:sp>
+      <p:sp>
+        <p:nvSpPr>
+          <p:cNvPr id="9" name="Rounded Rectangle 8"/>
+          <p:cNvSpPr/>
+          <p:nvPr/>
+        </p:nvSpPr>
+        <p:spPr>
+          <a:xfrm>
+            <a:off x="841247" y="2281174"/>
+            <a:ext cx="365760" cy="365760"/>
+          </a:xfrm>
+          <a:prstGeom prst="roundRect">
+            <a:avLst>
+              <a:gd name="adj" fmla="val 32500"/>
+            </a:avLst>
+          </a:prstGeom>
+          <a:solidFill>
+            <a:srgbClr val="E3F1E7"/>
+          </a:solidFill>
+          <a:ln>
+            <a:noFill/>
+          </a:ln>
+          <a:effectLst/>
+        </p:spPr>
+        <p:style>
+          <a:lnRef idx="1">
+            <a:schemeClr val="accent1"/>
+          </a:lnRef>
+          <a:fillRef idx="3">
+            <a:schemeClr val="accent1"/>
+          </a:fillRef>
+          <a:effectRef idx="2">
+            <a:schemeClr val="accent1"/>
+          </a:effectRef>
+          <a:fontRef idx="minor">
+            <a:schemeClr val="lt1"/>
+          </a:fontRef>
+        </p:style>
+        <p:txBody>
+          <a:bodyPr rtlCol="0" anchor="ctr"/>
+          <a:lstStyle/>
+          <a:p/>
+        </p:txBody>
+      </p:sp>
+      <p:sp>
+        <p:nvSpPr>
+          <p:cNvPr id="10" name="TextBox 9"/>
+          <p:cNvSpPr txBox="1"/>
+          <p:nvPr/>
+        </p:nvSpPr>
+        <p:spPr>
+          <a:xfrm>
+            <a:off x="841247" y="2345182"/>
+            <a:ext cx="365760" cy="256032"/>
+          </a:xfrm>
+          <a:prstGeom prst="rect">
+            <a:avLst/>
+          </a:prstGeom>
+          <a:noFill/>
+        </p:spPr>
+        <p:txBody>
+          <a:bodyPr wrap="square" lIns="0" rIns="0" tIns="0" bIns="0" anchor="t">
+            <a:spAutoFit/>
+          </a:bodyPr>
+          <a:lstStyle/>
+          <a:p>
+            <a:pPr algn="ctr">
+              <a:lnSpc>
+                <a:spcPct val="135000"/>
+              </a:lnSpc>
+            </a:pPr>
+            <a:r>
+              <a:rPr sz="1500" b="1" i="0">
+                <a:solidFill>
+                  <a:srgbClr val="166534"/>
+                </a:solidFill>
+                <a:latin typeface="Verdana"/>
+              </a:rPr>
+              <a:t>1</a:t>
+            </a:r>
+          </a:p>
+        </p:txBody>
+      </p:sp>
+      <p:sp>
+        <p:nvSpPr>
+          <p:cNvPr id="11" name="TextBox 10"/>
+          <p:cNvSpPr txBox="1"/>
+          <p:nvPr/>
+        </p:nvSpPr>
+        <p:spPr>
+          <a:xfrm>
+            <a:off x="1344168" y="2295144"/>
+            <a:ext cx="10097719" cy="374396"/>
+          </a:xfrm>
+          <a:prstGeom prst="rect">
+            <a:avLst/>
+          </a:prstGeom>
+          <a:noFill/>
+        </p:spPr>
+        <p:txBody>
+          <a:bodyPr wrap="square" lIns="0" rIns="0" tIns="0" bIns="0" anchor="t">
+            <a:spAutoFit/>
+          </a:bodyPr>
+          <a:lstStyle/>
+          <a:p>
+            <a:pPr algn="l">
+              <a:lnSpc>
+                <a:spcPct val="140000"/>
+              </a:lnSpc>
+            </a:pPr>
+            <a:r>
+              <a:rPr sz="1900" b="0" i="0">
+                <a:solidFill>
+                  <a:srgbClr val="3A3D40"/>
+                </a:solidFill>
+                <a:latin typeface="Verdana"/>
+              </a:rPr>
+              <a:t>Le pharmacien explique le traitement.   </a:t>
+            </a:r>
+            <a:r>
+              <a:rPr sz="1900" b="1" i="0">
+                <a:solidFill>
+                  <a:srgbClr val="07734A"/>
+                </a:solidFill>
+                <a:latin typeface="Verdana"/>
+              </a:rPr>
+              <a:t>» in · an</a:t>
+            </a:r>
+          </a:p>
+        </p:txBody>
+      </p:sp>
+      <p:sp>
+        <p:nvSpPr>
+          <p:cNvPr id="12" name="Rounded Rectangle 11"/>
+          <p:cNvSpPr/>
+          <p:nvPr/>
+        </p:nvSpPr>
+        <p:spPr>
+          <a:xfrm>
+            <a:off x="566928" y="2916428"/>
+            <a:ext cx="11057839" cy="648716"/>
+          </a:xfrm>
+          <a:prstGeom prst="roundRect">
+            <a:avLst>
+              <a:gd name="adj" fmla="val 22552"/>
+            </a:avLst>
+          </a:prstGeom>
+          <a:solidFill>
+            <a:srgbClr val="E6F5EE"/>
+          </a:solidFill>
+          <a:ln w="12700">
+            <a:solidFill>
+              <a:srgbClr val="EAEAE8"/>
+            </a:solidFill>
+          </a:ln>
+          <a:effectLst/>
+        </p:spPr>
+        <p:style>
+          <a:lnRef idx="1">
+            <a:schemeClr val="accent1"/>
+          </a:lnRef>
+          <a:fillRef idx="3">
+            <a:schemeClr val="accent1"/>
+          </a:fillRef>
+          <a:effectRef idx="2">
+            <a:schemeClr val="accent1"/>
+          </a:effectRef>
+          <a:fontRef idx="minor">
+            <a:schemeClr val="lt1"/>
+          </a:fontRef>
+        </p:style>
+        <p:txBody>
+          <a:bodyPr rtlCol="0" anchor="ctr"/>
+          <a:lstStyle/>
+          <a:p/>
+        </p:txBody>
+      </p:sp>
+      <p:sp>
+        <p:nvSpPr>
+          <p:cNvPr id="13" name="Rounded Rectangle 12"/>
+          <p:cNvSpPr/>
+          <p:nvPr/>
+        </p:nvSpPr>
+        <p:spPr>
+          <a:xfrm>
+            <a:off x="841247" y="3057905"/>
+            <a:ext cx="365760" cy="365760"/>
+          </a:xfrm>
+          <a:prstGeom prst="roundRect">
+            <a:avLst>
+              <a:gd name="adj" fmla="val 32500"/>
+            </a:avLst>
+          </a:prstGeom>
+          <a:solidFill>
+            <a:srgbClr val="E3F1E7"/>
+          </a:solidFill>
+          <a:ln>
+            <a:noFill/>
+          </a:ln>
+          <a:effectLst/>
+        </p:spPr>
+        <p:style>
+          <a:lnRef idx="1">
+            <a:schemeClr val="accent1"/>
+          </a:lnRef>
+          <a:fillRef idx="3">
+            <a:schemeClr val="accent1"/>
+          </a:fillRef>
+          <a:effectRef idx="2">
+            <a:schemeClr val="accent1"/>
+          </a:effectRef>
+          <a:fontRef idx="minor">
+            <a:schemeClr val="lt1"/>
+          </a:fontRef>
+        </p:style>
+        <p:txBody>
+          <a:bodyPr rtlCol="0" anchor="ctr"/>
+          <a:lstStyle/>
+          <a:p/>
+        </p:txBody>
+      </p:sp>
+      <p:sp>
+        <p:nvSpPr>
+          <p:cNvPr id="14" name="TextBox 13"/>
+          <p:cNvSpPr txBox="1"/>
+          <p:nvPr/>
+        </p:nvSpPr>
+        <p:spPr>
+          <a:xfrm>
+            <a:off x="841247" y="3121913"/>
+            <a:ext cx="365760" cy="256032"/>
+          </a:xfrm>
+          <a:prstGeom prst="rect">
+            <a:avLst/>
+          </a:prstGeom>
+          <a:noFill/>
+        </p:spPr>
+        <p:txBody>
+          <a:bodyPr wrap="square" lIns="0" rIns="0" tIns="0" bIns="0" anchor="t">
+            <a:spAutoFit/>
+          </a:bodyPr>
+          <a:lstStyle/>
+          <a:p>
+            <a:pPr algn="ctr">
+              <a:lnSpc>
+                <a:spcPct val="135000"/>
+              </a:lnSpc>
+            </a:pPr>
+            <a:r>
+              <a:rPr sz="1500" b="1" i="0">
+                <a:solidFill>
+                  <a:srgbClr val="166534"/>
+                </a:solidFill>
+                <a:latin typeface="Verdana"/>
+              </a:rPr>
+              <a:t>2</a:t>
+            </a:r>
+          </a:p>
+        </p:txBody>
+      </p:sp>
+      <p:sp>
+        <p:nvSpPr>
+          <p:cNvPr id="15" name="TextBox 14"/>
+          <p:cNvSpPr txBox="1"/>
+          <p:nvPr/>
+        </p:nvSpPr>
+        <p:spPr>
+          <a:xfrm>
+            <a:off x="1344168" y="3071876"/>
+            <a:ext cx="10097719" cy="374396"/>
+          </a:xfrm>
+          <a:prstGeom prst="rect">
+            <a:avLst/>
+          </a:prstGeom>
+          <a:noFill/>
+        </p:spPr>
+        <p:txBody>
+          <a:bodyPr wrap="square" lIns="0" rIns="0" tIns="0" bIns="0" anchor="t">
+            <a:spAutoFit/>
+          </a:bodyPr>
+          <a:lstStyle/>
+          <a:p>
+            <a:pPr algn="l">
+              <a:lnSpc>
+                <a:spcPct val="140000"/>
+              </a:lnSpc>
+            </a:pPr>
+            <a:r>
+              <a:rPr sz="1900" b="0" i="0">
+                <a:solidFill>
+                  <a:srgbClr val="3A3D40"/>
+                </a:solidFill>
+                <a:latin typeface="Verdana"/>
+              </a:rPr>
+              <a:t>Un comprimé le matin, pendant sept jours.   </a:t>
+            </a:r>
+            <a:r>
+              <a:rPr sz="1900" b="1" i="0">
+                <a:solidFill>
+                  <a:srgbClr val="07734A"/>
+                </a:solidFill>
+                <a:latin typeface="Verdana"/>
+              </a:rPr>
+              <a:t>» in · an</a:t>
+            </a:r>
+          </a:p>
+        </p:txBody>
+      </p:sp>
+      <p:sp>
+        <p:nvSpPr>
+          <p:cNvPr id="16" name="Rounded Rectangle 15"/>
+          <p:cNvSpPr/>
+          <p:nvPr/>
+        </p:nvSpPr>
+        <p:spPr>
+          <a:xfrm>
+            <a:off x="566928" y="3693160"/>
+            <a:ext cx="11057839" cy="648716"/>
+          </a:xfrm>
+          <a:prstGeom prst="roundRect">
+            <a:avLst>
+              <a:gd name="adj" fmla="val 22552"/>
+            </a:avLst>
+          </a:prstGeom>
+          <a:solidFill>
+            <a:srgbClr val="E6F5EE"/>
+          </a:solidFill>
+          <a:ln w="12700">
+            <a:solidFill>
+              <a:srgbClr val="EAEAE8"/>
+            </a:solidFill>
+          </a:ln>
+          <a:effectLst/>
+        </p:spPr>
+        <p:style>
+          <a:lnRef idx="1">
+            <a:schemeClr val="accent1"/>
+          </a:lnRef>
+          <a:fillRef idx="3">
+            <a:schemeClr val="accent1"/>
+          </a:fillRef>
+          <a:effectRef idx="2">
+            <a:schemeClr val="accent1"/>
+          </a:effectRef>
+          <a:fontRef idx="minor">
+            <a:schemeClr val="lt1"/>
+          </a:fontRef>
+        </p:style>
+        <p:txBody>
+          <a:bodyPr rtlCol="0" anchor="ctr"/>
+          <a:lstStyle/>
+          <a:p/>
+        </p:txBody>
+      </p:sp>
+      <p:sp>
+        <p:nvSpPr>
+          <p:cNvPr id="17" name="Rounded Rectangle 16"/>
+          <p:cNvSpPr/>
+          <p:nvPr/>
+        </p:nvSpPr>
+        <p:spPr>
+          <a:xfrm>
+            <a:off x="841247" y="3834638"/>
+            <a:ext cx="365760" cy="365760"/>
+          </a:xfrm>
+          <a:prstGeom prst="roundRect">
+            <a:avLst>
+              <a:gd name="adj" fmla="val 32500"/>
+            </a:avLst>
+          </a:prstGeom>
+          <a:solidFill>
+            <a:srgbClr val="E3F1E7"/>
+          </a:solidFill>
+          <a:ln>
+            <a:noFill/>
+          </a:ln>
+          <a:effectLst/>
+        </p:spPr>
+        <p:style>
+          <a:lnRef idx="1">
+            <a:schemeClr val="accent1"/>
+          </a:lnRef>
+          <a:fillRef idx="3">
+            <a:schemeClr val="accent1"/>
+          </a:fillRef>
+          <a:effectRef idx="2">
+            <a:schemeClr val="accent1"/>
+          </a:effectRef>
+          <a:fontRef idx="minor">
+            <a:schemeClr val="lt1"/>
+          </a:fontRef>
+        </p:style>
+        <p:txBody>
+          <a:bodyPr rtlCol="0" anchor="ctr"/>
+          <a:lstStyle/>
+          <a:p/>
+        </p:txBody>
+      </p:sp>
+      <p:sp>
+        <p:nvSpPr>
+          <p:cNvPr id="18" name="TextBox 17"/>
+          <p:cNvSpPr txBox="1"/>
+          <p:nvPr/>
+        </p:nvSpPr>
+        <p:spPr>
+          <a:xfrm>
+            <a:off x="841247" y="3898646"/>
+            <a:ext cx="365760" cy="256032"/>
+          </a:xfrm>
+          <a:prstGeom prst="rect">
+            <a:avLst/>
+          </a:prstGeom>
+          <a:noFill/>
+        </p:spPr>
+        <p:txBody>
+          <a:bodyPr wrap="square" lIns="0" rIns="0" tIns="0" bIns="0" anchor="t">
+            <a:spAutoFit/>
+          </a:bodyPr>
+          <a:lstStyle/>
+          <a:p>
+            <a:pPr algn="ctr">
+              <a:lnSpc>
+                <a:spcPct val="135000"/>
+              </a:lnSpc>
+            </a:pPr>
+            <a:r>
+              <a:rPr sz="1500" b="1" i="0">
+                <a:solidFill>
+                  <a:srgbClr val="166534"/>
+                </a:solidFill>
+                <a:latin typeface="Verdana"/>
+              </a:rPr>
+              <a:t>3</a:t>
+            </a:r>
+          </a:p>
+        </p:txBody>
+      </p:sp>
+      <p:sp>
+        <p:nvSpPr>
+          <p:cNvPr id="19" name="TextBox 18"/>
+          <p:cNvSpPr txBox="1"/>
+          <p:nvPr/>
+        </p:nvSpPr>
+        <p:spPr>
+          <a:xfrm>
+            <a:off x="1344168" y="3848608"/>
+            <a:ext cx="10097719" cy="374396"/>
+          </a:xfrm>
+          <a:prstGeom prst="rect">
+            <a:avLst/>
+          </a:prstGeom>
+          <a:noFill/>
+        </p:spPr>
+        <p:txBody>
+          <a:bodyPr wrap="square" lIns="0" rIns="0" tIns="0" bIns="0" anchor="t">
+            <a:spAutoFit/>
+          </a:bodyPr>
+          <a:lstStyle/>
+          <a:p>
+            <a:pPr algn="l">
+              <a:lnSpc>
+                <a:spcPct val="140000"/>
+              </a:lnSpc>
+            </a:pPr>
+            <a:r>
+              <a:rPr sz="1900" b="0" i="0">
+                <a:solidFill>
+                  <a:srgbClr val="3A3D40"/>
+                </a:solidFill>
+                <a:latin typeface="Verdana"/>
+              </a:rPr>
+              <a:t>La salle d'attente est pleine, mais je me sens bien.   </a:t>
+            </a:r>
+            <a:r>
+              <a:rPr sz="1900" b="1" i="0">
+                <a:solidFill>
+                  <a:srgbClr val="07734A"/>
+                </a:solidFill>
+                <a:latin typeface="Verdana"/>
+              </a:rPr>
+              <a:t>» an · in</a:t>
+            </a:r>
+          </a:p>
+        </p:txBody>
+      </p:sp>
+    </p:spTree>
+  </p:cSld>
+  <p:clrMapOvr>
+    <a:masterClrMapping/>
+  </p:clrMapOvr>
+</p:sld>
+</file>
+
+<file path=ppt/slides/slide18.xml><?xml version="1.0" encoding="utf-8"?>
+<p:sld xmlns:a="http://schemas.openxmlformats.org/drawingml/2006/main" xmlns:p="http://schemas.openxmlformats.org/presentationml/2006/main" xmlns:r="http://schemas.openxmlformats.org/officeDocument/2006/relationships">
+  <p:cSld>
+    <p:spTree>
+      <p:nvGrpSpPr>
+        <p:cNvPr id="1" name=""/>
+        <p:cNvGrpSpPr/>
+        <p:nvPr/>
+      </p:nvGrpSpPr>
+      <p:grpSpPr/>
+      <p:sp>
+        <p:nvSpPr>
+          <p:cNvPr id="2" name="Rectangle 1"/>
+          <p:cNvSpPr/>
+          <p:nvPr/>
+        </p:nvSpPr>
+        <p:spPr>
+          <a:xfrm>
+            <a:off x="0" y="0"/>
+            <a:ext cx="12191695" cy="6858000"/>
+          </a:xfrm>
+          <a:prstGeom prst="rect">
+            <a:avLst/>
+          </a:prstGeom>
+          <a:solidFill>
+            <a:srgbClr val="F7F7F5"/>
+          </a:solidFill>
+          <a:ln>
+            <a:noFill/>
+          </a:ln>
+          <a:effectLst/>
+        </p:spPr>
+        <p:style>
+          <a:lnRef idx="1">
+            <a:schemeClr val="accent1"/>
+          </a:lnRef>
+          <a:fillRef idx="3">
+            <a:schemeClr val="accent1"/>
+          </a:fillRef>
+          <a:effectRef idx="2">
+            <a:schemeClr val="accent1"/>
+          </a:effectRef>
+          <a:fontRef idx="minor">
+            <a:schemeClr val="lt1"/>
+          </a:fontRef>
+        </p:style>
+        <p:txBody>
+          <a:bodyPr rtlCol="0" anchor="ctr"/>
+          <a:lstStyle/>
+          <a:p/>
+        </p:txBody>
+      </p:sp>
+      <p:sp>
+        <p:nvSpPr>
+          <p:cNvPr id="3" name="TextBox 2"/>
+          <p:cNvSpPr txBox="1"/>
+          <p:nvPr/>
+        </p:nvSpPr>
+        <p:spPr>
+          <a:xfrm>
+            <a:off x="566928" y="6355080"/>
+            <a:ext cx="6400800" cy="219456"/>
+          </a:xfrm>
+          <a:prstGeom prst="rect">
+            <a:avLst/>
+          </a:prstGeom>
+          <a:noFill/>
+        </p:spPr>
+        <p:txBody>
+          <a:bodyPr wrap="square" lIns="0" rIns="0" tIns="0" bIns="0" anchor="t">
+            <a:spAutoFit/>
+          </a:bodyPr>
+          <a:lstStyle/>
+          <a:p>
+            <a:pPr algn="l">
+              <a:lnSpc>
+                <a:spcPct val="135000"/>
+              </a:lnSpc>
+            </a:pPr>
+            <a:r>
+              <a:rPr sz="1200" b="0" i="0">
+                <a:solidFill>
+                  <a:srgbClr val="6E7175"/>
+                </a:solidFill>
+                <a:latin typeface="Verdana"/>
+              </a:rPr>
+              <a:t>A3 · Prendre rendez-vous et aller à la pharmacie</a:t>
+            </a:r>
+          </a:p>
+        </p:txBody>
+      </p:sp>
+      <p:sp>
+        <p:nvSpPr>
+          <p:cNvPr id="4" name="TextBox 3"/>
+          <p:cNvSpPr txBox="1"/>
+          <p:nvPr/>
+        </p:nvSpPr>
+        <p:spPr>
+          <a:xfrm>
+            <a:off x="10710367" y="6355080"/>
+            <a:ext cx="914400" cy="219456"/>
+          </a:xfrm>
+          <a:prstGeom prst="rect">
+            <a:avLst/>
+          </a:prstGeom>
+          <a:noFill/>
+        </p:spPr>
+        <p:txBody>
+          <a:bodyPr wrap="square" lIns="0" rIns="0" tIns="0" bIns="0" anchor="t">
+            <a:spAutoFit/>
+          </a:bodyPr>
+          <a:lstStyle/>
+          <a:p>
+            <a:pPr algn="r">
+              <a:lnSpc>
+                <a:spcPct val="135000"/>
+              </a:lnSpc>
+            </a:pPr>
+            <a:r>
+              <a:rPr sz="1200" b="0" i="0">
+                <a:solidFill>
+                  <a:srgbClr val="6E7175"/>
+                </a:solidFill>
+                <a:latin typeface="Verdana"/>
+              </a:rPr>
+              <a:t>18</a:t>
+            </a:r>
+          </a:p>
+        </p:txBody>
+      </p:sp>
+      <p:sp>
+        <p:nvSpPr>
           <p:cNvPr id="5" name="Rectangle 4"/>
           <p:cNvSpPr/>
           <p:nvPr/>
@@ -6735,7 +13683,175 @@
                 </a:solidFill>
                 <a:latin typeface="Verdana"/>
               </a:rPr>
-              <a:t>reconnaître ces mots à l'oral, dites vite.</a:t>
+              <a:t>reconnaître ces mots à l'oral, dites vite ;</a:t>
+            </a:r>
+          </a:p>
+        </p:txBody>
+      </p:sp>
+      <p:sp>
+        <p:nvSpPr>
+          <p:cNvPr id="23" name="Rounded Rectangle 22"/>
+          <p:cNvSpPr/>
+          <p:nvPr/>
+        </p:nvSpPr>
+        <p:spPr>
+          <a:xfrm>
+            <a:off x="566928" y="5308600"/>
+            <a:ext cx="11057839" cy="757936"/>
+          </a:xfrm>
+          <a:prstGeom prst="roundRect">
+            <a:avLst>
+              <a:gd name="adj" fmla="val 19302"/>
+            </a:avLst>
+          </a:prstGeom>
+          <a:solidFill>
+            <a:srgbClr val="FFFFFF"/>
+          </a:solidFill>
+          <a:ln w="12700">
+            <a:solidFill>
+              <a:srgbClr val="EAEAE8"/>
+            </a:solidFill>
+          </a:ln>
+          <a:effectLst/>
+        </p:spPr>
+        <p:style>
+          <a:lnRef idx="1">
+            <a:schemeClr val="accent1"/>
+          </a:lnRef>
+          <a:fillRef idx="3">
+            <a:schemeClr val="accent1"/>
+          </a:fillRef>
+          <a:effectRef idx="2">
+            <a:schemeClr val="accent1"/>
+          </a:effectRef>
+          <a:fontRef idx="minor">
+            <a:schemeClr val="lt1"/>
+          </a:fontRef>
+        </p:style>
+        <p:txBody>
+          <a:bodyPr rtlCol="0" anchor="ctr"/>
+          <a:lstStyle/>
+          <a:p/>
+        </p:txBody>
+      </p:sp>
+      <p:sp>
+        <p:nvSpPr>
+          <p:cNvPr id="24" name="Rounded Rectangle 23"/>
+          <p:cNvSpPr/>
+          <p:nvPr/>
+        </p:nvSpPr>
+        <p:spPr>
+          <a:xfrm>
+            <a:off x="804672" y="5486400"/>
+            <a:ext cx="402336" cy="402336"/>
+          </a:xfrm>
+          <a:prstGeom prst="roundRect">
+            <a:avLst>
+              <a:gd name="adj" fmla="val 31818"/>
+            </a:avLst>
+          </a:prstGeom>
+          <a:solidFill>
+            <a:srgbClr val="E3F1E7"/>
+          </a:solidFill>
+          <a:ln>
+            <a:noFill/>
+          </a:ln>
+          <a:effectLst/>
+        </p:spPr>
+        <p:style>
+          <a:lnRef idx="1">
+            <a:schemeClr val="accent1"/>
+          </a:lnRef>
+          <a:fillRef idx="3">
+            <a:schemeClr val="accent1"/>
+          </a:fillRef>
+          <a:effectRef idx="2">
+            <a:schemeClr val="accent1"/>
+          </a:effectRef>
+          <a:fontRef idx="minor">
+            <a:schemeClr val="lt1"/>
+          </a:fontRef>
+        </p:style>
+        <p:txBody>
+          <a:bodyPr rtlCol="0" anchor="ctr"/>
+          <a:lstStyle/>
+          <a:p/>
+        </p:txBody>
+      </p:sp>
+      <p:sp>
+        <p:nvSpPr>
+          <p:cNvPr id="25" name="TextBox 24"/>
+          <p:cNvSpPr txBox="1"/>
+          <p:nvPr/>
+        </p:nvSpPr>
+        <p:spPr>
+          <a:xfrm>
+            <a:off x="804672" y="5568696"/>
+            <a:ext cx="402336" cy="274320"/>
+          </a:xfrm>
+          <a:prstGeom prst="rect">
+            <a:avLst/>
+          </a:prstGeom>
+          <a:noFill/>
+        </p:spPr>
+        <p:txBody>
+          <a:bodyPr wrap="square" lIns="0" rIns="0" tIns="0" bIns="0" anchor="t">
+            <a:spAutoFit/>
+          </a:bodyPr>
+          <a:lstStyle/>
+          <a:p>
+            <a:pPr algn="ctr">
+              <a:lnSpc>
+                <a:spcPct val="135000"/>
+              </a:lnSpc>
+            </a:pPr>
+            <a:r>
+              <a:rPr sz="1500" b="1" i="0">
+                <a:solidFill>
+                  <a:srgbClr val="166534"/>
+                </a:solidFill>
+                <a:latin typeface="Verdana"/>
+              </a:rPr>
+              <a:t>5</a:t>
+            </a:r>
+          </a:p>
+        </p:txBody>
+      </p:sp>
+      <p:sp>
+        <p:nvSpPr>
+          <p:cNvPr id="26" name="TextBox 25"/>
+          <p:cNvSpPr txBox="1"/>
+          <p:nvPr/>
+        </p:nvSpPr>
+        <p:spPr>
+          <a:xfrm>
+            <a:off x="1408176" y="5509768"/>
+            <a:ext cx="9549079" cy="392176"/>
+          </a:xfrm>
+          <a:prstGeom prst="rect">
+            <a:avLst/>
+          </a:prstGeom>
+          <a:noFill/>
+        </p:spPr>
+        <p:txBody>
+          <a:bodyPr wrap="square" lIns="0" rIns="0" tIns="0" bIns="0" anchor="t">
+            <a:spAutoFit/>
+          </a:bodyPr>
+          <a:lstStyle/>
+          <a:p>
+            <a:pPr algn="l">
+              <a:lnSpc>
+                <a:spcPct val="140000"/>
+              </a:lnSpc>
+            </a:pPr>
+            <a:r>
+              <a:rPr sz="2000" b="0" i="0">
+                <a:solidFill>
+                  <a:srgbClr val="3A3D40"/>
+                </a:solidFill>
+                <a:latin typeface="Verdana"/>
+              </a:rPr>
+              <a:t>distinguer le son « an » du son « in » dans les mots du rendez-vous.</a:t>
             </a:r>
           </a:p>
         </p:txBody>
@@ -9535,7 +16651,7 @@
                 </a:solidFill>
                 <a:latin typeface="Verdana"/>
               </a:rPr>
-              <a:t>PRATIQUE · 1 DE 3</a:t>
+              <a:t>PRATIQUE · 1 DE 5</a:t>
             </a:r>
           </a:p>
         </p:txBody>
@@ -12115,7 +19231,7 @@
                 </a:solidFill>
                 <a:latin typeface="Verdana"/>
               </a:rPr>
-              <a:t>PRATIQUE · 2 DE 3</a:t>
+              <a:t>PRATIQUE · 2 DE 5</a:t>
             </a:r>
           </a:p>
         </p:txBody>

--- a/assets/powerpoints/module-sante/A3-les-mots-de-la-sante.pptx
+++ b/assets/powerpoints/module-sante/A3-les-mots-de-la-sante.pptx
@@ -4787,7 +4787,7 @@
             <a:r>
               <a:rPr sz="1300" b="1" i="0" spc="156">
                 <a:solidFill>
-                  <a:srgbClr val="166534"/>
+                  <a:srgbClr val="A5335F"/>
                 </a:solidFill>
                 <a:latin typeface="Verdana"/>
               </a:rPr>
@@ -5127,7 +5127,7 @@
             <a:r>
               <a:rPr sz="1300" b="1" i="0" spc="156">
                 <a:solidFill>
-                  <a:srgbClr val="166534"/>
+                  <a:srgbClr val="A5335F"/>
                 </a:solidFill>
                 <a:latin typeface="Verdana"/>
               </a:rPr>
@@ -5277,7 +5277,7 @@
             </a:avLst>
           </a:prstGeom>
           <a:solidFill>
-            <a:srgbClr val="E3F1E7"/>
+            <a:srgbClr val="FCE9F0"/>
           </a:solidFill>
           <a:ln>
             <a:noFill/>
@@ -5334,7 +5334,7 @@
             <a:r>
               <a:rPr sz="1500" b="1" i="0">
                 <a:solidFill>
-                  <a:srgbClr val="166534"/>
+                  <a:srgbClr val="A5335F"/>
                 </a:solidFill>
                 <a:latin typeface="Verdana"/>
               </a:rPr>
@@ -5445,7 +5445,7 @@
             </a:avLst>
           </a:prstGeom>
           <a:solidFill>
-            <a:srgbClr val="E3F1E7"/>
+            <a:srgbClr val="FCE9F0"/>
           </a:solidFill>
           <a:ln>
             <a:noFill/>
@@ -5502,7 +5502,7 @@
             <a:r>
               <a:rPr sz="1500" b="1" i="0">
                 <a:solidFill>
-                  <a:srgbClr val="166534"/>
+                  <a:srgbClr val="A5335F"/>
                 </a:solidFill>
                 <a:latin typeface="Verdana"/>
               </a:rPr>
@@ -5613,7 +5613,7 @@
             </a:avLst>
           </a:prstGeom>
           <a:solidFill>
-            <a:srgbClr val="E3F1E7"/>
+            <a:srgbClr val="FCE9F0"/>
           </a:solidFill>
           <a:ln>
             <a:noFill/>
@@ -5670,7 +5670,7 @@
             <a:r>
               <a:rPr sz="1500" b="1" i="0">
                 <a:solidFill>
-                  <a:srgbClr val="166534"/>
+                  <a:srgbClr val="A5335F"/>
                 </a:solidFill>
                 <a:latin typeface="Verdana"/>
               </a:rPr>
@@ -5781,7 +5781,7 @@
             </a:avLst>
           </a:prstGeom>
           <a:solidFill>
-            <a:srgbClr val="E3F1E7"/>
+            <a:srgbClr val="FCE9F0"/>
           </a:solidFill>
           <a:ln>
             <a:noFill/>
@@ -5838,7 +5838,7 @@
             <a:r>
               <a:rPr sz="1500" b="1" i="0">
                 <a:solidFill>
-                  <a:srgbClr val="166534"/>
+                  <a:srgbClr val="A5335F"/>
                 </a:solidFill>
                 <a:latin typeface="Verdana"/>
               </a:rPr>
@@ -6054,7 +6054,7 @@
             <a:r>
               <a:rPr sz="1300" b="1" i="0" spc="156">
                 <a:solidFill>
-                  <a:srgbClr val="166534"/>
+                  <a:srgbClr val="A5335F"/>
                 </a:solidFill>
                 <a:latin typeface="Verdana"/>
               </a:rPr>
@@ -6080,7 +6080,7 @@
             </a:avLst>
           </a:prstGeom>
           <a:solidFill>
-            <a:srgbClr val="E3F1E7"/>
+            <a:srgbClr val="FCE9F0"/>
           </a:solidFill>
           <a:ln w="12700">
             <a:solidFill>
@@ -6401,7 +6401,7 @@
             <a:r>
               <a:rPr sz="1300" b="1" i="0" spc="156">
                 <a:solidFill>
-                  <a:srgbClr val="166534"/>
+                  <a:srgbClr val="A5335F"/>
                 </a:solidFill>
                 <a:latin typeface="Verdana"/>
               </a:rPr>
@@ -6642,7 +6642,7 @@
             <a:r>
               <a:rPr sz="1800" b="1" i="0">
                 <a:solidFill>
-                  <a:srgbClr val="166534"/>
+                  <a:srgbClr val="A5335F"/>
                 </a:solidFill>
                 <a:latin typeface="Verdana"/>
               </a:rPr>
@@ -6801,7 +6801,7 @@
             <a:r>
               <a:rPr sz="1800" b="1" i="0">
                 <a:solidFill>
-                  <a:srgbClr val="166534"/>
+                  <a:srgbClr val="A5335F"/>
                 </a:solidFill>
                 <a:latin typeface="Verdana"/>
               </a:rPr>
@@ -7141,7 +7141,7 @@
             <a:r>
               <a:rPr sz="1300" b="1" i="0" spc="156">
                 <a:solidFill>
-                  <a:srgbClr val="166534"/>
+                  <a:srgbClr val="A5335F"/>
                 </a:solidFill>
                 <a:latin typeface="Verdana"/>
               </a:rPr>
@@ -7690,7 +7690,7 @@
             <a:r>
               <a:rPr sz="1300" b="1" i="0" spc="156">
                 <a:solidFill>
-                  <a:srgbClr val="166534"/>
+                  <a:srgbClr val="A5335F"/>
                 </a:solidFill>
                 <a:latin typeface="Verdana"/>
               </a:rPr>
@@ -7840,7 +7840,7 @@
             </a:avLst>
           </a:prstGeom>
           <a:solidFill>
-            <a:srgbClr val="E3F1E7"/>
+            <a:srgbClr val="FCE9F0"/>
           </a:solidFill>
           <a:ln>
             <a:noFill/>
@@ -7897,7 +7897,7 @@
             <a:r>
               <a:rPr sz="1500" b="1" i="0">
                 <a:solidFill>
-                  <a:srgbClr val="166534"/>
+                  <a:srgbClr val="A5335F"/>
                 </a:solidFill>
                 <a:latin typeface="Verdana"/>
               </a:rPr>
@@ -8008,7 +8008,7 @@
             </a:avLst>
           </a:prstGeom>
           <a:solidFill>
-            <a:srgbClr val="E3F1E7"/>
+            <a:srgbClr val="FCE9F0"/>
           </a:solidFill>
           <a:ln>
             <a:noFill/>
@@ -8065,7 +8065,7 @@
             <a:r>
               <a:rPr sz="1500" b="1" i="0">
                 <a:solidFill>
-                  <a:srgbClr val="166534"/>
+                  <a:srgbClr val="A5335F"/>
                 </a:solidFill>
                 <a:latin typeface="Verdana"/>
               </a:rPr>
@@ -8176,7 +8176,7 @@
             </a:avLst>
           </a:prstGeom>
           <a:solidFill>
-            <a:srgbClr val="E3F1E7"/>
+            <a:srgbClr val="FCE9F0"/>
           </a:solidFill>
           <a:ln>
             <a:noFill/>
@@ -8233,7 +8233,7 @@
             <a:r>
               <a:rPr sz="1500" b="1" i="0">
                 <a:solidFill>
-                  <a:srgbClr val="166534"/>
+                  <a:srgbClr val="A5335F"/>
                 </a:solidFill>
                 <a:latin typeface="Verdana"/>
               </a:rPr>
@@ -8344,7 +8344,7 @@
             </a:avLst>
           </a:prstGeom>
           <a:solidFill>
-            <a:srgbClr val="E3F1E7"/>
+            <a:srgbClr val="FCE9F0"/>
           </a:solidFill>
           <a:ln>
             <a:noFill/>
@@ -8401,7 +8401,7 @@
             <a:r>
               <a:rPr sz="1500" b="1" i="0">
                 <a:solidFill>
-                  <a:srgbClr val="166534"/>
+                  <a:srgbClr val="A5335F"/>
                 </a:solidFill>
                 <a:latin typeface="Verdana"/>
               </a:rPr>
@@ -8512,7 +8512,7 @@
             </a:avLst>
           </a:prstGeom>
           <a:solidFill>
-            <a:srgbClr val="E3F1E7"/>
+            <a:srgbClr val="FCE9F0"/>
           </a:solidFill>
           <a:ln>
             <a:noFill/>
@@ -8569,7 +8569,7 @@
             <a:r>
               <a:rPr sz="1500" b="1" i="0">
                 <a:solidFill>
-                  <a:srgbClr val="166534"/>
+                  <a:srgbClr val="A5335F"/>
                 </a:solidFill>
                 <a:latin typeface="Verdana"/>
               </a:rPr>
@@ -8680,7 +8680,7 @@
             </a:avLst>
           </a:prstGeom>
           <a:solidFill>
-            <a:srgbClr val="E3F1E7"/>
+            <a:srgbClr val="FCE9F0"/>
           </a:solidFill>
           <a:ln>
             <a:noFill/>
@@ -8737,7 +8737,7 @@
             <a:r>
               <a:rPr sz="1500" b="1" i="0">
                 <a:solidFill>
-                  <a:srgbClr val="166534"/>
+                  <a:srgbClr val="A5335F"/>
                 </a:solidFill>
                 <a:latin typeface="Verdana"/>
               </a:rPr>
@@ -8848,7 +8848,7 @@
             </a:avLst>
           </a:prstGeom>
           <a:solidFill>
-            <a:srgbClr val="E3F1E7"/>
+            <a:srgbClr val="FCE9F0"/>
           </a:solidFill>
           <a:ln>
             <a:noFill/>
@@ -8905,7 +8905,7 @@
             <a:r>
               <a:rPr sz="1500" b="1" i="0">
                 <a:solidFill>
-                  <a:srgbClr val="166534"/>
+                  <a:srgbClr val="A5335F"/>
                 </a:solidFill>
                 <a:latin typeface="Verdana"/>
               </a:rPr>
@@ -9016,7 +9016,7 @@
             </a:avLst>
           </a:prstGeom>
           <a:solidFill>
-            <a:srgbClr val="E3F1E7"/>
+            <a:srgbClr val="FCE9F0"/>
           </a:solidFill>
           <a:ln>
             <a:noFill/>
@@ -9073,7 +9073,7 @@
             <a:r>
               <a:rPr sz="1500" b="1" i="0">
                 <a:solidFill>
-                  <a:srgbClr val="166534"/>
+                  <a:srgbClr val="A5335F"/>
                 </a:solidFill>
                 <a:latin typeface="Verdana"/>
               </a:rPr>
@@ -9289,7 +9289,7 @@
             <a:r>
               <a:rPr sz="1300" b="1" i="0" spc="156">
                 <a:solidFill>
-                  <a:srgbClr val="166534"/>
+                  <a:srgbClr val="A5335F"/>
                 </a:solidFill>
                 <a:latin typeface="Verdana"/>
               </a:rPr>
@@ -9439,7 +9439,7 @@
             </a:avLst>
           </a:prstGeom>
           <a:solidFill>
-            <a:srgbClr val="E3F1E7"/>
+            <a:srgbClr val="FCE9F0"/>
           </a:solidFill>
           <a:ln>
             <a:noFill/>
@@ -9496,7 +9496,7 @@
             <a:r>
               <a:rPr sz="1500" b="1" i="0">
                 <a:solidFill>
-                  <a:srgbClr val="166534"/>
+                  <a:srgbClr val="A5335F"/>
                 </a:solidFill>
                 <a:latin typeface="Verdana"/>
               </a:rPr>
@@ -9616,7 +9616,7 @@
             </a:avLst>
           </a:prstGeom>
           <a:solidFill>
-            <a:srgbClr val="E3F1E7"/>
+            <a:srgbClr val="FCE9F0"/>
           </a:solidFill>
           <a:ln>
             <a:noFill/>
@@ -9673,7 +9673,7 @@
             <a:r>
               <a:rPr sz="1500" b="1" i="0">
                 <a:solidFill>
-                  <a:srgbClr val="166534"/>
+                  <a:srgbClr val="A5335F"/>
                 </a:solidFill>
                 <a:latin typeface="Verdana"/>
               </a:rPr>
@@ -9793,7 +9793,7 @@
             </a:avLst>
           </a:prstGeom>
           <a:solidFill>
-            <a:srgbClr val="E3F1E7"/>
+            <a:srgbClr val="FCE9F0"/>
           </a:solidFill>
           <a:ln>
             <a:noFill/>
@@ -9850,7 +9850,7 @@
             <a:r>
               <a:rPr sz="1500" b="1" i="0">
                 <a:solidFill>
-                  <a:srgbClr val="166534"/>
+                  <a:srgbClr val="A5335F"/>
                 </a:solidFill>
                 <a:latin typeface="Verdana"/>
               </a:rPr>
@@ -9970,7 +9970,7 @@
             </a:avLst>
           </a:prstGeom>
           <a:solidFill>
-            <a:srgbClr val="E3F1E7"/>
+            <a:srgbClr val="FCE9F0"/>
           </a:solidFill>
           <a:ln>
             <a:noFill/>
@@ -10027,7 +10027,7 @@
             <a:r>
               <a:rPr sz="1500" b="1" i="0">
                 <a:solidFill>
-                  <a:srgbClr val="166534"/>
+                  <a:srgbClr val="A5335F"/>
                 </a:solidFill>
                 <a:latin typeface="Verdana"/>
               </a:rPr>
@@ -10147,7 +10147,7 @@
             </a:avLst>
           </a:prstGeom>
           <a:solidFill>
-            <a:srgbClr val="E3F1E7"/>
+            <a:srgbClr val="FCE9F0"/>
           </a:solidFill>
           <a:ln>
             <a:noFill/>
@@ -10204,7 +10204,7 @@
             <a:r>
               <a:rPr sz="1500" b="1" i="0">
                 <a:solidFill>
-                  <a:srgbClr val="166534"/>
+                  <a:srgbClr val="A5335F"/>
                 </a:solidFill>
                 <a:latin typeface="Verdana"/>
               </a:rPr>
@@ -10324,7 +10324,7 @@
             </a:avLst>
           </a:prstGeom>
           <a:solidFill>
-            <a:srgbClr val="E3F1E7"/>
+            <a:srgbClr val="FCE9F0"/>
           </a:solidFill>
           <a:ln>
             <a:noFill/>
@@ -10381,7 +10381,7 @@
             <a:r>
               <a:rPr sz="1500" b="1" i="0">
                 <a:solidFill>
-                  <a:srgbClr val="166534"/>
+                  <a:srgbClr val="A5335F"/>
                 </a:solidFill>
                 <a:latin typeface="Verdana"/>
               </a:rPr>
@@ -10501,7 +10501,7 @@
             </a:avLst>
           </a:prstGeom>
           <a:solidFill>
-            <a:srgbClr val="E3F1E7"/>
+            <a:srgbClr val="FCE9F0"/>
           </a:solidFill>
           <a:ln>
             <a:noFill/>
@@ -10558,7 +10558,7 @@
             <a:r>
               <a:rPr sz="1500" b="1" i="0">
                 <a:solidFill>
-                  <a:srgbClr val="166534"/>
+                  <a:srgbClr val="A5335F"/>
                 </a:solidFill>
                 <a:latin typeface="Verdana"/>
               </a:rPr>
@@ -10678,7 +10678,7 @@
             </a:avLst>
           </a:prstGeom>
           <a:solidFill>
-            <a:srgbClr val="E3F1E7"/>
+            <a:srgbClr val="FCE9F0"/>
           </a:solidFill>
           <a:ln>
             <a:noFill/>
@@ -10735,7 +10735,7 @@
             <a:r>
               <a:rPr sz="1500" b="1" i="0">
                 <a:solidFill>
-                  <a:srgbClr val="166534"/>
+                  <a:srgbClr val="A5335F"/>
                 </a:solidFill>
                 <a:latin typeface="Verdana"/>
               </a:rPr>
@@ -10960,7 +10960,7 @@
             <a:r>
               <a:rPr sz="1300" b="1" i="0" spc="156">
                 <a:solidFill>
-                  <a:srgbClr val="166534"/>
+                  <a:srgbClr val="A5335F"/>
                 </a:solidFill>
                 <a:latin typeface="Verdana"/>
               </a:rPr>
@@ -11110,7 +11110,7 @@
             </a:avLst>
           </a:prstGeom>
           <a:solidFill>
-            <a:srgbClr val="E3F1E7"/>
+            <a:srgbClr val="FCE9F0"/>
           </a:solidFill>
           <a:ln>
             <a:noFill/>
@@ -11167,7 +11167,7 @@
             <a:r>
               <a:rPr sz="1500" b="1" i="0">
                 <a:solidFill>
-                  <a:srgbClr val="166534"/>
+                  <a:srgbClr val="A5335F"/>
                 </a:solidFill>
                 <a:latin typeface="Verdana"/>
               </a:rPr>
@@ -11278,7 +11278,7 @@
             </a:avLst>
           </a:prstGeom>
           <a:solidFill>
-            <a:srgbClr val="E3F1E7"/>
+            <a:srgbClr val="FCE9F0"/>
           </a:solidFill>
           <a:ln>
             <a:noFill/>
@@ -11335,7 +11335,7 @@
             <a:r>
               <a:rPr sz="1500" b="1" i="0">
                 <a:solidFill>
-                  <a:srgbClr val="166534"/>
+                  <a:srgbClr val="A5335F"/>
                 </a:solidFill>
                 <a:latin typeface="Verdana"/>
               </a:rPr>
@@ -11446,7 +11446,7 @@
             </a:avLst>
           </a:prstGeom>
           <a:solidFill>
-            <a:srgbClr val="E3F1E7"/>
+            <a:srgbClr val="FCE9F0"/>
           </a:solidFill>
           <a:ln>
             <a:noFill/>
@@ -11503,7 +11503,7 @@
             <a:r>
               <a:rPr sz="1500" b="1" i="0">
                 <a:solidFill>
-                  <a:srgbClr val="166534"/>
+                  <a:srgbClr val="A5335F"/>
                 </a:solidFill>
                 <a:latin typeface="Verdana"/>
               </a:rPr>
@@ -11719,7 +11719,7 @@
             <a:r>
               <a:rPr sz="1300" b="1" i="0" spc="156">
                 <a:solidFill>
-                  <a:srgbClr val="166534"/>
+                  <a:srgbClr val="A5335F"/>
                 </a:solidFill>
                 <a:latin typeface="Verdana"/>
               </a:rPr>
@@ -11869,7 +11869,7 @@
             </a:avLst>
           </a:prstGeom>
           <a:solidFill>
-            <a:srgbClr val="E3F1E7"/>
+            <a:srgbClr val="FCE9F0"/>
           </a:solidFill>
           <a:ln>
             <a:noFill/>
@@ -11926,7 +11926,7 @@
             <a:r>
               <a:rPr sz="1500" b="1" i="0">
                 <a:solidFill>
-                  <a:srgbClr val="166534"/>
+                  <a:srgbClr val="A5335F"/>
                 </a:solidFill>
                 <a:latin typeface="Verdana"/>
               </a:rPr>
@@ -12046,7 +12046,7 @@
             </a:avLst>
           </a:prstGeom>
           <a:solidFill>
-            <a:srgbClr val="E3F1E7"/>
+            <a:srgbClr val="FCE9F0"/>
           </a:solidFill>
           <a:ln>
             <a:noFill/>
@@ -12103,7 +12103,7 @@
             <a:r>
               <a:rPr sz="1500" b="1" i="0">
                 <a:solidFill>
-                  <a:srgbClr val="166534"/>
+                  <a:srgbClr val="A5335F"/>
                 </a:solidFill>
                 <a:latin typeface="Verdana"/>
               </a:rPr>
@@ -12223,7 +12223,7 @@
             </a:avLst>
           </a:prstGeom>
           <a:solidFill>
-            <a:srgbClr val="E3F1E7"/>
+            <a:srgbClr val="FCE9F0"/>
           </a:solidFill>
           <a:ln>
             <a:noFill/>
@@ -12280,7 +12280,7 @@
             <a:r>
               <a:rPr sz="1500" b="1" i="0">
                 <a:solidFill>
-                  <a:srgbClr val="166534"/>
+                  <a:srgbClr val="A5335F"/>
                 </a:solidFill>
                 <a:latin typeface="Verdana"/>
               </a:rPr>
@@ -12968,7 +12968,7 @@
             <a:r>
               <a:rPr sz="1300" b="1" i="0" spc="156">
                 <a:solidFill>
-                  <a:srgbClr val="166534"/>
+                  <a:srgbClr val="A5335F"/>
                 </a:solidFill>
                 <a:latin typeface="Verdana"/>
               </a:rPr>
@@ -13079,7 +13079,7 @@
             </a:avLst>
           </a:prstGeom>
           <a:solidFill>
-            <a:srgbClr val="E3F1E7"/>
+            <a:srgbClr val="FCE9F0"/>
           </a:solidFill>
           <a:ln>
             <a:noFill/>
@@ -13136,7 +13136,7 @@
             <a:r>
               <a:rPr sz="1500" b="1" i="0">
                 <a:solidFill>
-                  <a:srgbClr val="166534"/>
+                  <a:srgbClr val="A5335F"/>
                 </a:solidFill>
                 <a:latin typeface="Verdana"/>
               </a:rPr>
@@ -13247,7 +13247,7 @@
             </a:avLst>
           </a:prstGeom>
           <a:solidFill>
-            <a:srgbClr val="E3F1E7"/>
+            <a:srgbClr val="FCE9F0"/>
           </a:solidFill>
           <a:ln>
             <a:noFill/>
@@ -13304,7 +13304,7 @@
             <a:r>
               <a:rPr sz="1500" b="1" i="0">
                 <a:solidFill>
-                  <a:srgbClr val="166534"/>
+                  <a:srgbClr val="A5335F"/>
                 </a:solidFill>
                 <a:latin typeface="Verdana"/>
               </a:rPr>
@@ -13415,7 +13415,7 @@
             </a:avLst>
           </a:prstGeom>
           <a:solidFill>
-            <a:srgbClr val="E3F1E7"/>
+            <a:srgbClr val="FCE9F0"/>
           </a:solidFill>
           <a:ln>
             <a:noFill/>
@@ -13472,7 +13472,7 @@
             <a:r>
               <a:rPr sz="1500" b="1" i="0">
                 <a:solidFill>
-                  <a:srgbClr val="166534"/>
+                  <a:srgbClr val="A5335F"/>
                 </a:solidFill>
                 <a:latin typeface="Verdana"/>
               </a:rPr>
@@ -13583,7 +13583,7 @@
             </a:avLst>
           </a:prstGeom>
           <a:solidFill>
-            <a:srgbClr val="E3F1E7"/>
+            <a:srgbClr val="FCE9F0"/>
           </a:solidFill>
           <a:ln>
             <a:noFill/>
@@ -13640,7 +13640,7 @@
             <a:r>
               <a:rPr sz="1500" b="1" i="0">
                 <a:solidFill>
-                  <a:srgbClr val="166534"/>
+                  <a:srgbClr val="A5335F"/>
                 </a:solidFill>
                 <a:latin typeface="Verdana"/>
               </a:rPr>
@@ -13751,7 +13751,7 @@
             </a:avLst>
           </a:prstGeom>
           <a:solidFill>
-            <a:srgbClr val="E3F1E7"/>
+            <a:srgbClr val="FCE9F0"/>
           </a:solidFill>
           <a:ln>
             <a:noFill/>
@@ -13808,7 +13808,7 @@
             <a:r>
               <a:rPr sz="1500" b="1" i="0">
                 <a:solidFill>
-                  <a:srgbClr val="166534"/>
+                  <a:srgbClr val="A5335F"/>
                 </a:solidFill>
                 <a:latin typeface="Verdana"/>
               </a:rPr>
@@ -14024,7 +14024,7 @@
             <a:r>
               <a:rPr sz="1300" b="1" i="0" spc="156">
                 <a:solidFill>
-                  <a:srgbClr val="166534"/>
+                  <a:srgbClr val="A5335F"/>
                 </a:solidFill>
                 <a:latin typeface="Verdana"/>
               </a:rPr>
@@ -14964,7 +14964,7 @@
             <a:r>
               <a:rPr sz="1300" b="1" i="0" spc="156">
                 <a:solidFill>
-                  <a:srgbClr val="166534"/>
+                  <a:srgbClr val="A5335F"/>
                 </a:solidFill>
                 <a:latin typeface="Verdana"/>
               </a:rPr>
@@ -15904,7 +15904,7 @@
             <a:r>
               <a:rPr sz="1300" b="1" i="0" spc="156">
                 <a:solidFill>
-                  <a:srgbClr val="166534"/>
+                  <a:srgbClr val="A5335F"/>
                 </a:solidFill>
                 <a:latin typeface="Verdana"/>
               </a:rPr>
@@ -16106,7 +16106,7 @@
             <a:r>
               <a:rPr sz="1800" b="1" i="0">
                 <a:solidFill>
-                  <a:srgbClr val="166534"/>
+                  <a:srgbClr val="A5335F"/>
                 </a:solidFill>
                 <a:latin typeface="Verdana"/>
               </a:rPr>
@@ -16226,7 +16226,7 @@
             <a:r>
               <a:rPr sz="1800" b="1" i="0">
                 <a:solidFill>
-                  <a:srgbClr val="166534"/>
+                  <a:srgbClr val="A5335F"/>
                 </a:solidFill>
                 <a:latin typeface="Verdana"/>
               </a:rPr>
@@ -16346,7 +16346,7 @@
             <a:r>
               <a:rPr sz="1800" b="1" i="0">
                 <a:solidFill>
-                  <a:srgbClr val="166534"/>
+                  <a:srgbClr val="A5335F"/>
                 </a:solidFill>
                 <a:latin typeface="Verdana"/>
               </a:rPr>
@@ -16647,7 +16647,7 @@
             <a:r>
               <a:rPr sz="1300" b="1" i="0" spc="156">
                 <a:solidFill>
-                  <a:srgbClr val="166534"/>
+                  <a:srgbClr val="A5335F"/>
                 </a:solidFill>
                 <a:latin typeface="Verdana"/>
               </a:rPr>
@@ -16797,7 +16797,7 @@
             </a:avLst>
           </a:prstGeom>
           <a:solidFill>
-            <a:srgbClr val="E3F1E7"/>
+            <a:srgbClr val="FCE9F0"/>
           </a:solidFill>
           <a:ln>
             <a:noFill/>
@@ -16854,7 +16854,7 @@
             <a:r>
               <a:rPr sz="1500" b="1" i="0">
                 <a:solidFill>
-                  <a:srgbClr val="166534"/>
+                  <a:srgbClr val="A5335F"/>
                 </a:solidFill>
                 <a:latin typeface="Verdana"/>
               </a:rPr>
@@ -16965,7 +16965,7 @@
             </a:avLst>
           </a:prstGeom>
           <a:solidFill>
-            <a:srgbClr val="E3F1E7"/>
+            <a:srgbClr val="FCE9F0"/>
           </a:solidFill>
           <a:ln>
             <a:noFill/>
@@ -17022,7 +17022,7 @@
             <a:r>
               <a:rPr sz="1500" b="1" i="0">
                 <a:solidFill>
-                  <a:srgbClr val="166534"/>
+                  <a:srgbClr val="A5335F"/>
                 </a:solidFill>
                 <a:latin typeface="Verdana"/>
               </a:rPr>
@@ -17133,7 +17133,7 @@
             </a:avLst>
           </a:prstGeom>
           <a:solidFill>
-            <a:srgbClr val="E3F1E7"/>
+            <a:srgbClr val="FCE9F0"/>
           </a:solidFill>
           <a:ln>
             <a:noFill/>
@@ -17190,7 +17190,7 @@
             <a:r>
               <a:rPr sz="1500" b="1" i="0">
                 <a:solidFill>
-                  <a:srgbClr val="166534"/>
+                  <a:srgbClr val="A5335F"/>
                 </a:solidFill>
                 <a:latin typeface="Verdana"/>
               </a:rPr>
@@ -17301,7 +17301,7 @@
             </a:avLst>
           </a:prstGeom>
           <a:solidFill>
-            <a:srgbClr val="E3F1E7"/>
+            <a:srgbClr val="FCE9F0"/>
           </a:solidFill>
           <a:ln>
             <a:noFill/>
@@ -17358,7 +17358,7 @@
             <a:r>
               <a:rPr sz="1500" b="1" i="0">
                 <a:solidFill>
-                  <a:srgbClr val="166534"/>
+                  <a:srgbClr val="A5335F"/>
                 </a:solidFill>
                 <a:latin typeface="Verdana"/>
               </a:rPr>
@@ -17469,7 +17469,7 @@
             </a:avLst>
           </a:prstGeom>
           <a:solidFill>
-            <a:srgbClr val="E3F1E7"/>
+            <a:srgbClr val="FCE9F0"/>
           </a:solidFill>
           <a:ln>
             <a:noFill/>
@@ -17526,7 +17526,7 @@
             <a:r>
               <a:rPr sz="1500" b="1" i="0">
                 <a:solidFill>
-                  <a:srgbClr val="166534"/>
+                  <a:srgbClr val="A5335F"/>
                 </a:solidFill>
                 <a:latin typeface="Verdana"/>
               </a:rPr>
@@ -17637,7 +17637,7 @@
             </a:avLst>
           </a:prstGeom>
           <a:solidFill>
-            <a:srgbClr val="E3F1E7"/>
+            <a:srgbClr val="FCE9F0"/>
           </a:solidFill>
           <a:ln>
             <a:noFill/>
@@ -17694,7 +17694,7 @@
             <a:r>
               <a:rPr sz="1500" b="1" i="0">
                 <a:solidFill>
-                  <a:srgbClr val="166534"/>
+                  <a:srgbClr val="A5335F"/>
                 </a:solidFill>
                 <a:latin typeface="Verdana"/>
               </a:rPr>
@@ -17910,7 +17910,7 @@
             <a:r>
               <a:rPr sz="1300" b="1" i="0" spc="156">
                 <a:solidFill>
-                  <a:srgbClr val="166534"/>
+                  <a:srgbClr val="A5335F"/>
                 </a:solidFill>
                 <a:latin typeface="Verdana"/>
               </a:rPr>
@@ -18060,7 +18060,7 @@
             </a:avLst>
           </a:prstGeom>
           <a:solidFill>
-            <a:srgbClr val="E3F1E7"/>
+            <a:srgbClr val="FCE9F0"/>
           </a:solidFill>
           <a:ln>
             <a:noFill/>
@@ -18117,7 +18117,7 @@
             <a:r>
               <a:rPr sz="1500" b="1" i="0">
                 <a:solidFill>
-                  <a:srgbClr val="166534"/>
+                  <a:srgbClr val="A5335F"/>
                 </a:solidFill>
                 <a:latin typeface="Verdana"/>
               </a:rPr>
@@ -18237,7 +18237,7 @@
             </a:avLst>
           </a:prstGeom>
           <a:solidFill>
-            <a:srgbClr val="E3F1E7"/>
+            <a:srgbClr val="FCE9F0"/>
           </a:solidFill>
           <a:ln>
             <a:noFill/>
@@ -18294,7 +18294,7 @@
             <a:r>
               <a:rPr sz="1500" b="1" i="0">
                 <a:solidFill>
-                  <a:srgbClr val="166534"/>
+                  <a:srgbClr val="A5335F"/>
                 </a:solidFill>
                 <a:latin typeface="Verdana"/>
               </a:rPr>
@@ -18414,7 +18414,7 @@
             </a:avLst>
           </a:prstGeom>
           <a:solidFill>
-            <a:srgbClr val="E3F1E7"/>
+            <a:srgbClr val="FCE9F0"/>
           </a:solidFill>
           <a:ln>
             <a:noFill/>
@@ -18471,7 +18471,7 @@
             <a:r>
               <a:rPr sz="1500" b="1" i="0">
                 <a:solidFill>
-                  <a:srgbClr val="166534"/>
+                  <a:srgbClr val="A5335F"/>
                 </a:solidFill>
                 <a:latin typeface="Verdana"/>
               </a:rPr>
@@ -18591,7 +18591,7 @@
             </a:avLst>
           </a:prstGeom>
           <a:solidFill>
-            <a:srgbClr val="E3F1E7"/>
+            <a:srgbClr val="FCE9F0"/>
           </a:solidFill>
           <a:ln>
             <a:noFill/>
@@ -18648,7 +18648,7 @@
             <a:r>
               <a:rPr sz="1500" b="1" i="0">
                 <a:solidFill>
-                  <a:srgbClr val="166534"/>
+                  <a:srgbClr val="A5335F"/>
                 </a:solidFill>
                 <a:latin typeface="Verdana"/>
               </a:rPr>
@@ -18768,7 +18768,7 @@
             </a:avLst>
           </a:prstGeom>
           <a:solidFill>
-            <a:srgbClr val="E3F1E7"/>
+            <a:srgbClr val="FCE9F0"/>
           </a:solidFill>
           <a:ln>
             <a:noFill/>
@@ -18825,7 +18825,7 @@
             <a:r>
               <a:rPr sz="1500" b="1" i="0">
                 <a:solidFill>
-                  <a:srgbClr val="166534"/>
+                  <a:srgbClr val="A5335F"/>
                 </a:solidFill>
                 <a:latin typeface="Verdana"/>
               </a:rPr>
@@ -18945,7 +18945,7 @@
             </a:avLst>
           </a:prstGeom>
           <a:solidFill>
-            <a:srgbClr val="E3F1E7"/>
+            <a:srgbClr val="FCE9F0"/>
           </a:solidFill>
           <a:ln>
             <a:noFill/>
@@ -19002,7 +19002,7 @@
             <a:r>
               <a:rPr sz="1500" b="1" i="0">
                 <a:solidFill>
-                  <a:srgbClr val="166534"/>
+                  <a:srgbClr val="A5335F"/>
                 </a:solidFill>
                 <a:latin typeface="Verdana"/>
               </a:rPr>
@@ -19227,7 +19227,7 @@
             <a:r>
               <a:rPr sz="1300" b="1" i="0" spc="156">
                 <a:solidFill>
-                  <a:srgbClr val="166534"/>
+                  <a:srgbClr val="A5335F"/>
                 </a:solidFill>
                 <a:latin typeface="Verdana"/>
               </a:rPr>
@@ -19377,7 +19377,7 @@
             </a:avLst>
           </a:prstGeom>
           <a:solidFill>
-            <a:srgbClr val="E3F1E7"/>
+            <a:srgbClr val="FCE9F0"/>
           </a:solidFill>
           <a:ln>
             <a:noFill/>
@@ -19434,7 +19434,7 @@
             <a:r>
               <a:rPr sz="1500" b="1" i="0">
                 <a:solidFill>
-                  <a:srgbClr val="166534"/>
+                  <a:srgbClr val="A5335F"/>
                 </a:solidFill>
                 <a:latin typeface="Verdana"/>
               </a:rPr>
@@ -19545,7 +19545,7 @@
             </a:avLst>
           </a:prstGeom>
           <a:solidFill>
-            <a:srgbClr val="E3F1E7"/>
+            <a:srgbClr val="FCE9F0"/>
           </a:solidFill>
           <a:ln>
             <a:noFill/>
@@ -19602,7 +19602,7 @@
             <a:r>
               <a:rPr sz="1500" b="1" i="0">
                 <a:solidFill>
-                  <a:srgbClr val="166534"/>
+                  <a:srgbClr val="A5335F"/>
                 </a:solidFill>
                 <a:latin typeface="Verdana"/>
               </a:rPr>
@@ -19713,7 +19713,7 @@
             </a:avLst>
           </a:prstGeom>
           <a:solidFill>
-            <a:srgbClr val="E3F1E7"/>
+            <a:srgbClr val="FCE9F0"/>
           </a:solidFill>
           <a:ln>
             <a:noFill/>
@@ -19770,7 +19770,7 @@
             <a:r>
               <a:rPr sz="1500" b="1" i="0">
                 <a:solidFill>
-                  <a:srgbClr val="166534"/>
+                  <a:srgbClr val="A5335F"/>
                 </a:solidFill>
                 <a:latin typeface="Verdana"/>
               </a:rPr>
@@ -19881,7 +19881,7 @@
             </a:avLst>
           </a:prstGeom>
           <a:solidFill>
-            <a:srgbClr val="E3F1E7"/>
+            <a:srgbClr val="FCE9F0"/>
           </a:solidFill>
           <a:ln>
             <a:noFill/>
@@ -19938,7 +19938,7 @@
             <a:r>
               <a:rPr sz="1500" b="1" i="0">
                 <a:solidFill>
-                  <a:srgbClr val="166534"/>
+                  <a:srgbClr val="A5335F"/>
                 </a:solidFill>
                 <a:latin typeface="Verdana"/>
               </a:rPr>
@@ -20049,7 +20049,7 @@
             </a:avLst>
           </a:prstGeom>
           <a:solidFill>
-            <a:srgbClr val="E3F1E7"/>
+            <a:srgbClr val="FCE9F0"/>
           </a:solidFill>
           <a:ln>
             <a:noFill/>
@@ -20106,7 +20106,7 @@
             <a:r>
               <a:rPr sz="1500" b="1" i="0">
                 <a:solidFill>
-                  <a:srgbClr val="166534"/>
+                  <a:srgbClr val="A5335F"/>
                 </a:solidFill>
                 <a:latin typeface="Verdana"/>
               </a:rPr>
@@ -20217,7 +20217,7 @@
             </a:avLst>
           </a:prstGeom>
           <a:solidFill>
-            <a:srgbClr val="E3F1E7"/>
+            <a:srgbClr val="FCE9F0"/>
           </a:solidFill>
           <a:ln>
             <a:noFill/>
@@ -20274,7 +20274,7 @@
             <a:r>
               <a:rPr sz="1500" b="1" i="0">
                 <a:solidFill>
-                  <a:srgbClr val="166534"/>
+                  <a:srgbClr val="A5335F"/>
                 </a:solidFill>
                 <a:latin typeface="Verdana"/>
               </a:rPr>
@@ -20490,7 +20490,7 @@
             <a:r>
               <a:rPr sz="1300" b="1" i="0" spc="156">
                 <a:solidFill>
-                  <a:srgbClr val="166534"/>
+                  <a:srgbClr val="A5335F"/>
                 </a:solidFill>
                 <a:latin typeface="Verdana"/>
               </a:rPr>
@@ -20640,7 +20640,7 @@
             </a:avLst>
           </a:prstGeom>
           <a:solidFill>
-            <a:srgbClr val="E3F1E7"/>
+            <a:srgbClr val="FCE9F0"/>
           </a:solidFill>
           <a:ln>
             <a:noFill/>
@@ -20697,7 +20697,7 @@
             <a:r>
               <a:rPr sz="1500" b="1" i="0">
                 <a:solidFill>
-                  <a:srgbClr val="166534"/>
+                  <a:srgbClr val="A5335F"/>
                 </a:solidFill>
                 <a:latin typeface="Verdana"/>
               </a:rPr>
@@ -20817,7 +20817,7 @@
             </a:avLst>
           </a:prstGeom>
           <a:solidFill>
-            <a:srgbClr val="E3F1E7"/>
+            <a:srgbClr val="FCE9F0"/>
           </a:solidFill>
           <a:ln>
             <a:noFill/>
@@ -20874,7 +20874,7 @@
             <a:r>
               <a:rPr sz="1500" b="1" i="0">
                 <a:solidFill>
-                  <a:srgbClr val="166534"/>
+                  <a:srgbClr val="A5335F"/>
                 </a:solidFill>
                 <a:latin typeface="Verdana"/>
               </a:rPr>
@@ -20994,7 +20994,7 @@
             </a:avLst>
           </a:prstGeom>
           <a:solidFill>
-            <a:srgbClr val="E3F1E7"/>
+            <a:srgbClr val="FCE9F0"/>
           </a:solidFill>
           <a:ln>
             <a:noFill/>
@@ -21051,7 +21051,7 @@
             <a:r>
               <a:rPr sz="1500" b="1" i="0">
                 <a:solidFill>
-                  <a:srgbClr val="166534"/>
+                  <a:srgbClr val="A5335F"/>
                 </a:solidFill>
                 <a:latin typeface="Verdana"/>
               </a:rPr>
@@ -21171,7 +21171,7 @@
             </a:avLst>
           </a:prstGeom>
           <a:solidFill>
-            <a:srgbClr val="E3F1E7"/>
+            <a:srgbClr val="FCE9F0"/>
           </a:solidFill>
           <a:ln>
             <a:noFill/>
@@ -21228,7 +21228,7 @@
             <a:r>
               <a:rPr sz="1500" b="1" i="0">
                 <a:solidFill>
-                  <a:srgbClr val="166534"/>
+                  <a:srgbClr val="A5335F"/>
                 </a:solidFill>
                 <a:latin typeface="Verdana"/>
               </a:rPr>
@@ -21348,7 +21348,7 @@
             </a:avLst>
           </a:prstGeom>
           <a:solidFill>
-            <a:srgbClr val="E3F1E7"/>
+            <a:srgbClr val="FCE9F0"/>
           </a:solidFill>
           <a:ln>
             <a:noFill/>
@@ -21405,7 +21405,7 @@
             <a:r>
               <a:rPr sz="1500" b="1" i="0">
                 <a:solidFill>
-                  <a:srgbClr val="166534"/>
+                  <a:srgbClr val="A5335F"/>
                 </a:solidFill>
                 <a:latin typeface="Verdana"/>
               </a:rPr>
@@ -21525,7 +21525,7 @@
             </a:avLst>
           </a:prstGeom>
           <a:solidFill>
-            <a:srgbClr val="E3F1E7"/>
+            <a:srgbClr val="FCE9F0"/>
           </a:solidFill>
           <a:ln>
             <a:noFill/>
@@ -21582,7 +21582,7 @@
             <a:r>
               <a:rPr sz="1500" b="1" i="0">
                 <a:solidFill>
-                  <a:srgbClr val="166534"/>
+                  <a:srgbClr val="A5335F"/>
                 </a:solidFill>
                 <a:latin typeface="Verdana"/>
               </a:rPr>
